--- a/17_03_26_Bleher.pptx
+++ b/17_03_26_Bleher.pptx
@@ -5,37 +5,38 @@
     <p:sldMasterId id="2147483648" r:id="rId1"/>
   </p:sldMasterIdLst>
   <p:notesMasterIdLst>
-    <p:notesMasterId r:id="rId27"/>
+    <p:notesMasterId r:id="rId28"/>
   </p:notesMasterIdLst>
   <p:handoutMasterIdLst>
-    <p:handoutMasterId r:id="rId28"/>
+    <p:handoutMasterId r:id="rId29"/>
   </p:handoutMasterIdLst>
   <p:sldIdLst>
     <p:sldId id="2134804822" r:id="rId2"/>
     <p:sldId id="2134804830" r:id="rId3"/>
     <p:sldId id="2134804838" r:id="rId4"/>
     <p:sldId id="2134804852" r:id="rId5"/>
-    <p:sldId id="2134804845" r:id="rId6"/>
-    <p:sldId id="2134804844" r:id="rId7"/>
-    <p:sldId id="2134804854" r:id="rId8"/>
-    <p:sldId id="2134804840" r:id="rId9"/>
-    <p:sldId id="2134804855" r:id="rId10"/>
+    <p:sldId id="2134804862" r:id="rId6"/>
+    <p:sldId id="2134804861" r:id="rId7"/>
+    <p:sldId id="2134804845" r:id="rId8"/>
+    <p:sldId id="2134804860" r:id="rId9"/>
+    <p:sldId id="2134804854" r:id="rId10"/>
     <p:sldId id="2134804848" r:id="rId11"/>
-    <p:sldId id="2134804856" r:id="rId12"/>
-    <p:sldId id="2134804846" r:id="rId13"/>
-    <p:sldId id="2134804857" r:id="rId14"/>
-    <p:sldId id="2134804841" r:id="rId15"/>
-    <p:sldId id="2134804859" r:id="rId16"/>
-    <p:sldId id="2134804849" r:id="rId17"/>
-    <p:sldId id="2134804851" r:id="rId18"/>
-    <p:sldId id="2134804842" r:id="rId19"/>
-    <p:sldId id="2134804850" r:id="rId20"/>
-    <p:sldId id="2134804843" r:id="rId21"/>
-    <p:sldId id="4422" r:id="rId22"/>
-    <p:sldId id="4423" r:id="rId23"/>
-    <p:sldId id="4424" r:id="rId24"/>
+    <p:sldId id="2134804846" r:id="rId12"/>
+    <p:sldId id="2134804841" r:id="rId13"/>
+    <p:sldId id="2134804859" r:id="rId14"/>
+    <p:sldId id="2134804849" r:id="rId15"/>
+    <p:sldId id="2134804851" r:id="rId16"/>
+    <p:sldId id="2134804842" r:id="rId17"/>
+    <p:sldId id="2134804850" r:id="rId18"/>
+    <p:sldId id="2134804843" r:id="rId19"/>
+    <p:sldId id="4422" r:id="rId20"/>
+    <p:sldId id="4423" r:id="rId21"/>
+    <p:sldId id="4424" r:id="rId22"/>
+    <p:sldId id="2134804855" r:id="rId23"/>
+    <p:sldId id="2134804840" r:id="rId24"/>
     <p:sldId id="2134804858" r:id="rId25"/>
-    <p:sldId id="2134804847" r:id="rId26"/>
+    <p:sldId id="2134804857" r:id="rId26"/>
+    <p:sldId id="2134804847" r:id="rId27"/>
   </p:sldIdLst>
   <p:sldSz cx="12192000" cy="6858000"/>
   <p:notesSz cx="6858000" cy="9144000"/>
@@ -143,15 +144,13 @@
             <p14:sldId id="2134804830"/>
             <p14:sldId id="2134804838"/>
             <p14:sldId id="2134804852"/>
+            <p14:sldId id="2134804862"/>
+            <p14:sldId id="2134804861"/>
             <p14:sldId id="2134804845"/>
-            <p14:sldId id="2134804844"/>
+            <p14:sldId id="2134804860"/>
             <p14:sldId id="2134804854"/>
-            <p14:sldId id="2134804840"/>
-            <p14:sldId id="2134804855"/>
             <p14:sldId id="2134804848"/>
-            <p14:sldId id="2134804856"/>
             <p14:sldId id="2134804846"/>
-            <p14:sldId id="2134804857"/>
             <p14:sldId id="2134804841"/>
             <p14:sldId id="2134804859"/>
             <p14:sldId id="2134804849"/>
@@ -162,7 +161,10 @@
             <p14:sldId id="4422"/>
             <p14:sldId id="4423"/>
             <p14:sldId id="4424"/>
+            <p14:sldId id="2134804855"/>
+            <p14:sldId id="2134804840"/>
             <p14:sldId id="2134804858"/>
+            <p14:sldId id="2134804857"/>
             <p14:sldId id="2134804847"/>
           </p14:sldIdLst>
         </p14:section>
@@ -857,7 +859,7 @@
         <p:cNvPr id="1" name="">
           <a:extLst>
             <a:ext uri="{FF2B5EF4-FFF2-40B4-BE49-F238E27FC236}">
-              <a16:creationId xmlns:a16="http://schemas.microsoft.com/office/drawing/2014/main" id="{1098F916-8EE0-F7E9-BBAF-DCA840AF6C03}"/>
+              <a16:creationId xmlns:a16="http://schemas.microsoft.com/office/drawing/2014/main" id="{5E68B980-FD37-9287-6C38-623452B13982}"/>
             </a:ext>
           </a:extLst>
         </p:cNvPr>
@@ -877,7 +879,7 @@
           <p:cNvPr id="2" name="Folienbildplatzhalter 1">
             <a:extLst>
               <a:ext uri="{FF2B5EF4-FFF2-40B4-BE49-F238E27FC236}">
-                <a16:creationId xmlns:a16="http://schemas.microsoft.com/office/drawing/2014/main" id="{17B1A794-7BE0-F437-64F1-CFDA0671E30A}"/>
+                <a16:creationId xmlns:a16="http://schemas.microsoft.com/office/drawing/2014/main" id="{D57E7B85-32B0-C656-B602-A82449D69D1E}"/>
               </a:ext>
             </a:extLst>
           </p:cNvPr>
@@ -895,7 +897,7 @@
           <p:cNvPr id="3" name="Notizenplatzhalter 2">
             <a:extLst>
               <a:ext uri="{FF2B5EF4-FFF2-40B4-BE49-F238E27FC236}">
-                <a16:creationId xmlns:a16="http://schemas.microsoft.com/office/drawing/2014/main" id="{EACCC2E9-86C4-5E8A-79D5-E59D5B3C8DCF}"/>
+                <a16:creationId xmlns:a16="http://schemas.microsoft.com/office/drawing/2014/main" id="{4762789F-AC82-25AF-3FC4-CEB365A7BDA1}"/>
               </a:ext>
             </a:extLst>
           </p:cNvPr>
@@ -1001,7 +1003,7 @@
           <p:cNvPr id="4" name="Foliennummernplatzhalter 3">
             <a:extLst>
               <a:ext uri="{FF2B5EF4-FFF2-40B4-BE49-F238E27FC236}">
-                <a16:creationId xmlns:a16="http://schemas.microsoft.com/office/drawing/2014/main" id="{5A68D85F-1D9C-4DB2-253A-DE3FE5B51A24}"/>
+                <a16:creationId xmlns:a16="http://schemas.microsoft.com/office/drawing/2014/main" id="{AE6C9880-9FCD-0A8B-9BCA-BB5740A1719B}"/>
               </a:ext>
             </a:extLst>
           </p:cNvPr>
@@ -1028,7 +1030,7 @@
     </p:spTree>
     <p:extLst>
       <p:ext uri="{BB962C8B-B14F-4D97-AF65-F5344CB8AC3E}">
-        <p14:creationId xmlns:p14="http://schemas.microsoft.com/office/powerpoint/2010/main" val="3890903259"/>
+        <p14:creationId xmlns:p14="http://schemas.microsoft.com/office/powerpoint/2010/main" val="1569886133"/>
       </p:ext>
     </p:extLst>
   </p:cSld>
@@ -1046,7 +1048,7 @@
         <p:cNvPr id="1" name="">
           <a:extLst>
             <a:ext uri="{FF2B5EF4-FFF2-40B4-BE49-F238E27FC236}">
-              <a16:creationId xmlns:a16="http://schemas.microsoft.com/office/drawing/2014/main" id="{354FB7E6-DD2E-A4E4-E7D5-7108EDEFA238}"/>
+              <a16:creationId xmlns:a16="http://schemas.microsoft.com/office/drawing/2014/main" id="{E010C0B5-6639-5162-B585-E7FEDD5D77A2}"/>
             </a:ext>
           </a:extLst>
         </p:cNvPr>
@@ -1066,7 +1068,7 @@
           <p:cNvPr id="2" name="Folienbildplatzhalter 1">
             <a:extLst>
               <a:ext uri="{FF2B5EF4-FFF2-40B4-BE49-F238E27FC236}">
-                <a16:creationId xmlns:a16="http://schemas.microsoft.com/office/drawing/2014/main" id="{140BF9D9-AF36-1501-343F-45F666EE4555}"/>
+                <a16:creationId xmlns:a16="http://schemas.microsoft.com/office/drawing/2014/main" id="{98C3B9A8-666E-24C7-A2B7-CA131E5833A9}"/>
               </a:ext>
             </a:extLst>
           </p:cNvPr>
@@ -1084,7 +1086,7 @@
           <p:cNvPr id="3" name="Notizenplatzhalter 2">
             <a:extLst>
               <a:ext uri="{FF2B5EF4-FFF2-40B4-BE49-F238E27FC236}">
-                <a16:creationId xmlns:a16="http://schemas.microsoft.com/office/drawing/2014/main" id="{B447E684-6BA5-ECD1-209F-27EF92487037}"/>
+                <a16:creationId xmlns:a16="http://schemas.microsoft.com/office/drawing/2014/main" id="{3EC1710B-1727-B151-AC79-A7C073933DAB}"/>
               </a:ext>
             </a:extLst>
           </p:cNvPr>
@@ -1190,7 +1192,7 @@
           <p:cNvPr id="4" name="Foliennummernplatzhalter 3">
             <a:extLst>
               <a:ext uri="{FF2B5EF4-FFF2-40B4-BE49-F238E27FC236}">
-                <a16:creationId xmlns:a16="http://schemas.microsoft.com/office/drawing/2014/main" id="{BDCBD0C6-981D-DB32-5923-9F613AC87A2D}"/>
+                <a16:creationId xmlns:a16="http://schemas.microsoft.com/office/drawing/2014/main" id="{4BD19870-DC6C-F1C9-A82E-680C1CC474D3}"/>
               </a:ext>
             </a:extLst>
           </p:cNvPr>
@@ -1217,7 +1219,7 @@
     </p:spTree>
     <p:extLst>
       <p:ext uri="{BB962C8B-B14F-4D97-AF65-F5344CB8AC3E}">
-        <p14:creationId xmlns:p14="http://schemas.microsoft.com/office/powerpoint/2010/main" val="4232481214"/>
+        <p14:creationId xmlns:p14="http://schemas.microsoft.com/office/powerpoint/2010/main" val="3884052213"/>
       </p:ext>
     </p:extLst>
   </p:cSld>
@@ -1235,7 +1237,7 @@
         <p:cNvPr id="1" name="">
           <a:extLst>
             <a:ext uri="{FF2B5EF4-FFF2-40B4-BE49-F238E27FC236}">
-              <a16:creationId xmlns:a16="http://schemas.microsoft.com/office/drawing/2014/main" id="{5E68B980-FD37-9287-6C38-623452B13982}"/>
+              <a16:creationId xmlns:a16="http://schemas.microsoft.com/office/drawing/2014/main" id="{EB951F52-21A9-BAD1-EAA5-D5BCB8E49848}"/>
             </a:ext>
           </a:extLst>
         </p:cNvPr>
@@ -1255,7 +1257,7 @@
           <p:cNvPr id="2" name="Folienbildplatzhalter 1">
             <a:extLst>
               <a:ext uri="{FF2B5EF4-FFF2-40B4-BE49-F238E27FC236}">
-                <a16:creationId xmlns:a16="http://schemas.microsoft.com/office/drawing/2014/main" id="{D57E7B85-32B0-C656-B602-A82449D69D1E}"/>
+                <a16:creationId xmlns:a16="http://schemas.microsoft.com/office/drawing/2014/main" id="{3F4981A3-4D43-9895-BD39-198B06B4C9B9}"/>
               </a:ext>
             </a:extLst>
           </p:cNvPr>
@@ -1273,7 +1275,7 @@
           <p:cNvPr id="3" name="Notizenplatzhalter 2">
             <a:extLst>
               <a:ext uri="{FF2B5EF4-FFF2-40B4-BE49-F238E27FC236}">
-                <a16:creationId xmlns:a16="http://schemas.microsoft.com/office/drawing/2014/main" id="{4762789F-AC82-25AF-3FC4-CEB365A7BDA1}"/>
+                <a16:creationId xmlns:a16="http://schemas.microsoft.com/office/drawing/2014/main" id="{B873FEC8-A7B8-B236-BBCA-7AE474934964}"/>
               </a:ext>
             </a:extLst>
           </p:cNvPr>
@@ -1379,7 +1381,7 @@
           <p:cNvPr id="4" name="Foliennummernplatzhalter 3">
             <a:extLst>
               <a:ext uri="{FF2B5EF4-FFF2-40B4-BE49-F238E27FC236}">
-                <a16:creationId xmlns:a16="http://schemas.microsoft.com/office/drawing/2014/main" id="{AE6C9880-9FCD-0A8B-9BCA-BB5740A1719B}"/>
+                <a16:creationId xmlns:a16="http://schemas.microsoft.com/office/drawing/2014/main" id="{12E25707-544F-43C8-8188-476810AA1500}"/>
               </a:ext>
             </a:extLst>
           </p:cNvPr>
@@ -1406,7 +1408,7 @@
     </p:spTree>
     <p:extLst>
       <p:ext uri="{BB962C8B-B14F-4D97-AF65-F5344CB8AC3E}">
-        <p14:creationId xmlns:p14="http://schemas.microsoft.com/office/powerpoint/2010/main" val="1569886133"/>
+        <p14:creationId xmlns:p14="http://schemas.microsoft.com/office/powerpoint/2010/main" val="2600204224"/>
       </p:ext>
     </p:extLst>
   </p:cSld>
@@ -1424,7 +1426,7 @@
         <p:cNvPr id="1" name="">
           <a:extLst>
             <a:ext uri="{FF2B5EF4-FFF2-40B4-BE49-F238E27FC236}">
-              <a16:creationId xmlns:a16="http://schemas.microsoft.com/office/drawing/2014/main" id="{E010C0B5-6639-5162-B585-E7FEDD5D77A2}"/>
+              <a16:creationId xmlns:a16="http://schemas.microsoft.com/office/drawing/2014/main" id="{87485F7A-39B6-784C-46EC-C1239F98CFF8}"/>
             </a:ext>
           </a:extLst>
         </p:cNvPr>
@@ -1444,7 +1446,7 @@
           <p:cNvPr id="2" name="Folienbildplatzhalter 1">
             <a:extLst>
               <a:ext uri="{FF2B5EF4-FFF2-40B4-BE49-F238E27FC236}">
-                <a16:creationId xmlns:a16="http://schemas.microsoft.com/office/drawing/2014/main" id="{98C3B9A8-666E-24C7-A2B7-CA131E5833A9}"/>
+                <a16:creationId xmlns:a16="http://schemas.microsoft.com/office/drawing/2014/main" id="{437DB591-5E27-425F-70DE-3DF629419E1B}"/>
               </a:ext>
             </a:extLst>
           </p:cNvPr>
@@ -1462,7 +1464,7 @@
           <p:cNvPr id="3" name="Notizenplatzhalter 2">
             <a:extLst>
               <a:ext uri="{FF2B5EF4-FFF2-40B4-BE49-F238E27FC236}">
-                <a16:creationId xmlns:a16="http://schemas.microsoft.com/office/drawing/2014/main" id="{3EC1710B-1727-B151-AC79-A7C073933DAB}"/>
+                <a16:creationId xmlns:a16="http://schemas.microsoft.com/office/drawing/2014/main" id="{D46D4FD4-8E0A-675F-2DEA-59C3E894D9BA}"/>
               </a:ext>
             </a:extLst>
           </p:cNvPr>
@@ -1568,7 +1570,7 @@
           <p:cNvPr id="4" name="Foliennummernplatzhalter 3">
             <a:extLst>
               <a:ext uri="{FF2B5EF4-FFF2-40B4-BE49-F238E27FC236}">
-                <a16:creationId xmlns:a16="http://schemas.microsoft.com/office/drawing/2014/main" id="{4BD19870-DC6C-F1C9-A82E-680C1CC474D3}"/>
+                <a16:creationId xmlns:a16="http://schemas.microsoft.com/office/drawing/2014/main" id="{9FD2D196-306B-6EEF-FD48-8EBC6FB7950D}"/>
               </a:ext>
             </a:extLst>
           </p:cNvPr>
@@ -1595,7 +1597,7 @@
     </p:spTree>
     <p:extLst>
       <p:ext uri="{BB962C8B-B14F-4D97-AF65-F5344CB8AC3E}">
-        <p14:creationId xmlns:p14="http://schemas.microsoft.com/office/powerpoint/2010/main" val="3884052213"/>
+        <p14:creationId xmlns:p14="http://schemas.microsoft.com/office/powerpoint/2010/main" val="1636719675"/>
       </p:ext>
     </p:extLst>
   </p:cSld>
@@ -1613,7 +1615,7 @@
         <p:cNvPr id="1" name="">
           <a:extLst>
             <a:ext uri="{FF2B5EF4-FFF2-40B4-BE49-F238E27FC236}">
-              <a16:creationId xmlns:a16="http://schemas.microsoft.com/office/drawing/2014/main" id="{EB951F52-21A9-BAD1-EAA5-D5BCB8E49848}"/>
+              <a16:creationId xmlns:a16="http://schemas.microsoft.com/office/drawing/2014/main" id="{D830882B-C1CC-D3D2-3703-C93AAC98B49C}"/>
             </a:ext>
           </a:extLst>
         </p:cNvPr>
@@ -1633,7 +1635,7 @@
           <p:cNvPr id="2" name="Folienbildplatzhalter 1">
             <a:extLst>
               <a:ext uri="{FF2B5EF4-FFF2-40B4-BE49-F238E27FC236}">
-                <a16:creationId xmlns:a16="http://schemas.microsoft.com/office/drawing/2014/main" id="{3F4981A3-4D43-9895-BD39-198B06B4C9B9}"/>
+                <a16:creationId xmlns:a16="http://schemas.microsoft.com/office/drawing/2014/main" id="{5B69C5CC-373A-C38F-BD87-38BE571EE45B}"/>
               </a:ext>
             </a:extLst>
           </p:cNvPr>
@@ -1651,7 +1653,7 @@
           <p:cNvPr id="3" name="Notizenplatzhalter 2">
             <a:extLst>
               <a:ext uri="{FF2B5EF4-FFF2-40B4-BE49-F238E27FC236}">
-                <a16:creationId xmlns:a16="http://schemas.microsoft.com/office/drawing/2014/main" id="{B873FEC8-A7B8-B236-BBCA-7AE474934964}"/>
+                <a16:creationId xmlns:a16="http://schemas.microsoft.com/office/drawing/2014/main" id="{D0E6AE6A-0F93-3627-F735-05C1CF44DB3A}"/>
               </a:ext>
             </a:extLst>
           </p:cNvPr>
@@ -1757,7 +1759,7 @@
           <p:cNvPr id="4" name="Foliennummernplatzhalter 3">
             <a:extLst>
               <a:ext uri="{FF2B5EF4-FFF2-40B4-BE49-F238E27FC236}">
-                <a16:creationId xmlns:a16="http://schemas.microsoft.com/office/drawing/2014/main" id="{12E25707-544F-43C8-8188-476810AA1500}"/>
+                <a16:creationId xmlns:a16="http://schemas.microsoft.com/office/drawing/2014/main" id="{4037361A-04D2-249C-AE76-5675495F8574}"/>
               </a:ext>
             </a:extLst>
           </p:cNvPr>
@@ -1784,7 +1786,7 @@
     </p:spTree>
     <p:extLst>
       <p:ext uri="{BB962C8B-B14F-4D97-AF65-F5344CB8AC3E}">
-        <p14:creationId xmlns:p14="http://schemas.microsoft.com/office/powerpoint/2010/main" val="2600204224"/>
+        <p14:creationId xmlns:p14="http://schemas.microsoft.com/office/powerpoint/2010/main" val="1307621642"/>
       </p:ext>
     </p:extLst>
   </p:cSld>
@@ -1802,7 +1804,7 @@
         <p:cNvPr id="1" name="">
           <a:extLst>
             <a:ext uri="{FF2B5EF4-FFF2-40B4-BE49-F238E27FC236}">
-              <a16:creationId xmlns:a16="http://schemas.microsoft.com/office/drawing/2014/main" id="{87485F7A-39B6-784C-46EC-C1239F98CFF8}"/>
+              <a16:creationId xmlns:a16="http://schemas.microsoft.com/office/drawing/2014/main" id="{8733BC05-A67B-B6FB-4021-BD775F63C34E}"/>
             </a:ext>
           </a:extLst>
         </p:cNvPr>
@@ -1822,7 +1824,7 @@
           <p:cNvPr id="2" name="Folienbildplatzhalter 1">
             <a:extLst>
               <a:ext uri="{FF2B5EF4-FFF2-40B4-BE49-F238E27FC236}">
-                <a16:creationId xmlns:a16="http://schemas.microsoft.com/office/drawing/2014/main" id="{437DB591-5E27-425F-70DE-3DF629419E1B}"/>
+                <a16:creationId xmlns:a16="http://schemas.microsoft.com/office/drawing/2014/main" id="{9D495785-370C-EFD6-53EF-0D25AA0AA32D}"/>
               </a:ext>
             </a:extLst>
           </p:cNvPr>
@@ -1840,7 +1842,7 @@
           <p:cNvPr id="3" name="Notizenplatzhalter 2">
             <a:extLst>
               <a:ext uri="{FF2B5EF4-FFF2-40B4-BE49-F238E27FC236}">
-                <a16:creationId xmlns:a16="http://schemas.microsoft.com/office/drawing/2014/main" id="{D46D4FD4-8E0A-675F-2DEA-59C3E894D9BA}"/>
+                <a16:creationId xmlns:a16="http://schemas.microsoft.com/office/drawing/2014/main" id="{7C16A680-E8C7-6EE0-2794-2CEC9F46CA2C}"/>
               </a:ext>
             </a:extLst>
           </p:cNvPr>
@@ -1946,7 +1948,7 @@
           <p:cNvPr id="4" name="Foliennummernplatzhalter 3">
             <a:extLst>
               <a:ext uri="{FF2B5EF4-FFF2-40B4-BE49-F238E27FC236}">
-                <a16:creationId xmlns:a16="http://schemas.microsoft.com/office/drawing/2014/main" id="{9FD2D196-306B-6EEF-FD48-8EBC6FB7950D}"/>
+                <a16:creationId xmlns:a16="http://schemas.microsoft.com/office/drawing/2014/main" id="{F49480B5-478F-F51E-89CC-DB2108B0DA13}"/>
               </a:ext>
             </a:extLst>
           </p:cNvPr>
@@ -1973,7 +1975,7 @@
     </p:spTree>
     <p:extLst>
       <p:ext uri="{BB962C8B-B14F-4D97-AF65-F5344CB8AC3E}">
-        <p14:creationId xmlns:p14="http://schemas.microsoft.com/office/powerpoint/2010/main" val="1636719675"/>
+        <p14:creationId xmlns:p14="http://schemas.microsoft.com/office/powerpoint/2010/main" val="2958890968"/>
       </p:ext>
     </p:extLst>
   </p:cSld>
@@ -1988,13 +1990,7 @@
   <p:cSld>
     <p:spTree>
       <p:nvGrpSpPr>
-        <p:cNvPr id="1" name="">
-          <a:extLst>
-            <a:ext uri="{FF2B5EF4-FFF2-40B4-BE49-F238E27FC236}">
-              <a16:creationId xmlns:a16="http://schemas.microsoft.com/office/drawing/2014/main" id="{D830882B-C1CC-D3D2-3703-C93AAC98B49C}"/>
-            </a:ext>
-          </a:extLst>
-        </p:cNvPr>
+        <p:cNvPr id="1" name=""/>
         <p:cNvGrpSpPr/>
         <p:nvPr/>
       </p:nvGrpSpPr>
@@ -2008,13 +2004,7 @@
       </p:grpSpPr>
       <p:sp>
         <p:nvSpPr>
-          <p:cNvPr id="2" name="Folienbildplatzhalter 1">
-            <a:extLst>
-              <a:ext uri="{FF2B5EF4-FFF2-40B4-BE49-F238E27FC236}">
-                <a16:creationId xmlns:a16="http://schemas.microsoft.com/office/drawing/2014/main" id="{5B69C5CC-373A-C38F-BD87-38BE571EE45B}"/>
-              </a:ext>
-            </a:extLst>
-          </p:cNvPr>
+          <p:cNvPr id="2" name="Folienbildplatzhalter 1"/>
           <p:cNvSpPr>
             <a:spLocks noGrp="1" noRot="1" noChangeAspect="1"/>
           </p:cNvSpPr>
@@ -2026,13 +2016,7 @@
       </p:sp>
       <p:sp>
         <p:nvSpPr>
-          <p:cNvPr id="3" name="Notizenplatzhalter 2">
-            <a:extLst>
-              <a:ext uri="{FF2B5EF4-FFF2-40B4-BE49-F238E27FC236}">
-                <a16:creationId xmlns:a16="http://schemas.microsoft.com/office/drawing/2014/main" id="{D0E6AE6A-0F93-3627-F735-05C1CF44DB3A}"/>
-              </a:ext>
-            </a:extLst>
-          </p:cNvPr>
+          <p:cNvPr id="3" name="Notizenplatzhalter 2"/>
           <p:cNvSpPr>
             <a:spLocks noGrp="1"/>
           </p:cNvSpPr>
@@ -2045,100 +2029,17 @@
           <a:bodyPr/>
           <a:lstStyle/>
           <a:p>
-            <a:pPr marL="0" marR="0" lvl="0" indent="0" algn="l" defTabSz="914400" rtl="0" eaLnBrk="1" fontAlgn="auto" latinLnBrk="0" hangingPunct="1">
-              <a:lnSpc>
-                <a:spcPct val="100000"/>
-              </a:lnSpc>
-              <a:spcBef>
-                <a:spcPts val="0"/>
-              </a:spcBef>
-              <a:spcAft>
-                <a:spcPts val="0"/>
-              </a:spcAft>
-              <a:buClrTx/>
-              <a:buSzTx/>
+            <a:pPr marL="0" indent="0">
               <a:buFont typeface="Symbol" panose="05050102010706020507" pitchFamily="18" charset="2"/>
               <a:buNone/>
-              <a:tabLst/>
-              <a:defRPr/>
             </a:pPr>
-            <a:endParaRPr lang="de-DE" sz="1200" kern="1200" dirty="0">
-              <a:solidFill>
-                <a:schemeClr val="tx1"/>
-              </a:solidFill>
-              <a:effectLst/>
-              <a:ea typeface="+mn-ea"/>
-              <a:cs typeface="+mn-cs"/>
-            </a:endParaRPr>
-          </a:p>
-          <a:p>
-            <a:pPr marL="171450" marR="0" lvl="0" indent="-171450" algn="l" defTabSz="914400" rtl="0" eaLnBrk="1" fontAlgn="auto" latinLnBrk="0" hangingPunct="1">
-              <a:lnSpc>
-                <a:spcPct val="100000"/>
-              </a:lnSpc>
-              <a:spcBef>
-                <a:spcPts val="0"/>
-              </a:spcBef>
-              <a:spcAft>
-                <a:spcPts val="0"/>
-              </a:spcAft>
-              <a:buClrTx/>
-              <a:buSzTx/>
-              <a:buFont typeface="Symbol" panose="05050102010706020507" pitchFamily="18" charset="2"/>
-              <a:buChar char="-"/>
-              <a:tabLst/>
-              <a:defRPr/>
-            </a:pPr>
-            <a:endParaRPr lang="de-DE" sz="1200" kern="1200" dirty="0">
-              <a:solidFill>
-                <a:schemeClr val="tx1"/>
-              </a:solidFill>
-              <a:effectLst/>
-              <a:ea typeface="+mn-ea"/>
-              <a:cs typeface="+mn-cs"/>
-            </a:endParaRPr>
-          </a:p>
-          <a:p>
-            <a:pPr marL="0" marR="0" lvl="0" indent="0" algn="l" defTabSz="914400" rtl="0" eaLnBrk="1" fontAlgn="auto" latinLnBrk="0" hangingPunct="1">
-              <a:lnSpc>
-                <a:spcPct val="100000"/>
-              </a:lnSpc>
-              <a:spcBef>
-                <a:spcPts val="0"/>
-              </a:spcBef>
-              <a:spcAft>
-                <a:spcPts val="0"/>
-              </a:spcAft>
-              <a:buClrTx/>
-              <a:buSzTx/>
-              <a:buFont typeface="Symbol" panose="05050102010706020507" pitchFamily="18" charset="2"/>
-              <a:buNone/>
-              <a:tabLst/>
-              <a:defRPr/>
-            </a:pPr>
-            <a:endParaRPr lang="de-DE" sz="1200" kern="1200" dirty="0">
-              <a:solidFill>
-                <a:schemeClr val="tx1"/>
-              </a:solidFill>
-              <a:effectLst/>
-              <a:ea typeface="+mn-ea"/>
-              <a:cs typeface="+mn-cs"/>
-            </a:endParaRPr>
-          </a:p>
-          <a:p>
-            <a:endParaRPr lang="de-DE" baseline="0" dirty="0"/>
-          </a:p>
-        </p:txBody>
-      </p:sp>
-      <p:sp>
-        <p:nvSpPr>
-          <p:cNvPr id="4" name="Foliennummernplatzhalter 3">
-            <a:extLst>
-              <a:ext uri="{FF2B5EF4-FFF2-40B4-BE49-F238E27FC236}">
-                <a16:creationId xmlns:a16="http://schemas.microsoft.com/office/drawing/2014/main" id="{4037361A-04D2-249C-AE76-5675495F8574}"/>
-              </a:ext>
-            </a:extLst>
-          </p:cNvPr>
+            <a:endParaRPr lang="de-DE" dirty="0"/>
+          </a:p>
+        </p:txBody>
+      </p:sp>
+      <p:sp>
+        <p:nvSpPr>
+          <p:cNvPr id="4" name="Foliennummernplatzhalter 3"/>
           <p:cNvSpPr>
             <a:spLocks noGrp="1"/>
           </p:cNvSpPr>
@@ -2162,7 +2063,7 @@
     </p:spTree>
     <p:extLst>
       <p:ext uri="{BB962C8B-B14F-4D97-AF65-F5344CB8AC3E}">
-        <p14:creationId xmlns:p14="http://schemas.microsoft.com/office/powerpoint/2010/main" val="1307621642"/>
+        <p14:creationId xmlns:p14="http://schemas.microsoft.com/office/powerpoint/2010/main" val="1862030830"/>
       </p:ext>
     </p:extLst>
   </p:cSld>
@@ -2177,13 +2078,7 @@
   <p:cSld>
     <p:spTree>
       <p:nvGrpSpPr>
-        <p:cNvPr id="1" name="">
-          <a:extLst>
-            <a:ext uri="{FF2B5EF4-FFF2-40B4-BE49-F238E27FC236}">
-              <a16:creationId xmlns:a16="http://schemas.microsoft.com/office/drawing/2014/main" id="{8733BC05-A67B-B6FB-4021-BD775F63C34E}"/>
-            </a:ext>
-          </a:extLst>
-        </p:cNvPr>
+        <p:cNvPr id="1" name=""/>
         <p:cNvGrpSpPr/>
         <p:nvPr/>
       </p:nvGrpSpPr>
@@ -2197,13 +2092,7 @@
       </p:grpSpPr>
       <p:sp>
         <p:nvSpPr>
-          <p:cNvPr id="2" name="Folienbildplatzhalter 1">
-            <a:extLst>
-              <a:ext uri="{FF2B5EF4-FFF2-40B4-BE49-F238E27FC236}">
-                <a16:creationId xmlns:a16="http://schemas.microsoft.com/office/drawing/2014/main" id="{9D495785-370C-EFD6-53EF-0D25AA0AA32D}"/>
-              </a:ext>
-            </a:extLst>
-          </p:cNvPr>
+          <p:cNvPr id="2" name="Folienbildplatzhalter 1"/>
           <p:cNvSpPr>
             <a:spLocks noGrp="1" noRot="1" noChangeAspect="1"/>
           </p:cNvSpPr>
@@ -2215,13 +2104,7 @@
       </p:sp>
       <p:sp>
         <p:nvSpPr>
-          <p:cNvPr id="3" name="Notizenplatzhalter 2">
-            <a:extLst>
-              <a:ext uri="{FF2B5EF4-FFF2-40B4-BE49-F238E27FC236}">
-                <a16:creationId xmlns:a16="http://schemas.microsoft.com/office/drawing/2014/main" id="{7C16A680-E8C7-6EE0-2794-2CEC9F46CA2C}"/>
-              </a:ext>
-            </a:extLst>
-          </p:cNvPr>
+          <p:cNvPr id="3" name="Notizenplatzhalter 2"/>
           <p:cNvSpPr>
             <a:spLocks noGrp="1"/>
           </p:cNvSpPr>
@@ -2234,100 +2117,13 @@
           <a:bodyPr/>
           <a:lstStyle/>
           <a:p>
-            <a:pPr marL="0" marR="0" lvl="0" indent="0" algn="l" defTabSz="914400" rtl="0" eaLnBrk="1" fontAlgn="auto" latinLnBrk="0" hangingPunct="1">
-              <a:lnSpc>
-                <a:spcPct val="100000"/>
-              </a:lnSpc>
-              <a:spcBef>
-                <a:spcPts val="0"/>
-              </a:spcBef>
-              <a:spcAft>
-                <a:spcPts val="0"/>
-              </a:spcAft>
-              <a:buClrTx/>
-              <a:buSzTx/>
-              <a:buFont typeface="Symbol" panose="05050102010706020507" pitchFamily="18" charset="2"/>
-              <a:buNone/>
-              <a:tabLst/>
-              <a:defRPr/>
-            </a:pPr>
-            <a:endParaRPr lang="de-DE" sz="1200" kern="1200" dirty="0">
-              <a:solidFill>
-                <a:schemeClr val="tx1"/>
-              </a:solidFill>
-              <a:effectLst/>
-              <a:ea typeface="+mn-ea"/>
-              <a:cs typeface="+mn-cs"/>
-            </a:endParaRPr>
-          </a:p>
-          <a:p>
-            <a:pPr marL="171450" marR="0" lvl="0" indent="-171450" algn="l" defTabSz="914400" rtl="0" eaLnBrk="1" fontAlgn="auto" latinLnBrk="0" hangingPunct="1">
-              <a:lnSpc>
-                <a:spcPct val="100000"/>
-              </a:lnSpc>
-              <a:spcBef>
-                <a:spcPts val="0"/>
-              </a:spcBef>
-              <a:spcAft>
-                <a:spcPts val="0"/>
-              </a:spcAft>
-              <a:buClrTx/>
-              <a:buSzTx/>
-              <a:buFont typeface="Symbol" panose="05050102010706020507" pitchFamily="18" charset="2"/>
-              <a:buChar char="-"/>
-              <a:tabLst/>
-              <a:defRPr/>
-            </a:pPr>
-            <a:endParaRPr lang="de-DE" sz="1200" kern="1200" dirty="0">
-              <a:solidFill>
-                <a:schemeClr val="tx1"/>
-              </a:solidFill>
-              <a:effectLst/>
-              <a:ea typeface="+mn-ea"/>
-              <a:cs typeface="+mn-cs"/>
-            </a:endParaRPr>
-          </a:p>
-          <a:p>
-            <a:pPr marL="0" marR="0" lvl="0" indent="0" algn="l" defTabSz="914400" rtl="0" eaLnBrk="1" fontAlgn="auto" latinLnBrk="0" hangingPunct="1">
-              <a:lnSpc>
-                <a:spcPct val="100000"/>
-              </a:lnSpc>
-              <a:spcBef>
-                <a:spcPts val="0"/>
-              </a:spcBef>
-              <a:spcAft>
-                <a:spcPts val="0"/>
-              </a:spcAft>
-              <a:buClrTx/>
-              <a:buSzTx/>
-              <a:buFont typeface="Symbol" panose="05050102010706020507" pitchFamily="18" charset="2"/>
-              <a:buNone/>
-              <a:tabLst/>
-              <a:defRPr/>
-            </a:pPr>
-            <a:endParaRPr lang="de-DE" sz="1200" kern="1200" dirty="0">
-              <a:solidFill>
-                <a:schemeClr val="tx1"/>
-              </a:solidFill>
-              <a:effectLst/>
-              <a:ea typeface="+mn-ea"/>
-              <a:cs typeface="+mn-cs"/>
-            </a:endParaRPr>
-          </a:p>
-          <a:p>
-            <a:endParaRPr lang="de-DE" baseline="0" dirty="0"/>
-          </a:p>
-        </p:txBody>
-      </p:sp>
-      <p:sp>
-        <p:nvSpPr>
-          <p:cNvPr id="4" name="Foliennummernplatzhalter 3">
-            <a:extLst>
-              <a:ext uri="{FF2B5EF4-FFF2-40B4-BE49-F238E27FC236}">
-                <a16:creationId xmlns:a16="http://schemas.microsoft.com/office/drawing/2014/main" id="{F49480B5-478F-F51E-89CC-DB2108B0DA13}"/>
-              </a:ext>
-            </a:extLst>
-          </p:cNvPr>
+            <a:endParaRPr lang="de-DE" dirty="0"/>
+          </a:p>
+        </p:txBody>
+      </p:sp>
+      <p:sp>
+        <p:nvSpPr>
+          <p:cNvPr id="4" name="Foliennummernplatzhalter 3"/>
           <p:cNvSpPr>
             <a:spLocks noGrp="1"/>
           </p:cNvSpPr>
@@ -2351,7 +2147,7 @@
     </p:spTree>
     <p:extLst>
       <p:ext uri="{BB962C8B-B14F-4D97-AF65-F5344CB8AC3E}">
-        <p14:creationId xmlns:p14="http://schemas.microsoft.com/office/powerpoint/2010/main" val="2958890968"/>
+        <p14:creationId xmlns:p14="http://schemas.microsoft.com/office/powerpoint/2010/main" val="994062378"/>
       </p:ext>
     </p:extLst>
   </p:cSld>
@@ -2405,10 +2201,6 @@
           <a:bodyPr/>
           <a:lstStyle/>
           <a:p>
-            <a:pPr marL="0" indent="0">
-              <a:buFont typeface="Symbol" panose="05050102010706020507" pitchFamily="18" charset="2"/>
-              <a:buNone/>
-            </a:pPr>
             <a:endParaRPr lang="de-DE" dirty="0"/>
           </a:p>
         </p:txBody>
@@ -2439,7 +2231,7 @@
     </p:spTree>
     <p:extLst>
       <p:ext uri="{BB962C8B-B14F-4D97-AF65-F5344CB8AC3E}">
-        <p14:creationId xmlns:p14="http://schemas.microsoft.com/office/powerpoint/2010/main" val="1862030830"/>
+        <p14:creationId xmlns:p14="http://schemas.microsoft.com/office/powerpoint/2010/main" val="615270928"/>
       </p:ext>
     </p:extLst>
   </p:cSld>
@@ -2454,7 +2246,13 @@
   <p:cSld>
     <p:spTree>
       <p:nvGrpSpPr>
-        <p:cNvPr id="1" name=""/>
+        <p:cNvPr id="1" name="">
+          <a:extLst>
+            <a:ext uri="{FF2B5EF4-FFF2-40B4-BE49-F238E27FC236}">
+              <a16:creationId xmlns:a16="http://schemas.microsoft.com/office/drawing/2014/main" id="{E5529678-991D-E210-F0AE-8C8749AD839F}"/>
+            </a:ext>
+          </a:extLst>
+        </p:cNvPr>
         <p:cNvGrpSpPr/>
         <p:nvPr/>
       </p:nvGrpSpPr>
@@ -2468,7 +2266,13 @@
       </p:grpSpPr>
       <p:sp>
         <p:nvSpPr>
-          <p:cNvPr id="2" name="Folienbildplatzhalter 1"/>
+          <p:cNvPr id="2" name="Folienbildplatzhalter 1">
+            <a:extLst>
+              <a:ext uri="{FF2B5EF4-FFF2-40B4-BE49-F238E27FC236}">
+                <a16:creationId xmlns:a16="http://schemas.microsoft.com/office/drawing/2014/main" id="{FE9F83BD-F9EA-D2EB-0FBD-42616ECC3B42}"/>
+              </a:ext>
+            </a:extLst>
+          </p:cNvPr>
           <p:cNvSpPr>
             <a:spLocks noGrp="1" noRot="1" noChangeAspect="1"/>
           </p:cNvSpPr>
@@ -2480,7 +2284,13 @@
       </p:sp>
       <p:sp>
         <p:nvSpPr>
-          <p:cNvPr id="3" name="Notizenplatzhalter 2"/>
+          <p:cNvPr id="3" name="Notizenplatzhalter 2">
+            <a:extLst>
+              <a:ext uri="{FF2B5EF4-FFF2-40B4-BE49-F238E27FC236}">
+                <a16:creationId xmlns:a16="http://schemas.microsoft.com/office/drawing/2014/main" id="{EA744E70-F6C9-F5F9-8C57-E4D1A2C45D3C}"/>
+              </a:ext>
+            </a:extLst>
+          </p:cNvPr>
           <p:cNvSpPr>
             <a:spLocks noGrp="1"/>
           </p:cNvSpPr>
@@ -2493,13 +2303,100 @@
           <a:bodyPr/>
           <a:lstStyle/>
           <a:p>
-            <a:endParaRPr lang="de-DE" dirty="0"/>
-          </a:p>
-        </p:txBody>
-      </p:sp>
-      <p:sp>
-        <p:nvSpPr>
-          <p:cNvPr id="4" name="Foliennummernplatzhalter 3"/>
+            <a:pPr marL="0" marR="0" lvl="0" indent="0" algn="l" defTabSz="914400" rtl="0" eaLnBrk="1" fontAlgn="auto" latinLnBrk="0" hangingPunct="1">
+              <a:lnSpc>
+                <a:spcPct val="100000"/>
+              </a:lnSpc>
+              <a:spcBef>
+                <a:spcPts val="0"/>
+              </a:spcBef>
+              <a:spcAft>
+                <a:spcPts val="0"/>
+              </a:spcAft>
+              <a:buClrTx/>
+              <a:buSzTx/>
+              <a:buFont typeface="Symbol" panose="05050102010706020507" pitchFamily="18" charset="2"/>
+              <a:buNone/>
+              <a:tabLst/>
+              <a:defRPr/>
+            </a:pPr>
+            <a:endParaRPr lang="de-DE" sz="1200" kern="1200" dirty="0">
+              <a:solidFill>
+                <a:schemeClr val="tx1"/>
+              </a:solidFill>
+              <a:effectLst/>
+              <a:ea typeface="+mn-ea"/>
+              <a:cs typeface="+mn-cs"/>
+            </a:endParaRPr>
+          </a:p>
+          <a:p>
+            <a:pPr marL="171450" marR="0" lvl="0" indent="-171450" algn="l" defTabSz="914400" rtl="0" eaLnBrk="1" fontAlgn="auto" latinLnBrk="0" hangingPunct="1">
+              <a:lnSpc>
+                <a:spcPct val="100000"/>
+              </a:lnSpc>
+              <a:spcBef>
+                <a:spcPts val="0"/>
+              </a:spcBef>
+              <a:spcAft>
+                <a:spcPts val="0"/>
+              </a:spcAft>
+              <a:buClrTx/>
+              <a:buSzTx/>
+              <a:buFont typeface="Symbol" panose="05050102010706020507" pitchFamily="18" charset="2"/>
+              <a:buChar char="-"/>
+              <a:tabLst/>
+              <a:defRPr/>
+            </a:pPr>
+            <a:endParaRPr lang="de-DE" sz="1200" kern="1200" dirty="0">
+              <a:solidFill>
+                <a:schemeClr val="tx1"/>
+              </a:solidFill>
+              <a:effectLst/>
+              <a:ea typeface="+mn-ea"/>
+              <a:cs typeface="+mn-cs"/>
+            </a:endParaRPr>
+          </a:p>
+          <a:p>
+            <a:pPr marL="0" marR="0" lvl="0" indent="0" algn="l" defTabSz="914400" rtl="0" eaLnBrk="1" fontAlgn="auto" latinLnBrk="0" hangingPunct="1">
+              <a:lnSpc>
+                <a:spcPct val="100000"/>
+              </a:lnSpc>
+              <a:spcBef>
+                <a:spcPts val="0"/>
+              </a:spcBef>
+              <a:spcAft>
+                <a:spcPts val="0"/>
+              </a:spcAft>
+              <a:buClrTx/>
+              <a:buSzTx/>
+              <a:buFont typeface="Symbol" panose="05050102010706020507" pitchFamily="18" charset="2"/>
+              <a:buNone/>
+              <a:tabLst/>
+              <a:defRPr/>
+            </a:pPr>
+            <a:endParaRPr lang="de-DE" sz="1200" kern="1200" dirty="0">
+              <a:solidFill>
+                <a:schemeClr val="tx1"/>
+              </a:solidFill>
+              <a:effectLst/>
+              <a:ea typeface="+mn-ea"/>
+              <a:cs typeface="+mn-cs"/>
+            </a:endParaRPr>
+          </a:p>
+          <a:p>
+            <a:endParaRPr lang="de-DE" baseline="0" dirty="0"/>
+          </a:p>
+        </p:txBody>
+      </p:sp>
+      <p:sp>
+        <p:nvSpPr>
+          <p:cNvPr id="4" name="Foliennummernplatzhalter 3">
+            <a:extLst>
+              <a:ext uri="{FF2B5EF4-FFF2-40B4-BE49-F238E27FC236}">
+                <a16:creationId xmlns:a16="http://schemas.microsoft.com/office/drawing/2014/main" id="{451EF08A-214B-2DD0-8344-0AED2C9C3F01}"/>
+              </a:ext>
+            </a:extLst>
+          </p:cNvPr>
           <p:cNvSpPr>
             <a:spLocks noGrp="1"/>
           </p:cNvSpPr>
@@ -2523,7 +2420,7 @@
     </p:spTree>
     <p:extLst>
       <p:ext uri="{BB962C8B-B14F-4D97-AF65-F5344CB8AC3E}">
-        <p14:creationId xmlns:p14="http://schemas.microsoft.com/office/powerpoint/2010/main" val="994062378"/>
+        <p14:creationId xmlns:p14="http://schemas.microsoft.com/office/powerpoint/2010/main" val="1524718697"/>
       </p:ext>
     </p:extLst>
   </p:cSld>
@@ -2727,7 +2624,13 @@
   <p:cSld>
     <p:spTree>
       <p:nvGrpSpPr>
-        <p:cNvPr id="1" name=""/>
+        <p:cNvPr id="1" name="">
+          <a:extLst>
+            <a:ext uri="{FF2B5EF4-FFF2-40B4-BE49-F238E27FC236}">
+              <a16:creationId xmlns:a16="http://schemas.microsoft.com/office/drawing/2014/main" id="{99A85940-E713-A01C-E86B-2ADCEDAA81D9}"/>
+            </a:ext>
+          </a:extLst>
+        </p:cNvPr>
         <p:cNvGrpSpPr/>
         <p:nvPr/>
       </p:nvGrpSpPr>
@@ -2741,7 +2644,13 @@
       </p:grpSpPr>
       <p:sp>
         <p:nvSpPr>
-          <p:cNvPr id="2" name="Folienbildplatzhalter 1"/>
+          <p:cNvPr id="2" name="Folienbildplatzhalter 1">
+            <a:extLst>
+              <a:ext uri="{FF2B5EF4-FFF2-40B4-BE49-F238E27FC236}">
+                <a16:creationId xmlns:a16="http://schemas.microsoft.com/office/drawing/2014/main" id="{78BB379B-9D6D-1B32-D499-4455E49048DE}"/>
+              </a:ext>
+            </a:extLst>
+          </p:cNvPr>
           <p:cNvSpPr>
             <a:spLocks noGrp="1" noRot="1" noChangeAspect="1"/>
           </p:cNvSpPr>
@@ -2753,7 +2662,13 @@
       </p:sp>
       <p:sp>
         <p:nvSpPr>
-          <p:cNvPr id="3" name="Notizenplatzhalter 2"/>
+          <p:cNvPr id="3" name="Notizenplatzhalter 2">
+            <a:extLst>
+              <a:ext uri="{FF2B5EF4-FFF2-40B4-BE49-F238E27FC236}">
+                <a16:creationId xmlns:a16="http://schemas.microsoft.com/office/drawing/2014/main" id="{077431D3-F193-B655-4698-EA1DD9134CFD}"/>
+              </a:ext>
+            </a:extLst>
+          </p:cNvPr>
           <p:cNvSpPr>
             <a:spLocks noGrp="1"/>
           </p:cNvSpPr>
@@ -2766,13 +2681,100 @@
           <a:bodyPr/>
           <a:lstStyle/>
           <a:p>
-            <a:endParaRPr lang="de-DE" dirty="0"/>
-          </a:p>
-        </p:txBody>
-      </p:sp>
-      <p:sp>
-        <p:nvSpPr>
-          <p:cNvPr id="4" name="Foliennummernplatzhalter 3"/>
+            <a:pPr marL="0" marR="0" lvl="0" indent="0" algn="l" defTabSz="914400" rtl="0" eaLnBrk="1" fontAlgn="auto" latinLnBrk="0" hangingPunct="1">
+              <a:lnSpc>
+                <a:spcPct val="100000"/>
+              </a:lnSpc>
+              <a:spcBef>
+                <a:spcPts val="0"/>
+              </a:spcBef>
+              <a:spcAft>
+                <a:spcPts val="0"/>
+              </a:spcAft>
+              <a:buClrTx/>
+              <a:buSzTx/>
+              <a:buFont typeface="Symbol" panose="05050102010706020507" pitchFamily="18" charset="2"/>
+              <a:buNone/>
+              <a:tabLst/>
+              <a:defRPr/>
+            </a:pPr>
+            <a:endParaRPr lang="de-DE" sz="1200" kern="1200" dirty="0">
+              <a:solidFill>
+                <a:schemeClr val="tx1"/>
+              </a:solidFill>
+              <a:effectLst/>
+              <a:ea typeface="+mn-ea"/>
+              <a:cs typeface="+mn-cs"/>
+            </a:endParaRPr>
+          </a:p>
+          <a:p>
+            <a:pPr marL="171450" marR="0" lvl="0" indent="-171450" algn="l" defTabSz="914400" rtl="0" eaLnBrk="1" fontAlgn="auto" latinLnBrk="0" hangingPunct="1">
+              <a:lnSpc>
+                <a:spcPct val="100000"/>
+              </a:lnSpc>
+              <a:spcBef>
+                <a:spcPts val="0"/>
+              </a:spcBef>
+              <a:spcAft>
+                <a:spcPts val="0"/>
+              </a:spcAft>
+              <a:buClrTx/>
+              <a:buSzTx/>
+              <a:buFont typeface="Symbol" panose="05050102010706020507" pitchFamily="18" charset="2"/>
+              <a:buChar char="-"/>
+              <a:tabLst/>
+              <a:defRPr/>
+            </a:pPr>
+            <a:endParaRPr lang="de-DE" sz="1200" kern="1200" dirty="0">
+              <a:solidFill>
+                <a:schemeClr val="tx1"/>
+              </a:solidFill>
+              <a:effectLst/>
+              <a:ea typeface="+mn-ea"/>
+              <a:cs typeface="+mn-cs"/>
+            </a:endParaRPr>
+          </a:p>
+          <a:p>
+            <a:pPr marL="0" marR="0" lvl="0" indent="0" algn="l" defTabSz="914400" rtl="0" eaLnBrk="1" fontAlgn="auto" latinLnBrk="0" hangingPunct="1">
+              <a:lnSpc>
+                <a:spcPct val="100000"/>
+              </a:lnSpc>
+              <a:spcBef>
+                <a:spcPts val="0"/>
+              </a:spcBef>
+              <a:spcAft>
+                <a:spcPts val="0"/>
+              </a:spcAft>
+              <a:buClrTx/>
+              <a:buSzTx/>
+              <a:buFont typeface="Symbol" panose="05050102010706020507" pitchFamily="18" charset="2"/>
+              <a:buNone/>
+              <a:tabLst/>
+              <a:defRPr/>
+            </a:pPr>
+            <a:endParaRPr lang="de-DE" sz="1200" kern="1200" dirty="0">
+              <a:solidFill>
+                <a:schemeClr val="tx1"/>
+              </a:solidFill>
+              <a:effectLst/>
+              <a:ea typeface="+mn-ea"/>
+              <a:cs typeface="+mn-cs"/>
+            </a:endParaRPr>
+          </a:p>
+          <a:p>
+            <a:endParaRPr lang="de-DE" baseline="0" dirty="0"/>
+          </a:p>
+        </p:txBody>
+      </p:sp>
+      <p:sp>
+        <p:nvSpPr>
+          <p:cNvPr id="4" name="Foliennummernplatzhalter 3">
+            <a:extLst>
+              <a:ext uri="{FF2B5EF4-FFF2-40B4-BE49-F238E27FC236}">
+                <a16:creationId xmlns:a16="http://schemas.microsoft.com/office/drawing/2014/main" id="{0A80C469-232C-AAE6-5091-F3709DB780C9}"/>
+              </a:ext>
+            </a:extLst>
+          </p:cNvPr>
           <p:cNvSpPr>
             <a:spLocks noGrp="1"/>
           </p:cNvSpPr>
@@ -2796,7 +2798,7 @@
     </p:spTree>
     <p:extLst>
       <p:ext uri="{BB962C8B-B14F-4D97-AF65-F5344CB8AC3E}">
-        <p14:creationId xmlns:p14="http://schemas.microsoft.com/office/powerpoint/2010/main" val="615270928"/>
+        <p14:creationId xmlns:p14="http://schemas.microsoft.com/office/powerpoint/2010/main" val="2212059751"/>
       </p:ext>
     </p:extLst>
   </p:cSld>
@@ -3003,7 +3005,7 @@
         <p:cNvPr id="1" name="">
           <a:extLst>
             <a:ext uri="{FF2B5EF4-FFF2-40B4-BE49-F238E27FC236}">
-              <a16:creationId xmlns:a16="http://schemas.microsoft.com/office/drawing/2014/main" id="{58AA05A6-A4F1-BF7D-832A-33DBC2C10D63}"/>
+              <a16:creationId xmlns:a16="http://schemas.microsoft.com/office/drawing/2014/main" id="{1098F916-8EE0-F7E9-BBAF-DCA840AF6C03}"/>
             </a:ext>
           </a:extLst>
         </p:cNvPr>
@@ -3023,7 +3025,7 @@
           <p:cNvPr id="2" name="Folienbildplatzhalter 1">
             <a:extLst>
               <a:ext uri="{FF2B5EF4-FFF2-40B4-BE49-F238E27FC236}">
-                <a16:creationId xmlns:a16="http://schemas.microsoft.com/office/drawing/2014/main" id="{B6EB62B6-3A8F-F3F7-790A-145DFB75A2DB}"/>
+                <a16:creationId xmlns:a16="http://schemas.microsoft.com/office/drawing/2014/main" id="{17B1A794-7BE0-F437-64F1-CFDA0671E30A}"/>
               </a:ext>
             </a:extLst>
           </p:cNvPr>
@@ -3041,7 +3043,7 @@
           <p:cNvPr id="3" name="Notizenplatzhalter 2">
             <a:extLst>
               <a:ext uri="{FF2B5EF4-FFF2-40B4-BE49-F238E27FC236}">
-                <a16:creationId xmlns:a16="http://schemas.microsoft.com/office/drawing/2014/main" id="{838B8131-7165-7491-E6E9-44139DF5F0DE}"/>
+                <a16:creationId xmlns:a16="http://schemas.microsoft.com/office/drawing/2014/main" id="{EACCC2E9-86C4-5E8A-79D5-E59D5B3C8DCF}"/>
               </a:ext>
             </a:extLst>
           </p:cNvPr>
@@ -3147,7 +3149,7 @@
           <p:cNvPr id="4" name="Foliennummernplatzhalter 3">
             <a:extLst>
               <a:ext uri="{FF2B5EF4-FFF2-40B4-BE49-F238E27FC236}">
-                <a16:creationId xmlns:a16="http://schemas.microsoft.com/office/drawing/2014/main" id="{B8D9CAA3-AED1-A85E-0E84-DD40DD1E852C}"/>
+                <a16:creationId xmlns:a16="http://schemas.microsoft.com/office/drawing/2014/main" id="{5A68D85F-1D9C-4DB2-253A-DE3FE5B51A24}"/>
               </a:ext>
             </a:extLst>
           </p:cNvPr>
@@ -3174,7 +3176,7 @@
     </p:spTree>
     <p:extLst>
       <p:ext uri="{BB962C8B-B14F-4D97-AF65-F5344CB8AC3E}">
-        <p14:creationId xmlns:p14="http://schemas.microsoft.com/office/powerpoint/2010/main" val="1938344600"/>
+        <p14:creationId xmlns:p14="http://schemas.microsoft.com/office/powerpoint/2010/main" val="2424033632"/>
       </p:ext>
     </p:extLst>
   </p:cSld>
@@ -3184,7 +3186,7 @@
 </p:notes>
 </file>
 
-<file path=ppt/notesSlides/notesSlide3.xml><?xml version="1.0" encoding="utf-8"?>
+<file path=ppt/notesSlides/notesSlide23.xml><?xml version="1.0" encoding="utf-8"?>
 <p:notes xmlns:a="http://schemas.openxmlformats.org/drawingml/2006/main" xmlns:r="http://schemas.openxmlformats.org/officeDocument/2006/relationships" xmlns:p="http://schemas.openxmlformats.org/presentationml/2006/main">
   <p:cSld>
     <p:spTree>
@@ -3192,7 +3194,7 @@
         <p:cNvPr id="1" name="">
           <a:extLst>
             <a:ext uri="{FF2B5EF4-FFF2-40B4-BE49-F238E27FC236}">
-              <a16:creationId xmlns:a16="http://schemas.microsoft.com/office/drawing/2014/main" id="{ACC865DD-AD73-5FE5-5A0E-165E888573E1}"/>
+              <a16:creationId xmlns:a16="http://schemas.microsoft.com/office/drawing/2014/main" id="{58AA05A6-A4F1-BF7D-832A-33DBC2C10D63}"/>
             </a:ext>
           </a:extLst>
         </p:cNvPr>
@@ -3212,7 +3214,7 @@
           <p:cNvPr id="2" name="Folienbildplatzhalter 1">
             <a:extLst>
               <a:ext uri="{FF2B5EF4-FFF2-40B4-BE49-F238E27FC236}">
-                <a16:creationId xmlns:a16="http://schemas.microsoft.com/office/drawing/2014/main" id="{61FFD92C-C853-BAD3-1DBB-A5857514EB94}"/>
+                <a16:creationId xmlns:a16="http://schemas.microsoft.com/office/drawing/2014/main" id="{B6EB62B6-3A8F-F3F7-790A-145DFB75A2DB}"/>
               </a:ext>
             </a:extLst>
           </p:cNvPr>
@@ -3230,7 +3232,7 @@
           <p:cNvPr id="3" name="Notizenplatzhalter 2">
             <a:extLst>
               <a:ext uri="{FF2B5EF4-FFF2-40B4-BE49-F238E27FC236}">
-                <a16:creationId xmlns:a16="http://schemas.microsoft.com/office/drawing/2014/main" id="{E784D8EB-93F2-666E-61D4-8FE17AEBA657}"/>
+                <a16:creationId xmlns:a16="http://schemas.microsoft.com/office/drawing/2014/main" id="{838B8131-7165-7491-E6E9-44139DF5F0DE}"/>
               </a:ext>
             </a:extLst>
           </p:cNvPr>
@@ -3336,7 +3338,7 @@
           <p:cNvPr id="4" name="Foliennummernplatzhalter 3">
             <a:extLst>
               <a:ext uri="{FF2B5EF4-FFF2-40B4-BE49-F238E27FC236}">
-                <a16:creationId xmlns:a16="http://schemas.microsoft.com/office/drawing/2014/main" id="{5FFF318B-00A9-FDE3-D376-C2D83A2909F7}"/>
+                <a16:creationId xmlns:a16="http://schemas.microsoft.com/office/drawing/2014/main" id="{B8D9CAA3-AED1-A85E-0E84-DD40DD1E852C}"/>
               </a:ext>
             </a:extLst>
           </p:cNvPr>
@@ -3354,7 +3356,7 @@
           <a:p>
             <a:fld id="{A1D51158-57A2-499A-9688-191D0F3AC541}" type="slidenum">
               <a:rPr lang="de-DE" smtClean="0"/>
-              <a:t>5</a:t>
+              <a:t>26</a:t>
             </a:fld>
             <a:endParaRPr lang="de-DE"/>
           </a:p>
@@ -3363,7 +3365,7 @@
     </p:spTree>
     <p:extLst>
       <p:ext uri="{BB962C8B-B14F-4D97-AF65-F5344CB8AC3E}">
-        <p14:creationId xmlns:p14="http://schemas.microsoft.com/office/powerpoint/2010/main" val="3731347987"/>
+        <p14:creationId xmlns:p14="http://schemas.microsoft.com/office/powerpoint/2010/main" val="1938344600"/>
       </p:ext>
     </p:extLst>
   </p:cSld>
@@ -3373,7 +3375,7 @@
 </p:notes>
 </file>
 
-<file path=ppt/notesSlides/notesSlide4.xml><?xml version="1.0" encoding="utf-8"?>
+<file path=ppt/notesSlides/notesSlide3.xml><?xml version="1.0" encoding="utf-8"?>
 <p:notes xmlns:a="http://schemas.openxmlformats.org/drawingml/2006/main" xmlns:r="http://schemas.openxmlformats.org/officeDocument/2006/relationships" xmlns:p="http://schemas.openxmlformats.org/presentationml/2006/main">
   <p:cSld>
     <p:spTree>
@@ -3381,7 +3383,7 @@
         <p:cNvPr id="1" name="">
           <a:extLst>
             <a:ext uri="{FF2B5EF4-FFF2-40B4-BE49-F238E27FC236}">
-              <a16:creationId xmlns:a16="http://schemas.microsoft.com/office/drawing/2014/main" id="{14FDD157-6928-CD78-9C28-9FD0977D37B6}"/>
+              <a16:creationId xmlns:a16="http://schemas.microsoft.com/office/drawing/2014/main" id="{6E9CA960-2F25-D8FD-7FB2-C9E5C81BD9DC}"/>
             </a:ext>
           </a:extLst>
         </p:cNvPr>
@@ -3401,7 +3403,7 @@
           <p:cNvPr id="2" name="Folienbildplatzhalter 1">
             <a:extLst>
               <a:ext uri="{FF2B5EF4-FFF2-40B4-BE49-F238E27FC236}">
-                <a16:creationId xmlns:a16="http://schemas.microsoft.com/office/drawing/2014/main" id="{271685D1-CF17-928C-97FD-F08A58021B47}"/>
+                <a16:creationId xmlns:a16="http://schemas.microsoft.com/office/drawing/2014/main" id="{CAF2F8EE-E0E2-FD63-E6CC-6044204491BB}"/>
               </a:ext>
             </a:extLst>
           </p:cNvPr>
@@ -3419,132 +3421,7 @@
           <p:cNvPr id="3" name="Notizenplatzhalter 2">
             <a:extLst>
               <a:ext uri="{FF2B5EF4-FFF2-40B4-BE49-F238E27FC236}">
-                <a16:creationId xmlns:a16="http://schemas.microsoft.com/office/drawing/2014/main" id="{6C71D102-D2E0-63EA-F191-6E33DEEFADA4}"/>
-              </a:ext>
-            </a:extLst>
-          </p:cNvPr>
-          <p:cNvSpPr>
-            <a:spLocks noGrp="1"/>
-          </p:cNvSpPr>
-          <p:nvPr>
-            <p:ph type="body" idx="1"/>
-          </p:nvPr>
-        </p:nvSpPr>
-        <p:spPr/>
-        <p:txBody>
-          <a:bodyPr/>
-          <a:lstStyle/>
-          <a:p>
-            <a:pPr marL="0" marR="0" lvl="0" indent="0" algn="l" defTabSz="914400" rtl="0" eaLnBrk="1" fontAlgn="auto" latinLnBrk="0" hangingPunct="1">
-              <a:lnSpc>
-                <a:spcPct val="100000"/>
-              </a:lnSpc>
-              <a:spcBef>
-                <a:spcPts val="0"/>
-              </a:spcBef>
-              <a:spcAft>
-                <a:spcPts val="0"/>
-              </a:spcAft>
-              <a:buClrTx/>
-              <a:buSzTx/>
-              <a:buFontTx/>
-              <a:buNone/>
-              <a:tabLst/>
-              <a:defRPr/>
-            </a:pPr>
-            <a:endParaRPr lang="de-DE" dirty="0"/>
-          </a:p>
-        </p:txBody>
-      </p:sp>
-      <p:sp>
-        <p:nvSpPr>
-          <p:cNvPr id="4" name="Foliennummernplatzhalter 3">
-            <a:extLst>
-              <a:ext uri="{FF2B5EF4-FFF2-40B4-BE49-F238E27FC236}">
-                <a16:creationId xmlns:a16="http://schemas.microsoft.com/office/drawing/2014/main" id="{5AEC1DE9-4415-D3D1-9457-A770DF3AF58A}"/>
-              </a:ext>
-            </a:extLst>
-          </p:cNvPr>
-          <p:cNvSpPr>
-            <a:spLocks noGrp="1"/>
-          </p:cNvSpPr>
-          <p:nvPr>
-            <p:ph type="sldNum" sz="quarter" idx="10"/>
-          </p:nvPr>
-        </p:nvSpPr>
-        <p:spPr/>
-        <p:txBody>
-          <a:bodyPr/>
-          <a:lstStyle/>
-          <a:p>
-            <a:fld id="{A1D51158-57A2-499A-9688-191D0F3AC541}" type="slidenum">
-              <a:rPr lang="de-DE" smtClean="0"/>
-              <a:t>6</a:t>
-            </a:fld>
-            <a:endParaRPr lang="de-DE"/>
-          </a:p>
-        </p:txBody>
-      </p:sp>
-    </p:spTree>
-    <p:extLst>
-      <p:ext uri="{BB962C8B-B14F-4D97-AF65-F5344CB8AC3E}">
-        <p14:creationId xmlns:p14="http://schemas.microsoft.com/office/powerpoint/2010/main" val="3208556682"/>
-      </p:ext>
-    </p:extLst>
-  </p:cSld>
-  <p:clrMapOvr>
-    <a:masterClrMapping/>
-  </p:clrMapOvr>
-</p:notes>
-</file>
-
-<file path=ppt/notesSlides/notesSlide5.xml><?xml version="1.0" encoding="utf-8"?>
-<p:notes xmlns:a="http://schemas.openxmlformats.org/drawingml/2006/main" xmlns:r="http://schemas.openxmlformats.org/officeDocument/2006/relationships" xmlns:p="http://schemas.openxmlformats.org/presentationml/2006/main">
-  <p:cSld>
-    <p:spTree>
-      <p:nvGrpSpPr>
-        <p:cNvPr id="1" name="">
-          <a:extLst>
-            <a:ext uri="{FF2B5EF4-FFF2-40B4-BE49-F238E27FC236}">
-              <a16:creationId xmlns:a16="http://schemas.microsoft.com/office/drawing/2014/main" id="{99A85940-E713-A01C-E86B-2ADCEDAA81D9}"/>
-            </a:ext>
-          </a:extLst>
-        </p:cNvPr>
-        <p:cNvGrpSpPr/>
-        <p:nvPr/>
-      </p:nvGrpSpPr>
-      <p:grpSpPr>
-        <a:xfrm>
-          <a:off x="0" y="0"/>
-          <a:ext cx="0" cy="0"/>
-          <a:chOff x="0" y="0"/>
-          <a:chExt cx="0" cy="0"/>
-        </a:xfrm>
-      </p:grpSpPr>
-      <p:sp>
-        <p:nvSpPr>
-          <p:cNvPr id="2" name="Folienbildplatzhalter 1">
-            <a:extLst>
-              <a:ext uri="{FF2B5EF4-FFF2-40B4-BE49-F238E27FC236}">
-                <a16:creationId xmlns:a16="http://schemas.microsoft.com/office/drawing/2014/main" id="{78BB379B-9D6D-1B32-D499-4455E49048DE}"/>
-              </a:ext>
-            </a:extLst>
-          </p:cNvPr>
-          <p:cNvSpPr>
-            <a:spLocks noGrp="1" noRot="1" noChangeAspect="1"/>
-          </p:cNvSpPr>
-          <p:nvPr>
-            <p:ph type="sldImg"/>
-          </p:nvPr>
-        </p:nvSpPr>
-        <p:spPr/>
-      </p:sp>
-      <p:sp>
-        <p:nvSpPr>
-          <p:cNvPr id="3" name="Notizenplatzhalter 2">
-            <a:extLst>
-              <a:ext uri="{FF2B5EF4-FFF2-40B4-BE49-F238E27FC236}">
-                <a16:creationId xmlns:a16="http://schemas.microsoft.com/office/drawing/2014/main" id="{077431D3-F193-B655-4698-EA1DD9134CFD}"/>
+                <a16:creationId xmlns:a16="http://schemas.microsoft.com/office/drawing/2014/main" id="{B720CC84-DA55-873A-3179-47BC946A6DCF}"/>
               </a:ext>
             </a:extLst>
           </p:cNvPr>
@@ -3650,7 +3527,7 @@
           <p:cNvPr id="4" name="Foliennummernplatzhalter 3">
             <a:extLst>
               <a:ext uri="{FF2B5EF4-FFF2-40B4-BE49-F238E27FC236}">
-                <a16:creationId xmlns:a16="http://schemas.microsoft.com/office/drawing/2014/main" id="{0A80C469-232C-AAE6-5091-F3709DB780C9}"/>
+                <a16:creationId xmlns:a16="http://schemas.microsoft.com/office/drawing/2014/main" id="{4E1A78CC-17C2-3A46-C30C-7AF75549A4F9}"/>
               </a:ext>
             </a:extLst>
           </p:cNvPr>
@@ -3668,7 +3545,7 @@
           <a:p>
             <a:fld id="{A1D51158-57A2-499A-9688-191D0F3AC541}" type="slidenum">
               <a:rPr lang="de-DE" smtClean="0"/>
-              <a:t>8</a:t>
+              <a:t>5</a:t>
             </a:fld>
             <a:endParaRPr lang="de-DE"/>
           </a:p>
@@ -3677,7 +3554,7 @@
     </p:spTree>
     <p:extLst>
       <p:ext uri="{BB962C8B-B14F-4D97-AF65-F5344CB8AC3E}">
-        <p14:creationId xmlns:p14="http://schemas.microsoft.com/office/powerpoint/2010/main" val="1202722764"/>
+        <p14:creationId xmlns:p14="http://schemas.microsoft.com/office/powerpoint/2010/main" val="1577824747"/>
       </p:ext>
     </p:extLst>
   </p:cSld>
@@ -3687,7 +3564,7 @@
 </p:notes>
 </file>
 
-<file path=ppt/notesSlides/notesSlide6.xml><?xml version="1.0" encoding="utf-8"?>
+<file path=ppt/notesSlides/notesSlide4.xml><?xml version="1.0" encoding="utf-8"?>
 <p:notes xmlns:a="http://schemas.openxmlformats.org/drawingml/2006/main" xmlns:r="http://schemas.openxmlformats.org/officeDocument/2006/relationships" xmlns:p="http://schemas.openxmlformats.org/presentationml/2006/main">
   <p:cSld>
     <p:spTree>
@@ -3695,7 +3572,7 @@
         <p:cNvPr id="1" name="">
           <a:extLst>
             <a:ext uri="{FF2B5EF4-FFF2-40B4-BE49-F238E27FC236}">
-              <a16:creationId xmlns:a16="http://schemas.microsoft.com/office/drawing/2014/main" id="{E5529678-991D-E210-F0AE-8C8749AD839F}"/>
+              <a16:creationId xmlns:a16="http://schemas.microsoft.com/office/drawing/2014/main" id="{5791DA40-7966-BB7F-E527-00D79EAE7047}"/>
             </a:ext>
           </a:extLst>
         </p:cNvPr>
@@ -3715,7 +3592,7 @@
           <p:cNvPr id="2" name="Folienbildplatzhalter 1">
             <a:extLst>
               <a:ext uri="{FF2B5EF4-FFF2-40B4-BE49-F238E27FC236}">
-                <a16:creationId xmlns:a16="http://schemas.microsoft.com/office/drawing/2014/main" id="{FE9F83BD-F9EA-D2EB-0FBD-42616ECC3B42}"/>
+                <a16:creationId xmlns:a16="http://schemas.microsoft.com/office/drawing/2014/main" id="{BF0BCA7A-B6E7-51DB-76DC-46D0A990DFF0}"/>
               </a:ext>
             </a:extLst>
           </p:cNvPr>
@@ -3733,7 +3610,7 @@
           <p:cNvPr id="3" name="Notizenplatzhalter 2">
             <a:extLst>
               <a:ext uri="{FF2B5EF4-FFF2-40B4-BE49-F238E27FC236}">
-                <a16:creationId xmlns:a16="http://schemas.microsoft.com/office/drawing/2014/main" id="{EA744E70-F6C9-F5F9-8C57-E4D1A2C45D3C}"/>
+                <a16:creationId xmlns:a16="http://schemas.microsoft.com/office/drawing/2014/main" id="{A7515250-6756-2275-0897-5412F4457B6D}"/>
               </a:ext>
             </a:extLst>
           </p:cNvPr>
@@ -3839,7 +3716,7 @@
           <p:cNvPr id="4" name="Foliennummernplatzhalter 3">
             <a:extLst>
               <a:ext uri="{FF2B5EF4-FFF2-40B4-BE49-F238E27FC236}">
-                <a16:creationId xmlns:a16="http://schemas.microsoft.com/office/drawing/2014/main" id="{451EF08A-214B-2DD0-8344-0AED2C9C3F01}"/>
+                <a16:creationId xmlns:a16="http://schemas.microsoft.com/office/drawing/2014/main" id="{E52CFF29-2373-2E90-49F8-251F2F2804AA}"/>
               </a:ext>
             </a:extLst>
           </p:cNvPr>
@@ -3857,7 +3734,7 @@
           <a:p>
             <a:fld id="{A1D51158-57A2-499A-9688-191D0F3AC541}" type="slidenum">
               <a:rPr lang="de-DE" smtClean="0"/>
-              <a:t>9</a:t>
+              <a:t>6</a:t>
             </a:fld>
             <a:endParaRPr lang="de-DE"/>
           </a:p>
@@ -3866,7 +3743,321 @@
     </p:spTree>
     <p:extLst>
       <p:ext uri="{BB962C8B-B14F-4D97-AF65-F5344CB8AC3E}">
-        <p14:creationId xmlns:p14="http://schemas.microsoft.com/office/powerpoint/2010/main" val="4019106999"/>
+        <p14:creationId xmlns:p14="http://schemas.microsoft.com/office/powerpoint/2010/main" val="3421654766"/>
+      </p:ext>
+    </p:extLst>
+  </p:cSld>
+  <p:clrMapOvr>
+    <a:masterClrMapping/>
+  </p:clrMapOvr>
+</p:notes>
+</file>
+
+<file path=ppt/notesSlides/notesSlide5.xml><?xml version="1.0" encoding="utf-8"?>
+<p:notes xmlns:a="http://schemas.openxmlformats.org/drawingml/2006/main" xmlns:r="http://schemas.openxmlformats.org/officeDocument/2006/relationships" xmlns:p="http://schemas.openxmlformats.org/presentationml/2006/main">
+  <p:cSld>
+    <p:spTree>
+      <p:nvGrpSpPr>
+        <p:cNvPr id="1" name="">
+          <a:extLst>
+            <a:ext uri="{FF2B5EF4-FFF2-40B4-BE49-F238E27FC236}">
+              <a16:creationId xmlns:a16="http://schemas.microsoft.com/office/drawing/2014/main" id="{ACC865DD-AD73-5FE5-5A0E-165E888573E1}"/>
+            </a:ext>
+          </a:extLst>
+        </p:cNvPr>
+        <p:cNvGrpSpPr/>
+        <p:nvPr/>
+      </p:nvGrpSpPr>
+      <p:grpSpPr>
+        <a:xfrm>
+          <a:off x="0" y="0"/>
+          <a:ext cx="0" cy="0"/>
+          <a:chOff x="0" y="0"/>
+          <a:chExt cx="0" cy="0"/>
+        </a:xfrm>
+      </p:grpSpPr>
+      <p:sp>
+        <p:nvSpPr>
+          <p:cNvPr id="2" name="Folienbildplatzhalter 1">
+            <a:extLst>
+              <a:ext uri="{FF2B5EF4-FFF2-40B4-BE49-F238E27FC236}">
+                <a16:creationId xmlns:a16="http://schemas.microsoft.com/office/drawing/2014/main" id="{61FFD92C-C853-BAD3-1DBB-A5857514EB94}"/>
+              </a:ext>
+            </a:extLst>
+          </p:cNvPr>
+          <p:cNvSpPr>
+            <a:spLocks noGrp="1" noRot="1" noChangeAspect="1"/>
+          </p:cNvSpPr>
+          <p:nvPr>
+            <p:ph type="sldImg"/>
+          </p:nvPr>
+        </p:nvSpPr>
+        <p:spPr/>
+      </p:sp>
+      <p:sp>
+        <p:nvSpPr>
+          <p:cNvPr id="3" name="Notizenplatzhalter 2">
+            <a:extLst>
+              <a:ext uri="{FF2B5EF4-FFF2-40B4-BE49-F238E27FC236}">
+                <a16:creationId xmlns:a16="http://schemas.microsoft.com/office/drawing/2014/main" id="{E784D8EB-93F2-666E-61D4-8FE17AEBA657}"/>
+              </a:ext>
+            </a:extLst>
+          </p:cNvPr>
+          <p:cNvSpPr>
+            <a:spLocks noGrp="1"/>
+          </p:cNvSpPr>
+          <p:nvPr>
+            <p:ph type="body" idx="1"/>
+          </p:nvPr>
+        </p:nvSpPr>
+        <p:spPr/>
+        <p:txBody>
+          <a:bodyPr/>
+          <a:lstStyle/>
+          <a:p>
+            <a:pPr marL="0" marR="0" lvl="0" indent="0" algn="l" defTabSz="914400" rtl="0" eaLnBrk="1" fontAlgn="auto" latinLnBrk="0" hangingPunct="1">
+              <a:lnSpc>
+                <a:spcPct val="100000"/>
+              </a:lnSpc>
+              <a:spcBef>
+                <a:spcPts val="0"/>
+              </a:spcBef>
+              <a:spcAft>
+                <a:spcPts val="0"/>
+              </a:spcAft>
+              <a:buClrTx/>
+              <a:buSzTx/>
+              <a:buFont typeface="Symbol" panose="05050102010706020507" pitchFamily="18" charset="2"/>
+              <a:buNone/>
+              <a:tabLst/>
+              <a:defRPr/>
+            </a:pPr>
+            <a:endParaRPr lang="de-DE" sz="1200" kern="1200" dirty="0">
+              <a:solidFill>
+                <a:schemeClr val="tx1"/>
+              </a:solidFill>
+              <a:effectLst/>
+              <a:ea typeface="+mn-ea"/>
+              <a:cs typeface="+mn-cs"/>
+            </a:endParaRPr>
+          </a:p>
+          <a:p>
+            <a:pPr marL="171450" marR="0" lvl="0" indent="-171450" algn="l" defTabSz="914400" rtl="0" eaLnBrk="1" fontAlgn="auto" latinLnBrk="0" hangingPunct="1">
+              <a:lnSpc>
+                <a:spcPct val="100000"/>
+              </a:lnSpc>
+              <a:spcBef>
+                <a:spcPts val="0"/>
+              </a:spcBef>
+              <a:spcAft>
+                <a:spcPts val="0"/>
+              </a:spcAft>
+              <a:buClrTx/>
+              <a:buSzTx/>
+              <a:buFont typeface="Symbol" panose="05050102010706020507" pitchFamily="18" charset="2"/>
+              <a:buChar char="-"/>
+              <a:tabLst/>
+              <a:defRPr/>
+            </a:pPr>
+            <a:endParaRPr lang="de-DE" sz="1200" kern="1200" dirty="0">
+              <a:solidFill>
+                <a:schemeClr val="tx1"/>
+              </a:solidFill>
+              <a:effectLst/>
+              <a:ea typeface="+mn-ea"/>
+              <a:cs typeface="+mn-cs"/>
+            </a:endParaRPr>
+          </a:p>
+          <a:p>
+            <a:pPr marL="0" marR="0" lvl="0" indent="0" algn="l" defTabSz="914400" rtl="0" eaLnBrk="1" fontAlgn="auto" latinLnBrk="0" hangingPunct="1">
+              <a:lnSpc>
+                <a:spcPct val="100000"/>
+              </a:lnSpc>
+              <a:spcBef>
+                <a:spcPts val="0"/>
+              </a:spcBef>
+              <a:spcAft>
+                <a:spcPts val="0"/>
+              </a:spcAft>
+              <a:buClrTx/>
+              <a:buSzTx/>
+              <a:buFont typeface="Symbol" panose="05050102010706020507" pitchFamily="18" charset="2"/>
+              <a:buNone/>
+              <a:tabLst/>
+              <a:defRPr/>
+            </a:pPr>
+            <a:endParaRPr lang="de-DE" sz="1200" kern="1200" dirty="0">
+              <a:solidFill>
+                <a:schemeClr val="tx1"/>
+              </a:solidFill>
+              <a:effectLst/>
+              <a:ea typeface="+mn-ea"/>
+              <a:cs typeface="+mn-cs"/>
+            </a:endParaRPr>
+          </a:p>
+          <a:p>
+            <a:endParaRPr lang="de-DE" baseline="0" dirty="0"/>
+          </a:p>
+        </p:txBody>
+      </p:sp>
+      <p:sp>
+        <p:nvSpPr>
+          <p:cNvPr id="4" name="Foliennummernplatzhalter 3">
+            <a:extLst>
+              <a:ext uri="{FF2B5EF4-FFF2-40B4-BE49-F238E27FC236}">
+                <a16:creationId xmlns:a16="http://schemas.microsoft.com/office/drawing/2014/main" id="{5FFF318B-00A9-FDE3-D376-C2D83A2909F7}"/>
+              </a:ext>
+            </a:extLst>
+          </p:cNvPr>
+          <p:cNvSpPr>
+            <a:spLocks noGrp="1"/>
+          </p:cNvSpPr>
+          <p:nvPr>
+            <p:ph type="sldNum" sz="quarter" idx="10"/>
+          </p:nvPr>
+        </p:nvSpPr>
+        <p:spPr/>
+        <p:txBody>
+          <a:bodyPr/>
+          <a:lstStyle/>
+          <a:p>
+            <a:fld id="{A1D51158-57A2-499A-9688-191D0F3AC541}" type="slidenum">
+              <a:rPr lang="de-DE" smtClean="0"/>
+              <a:t>7</a:t>
+            </a:fld>
+            <a:endParaRPr lang="de-DE"/>
+          </a:p>
+        </p:txBody>
+      </p:sp>
+    </p:spTree>
+    <p:extLst>
+      <p:ext uri="{BB962C8B-B14F-4D97-AF65-F5344CB8AC3E}">
+        <p14:creationId xmlns:p14="http://schemas.microsoft.com/office/powerpoint/2010/main" val="3731347987"/>
+      </p:ext>
+    </p:extLst>
+  </p:cSld>
+  <p:clrMapOvr>
+    <a:masterClrMapping/>
+  </p:clrMapOvr>
+</p:notes>
+</file>
+
+<file path=ppt/notesSlides/notesSlide6.xml><?xml version="1.0" encoding="utf-8"?>
+<p:notes xmlns:a="http://schemas.openxmlformats.org/drawingml/2006/main" xmlns:r="http://schemas.openxmlformats.org/officeDocument/2006/relationships" xmlns:p="http://schemas.openxmlformats.org/presentationml/2006/main">
+  <p:cSld>
+    <p:spTree>
+      <p:nvGrpSpPr>
+        <p:cNvPr id="1" name="">
+          <a:extLst>
+            <a:ext uri="{FF2B5EF4-FFF2-40B4-BE49-F238E27FC236}">
+              <a16:creationId xmlns:a16="http://schemas.microsoft.com/office/drawing/2014/main" id="{5B199140-314D-2237-3E27-E239C4412F59}"/>
+            </a:ext>
+          </a:extLst>
+        </p:cNvPr>
+        <p:cNvGrpSpPr/>
+        <p:nvPr/>
+      </p:nvGrpSpPr>
+      <p:grpSpPr>
+        <a:xfrm>
+          <a:off x="0" y="0"/>
+          <a:ext cx="0" cy="0"/>
+          <a:chOff x="0" y="0"/>
+          <a:chExt cx="0" cy="0"/>
+        </a:xfrm>
+      </p:grpSpPr>
+      <p:sp>
+        <p:nvSpPr>
+          <p:cNvPr id="2" name="Folienbildplatzhalter 1">
+            <a:extLst>
+              <a:ext uri="{FF2B5EF4-FFF2-40B4-BE49-F238E27FC236}">
+                <a16:creationId xmlns:a16="http://schemas.microsoft.com/office/drawing/2014/main" id="{F6F68B18-5DB2-5858-3D41-48F03323D7BB}"/>
+              </a:ext>
+            </a:extLst>
+          </p:cNvPr>
+          <p:cNvSpPr>
+            <a:spLocks noGrp="1" noRot="1" noChangeAspect="1"/>
+          </p:cNvSpPr>
+          <p:nvPr>
+            <p:ph type="sldImg"/>
+          </p:nvPr>
+        </p:nvSpPr>
+        <p:spPr/>
+      </p:sp>
+      <p:sp>
+        <p:nvSpPr>
+          <p:cNvPr id="3" name="Notizenplatzhalter 2">
+            <a:extLst>
+              <a:ext uri="{FF2B5EF4-FFF2-40B4-BE49-F238E27FC236}">
+                <a16:creationId xmlns:a16="http://schemas.microsoft.com/office/drawing/2014/main" id="{55EC55C0-CCEE-242F-5D67-FCAE97D20CA8}"/>
+              </a:ext>
+            </a:extLst>
+          </p:cNvPr>
+          <p:cNvSpPr>
+            <a:spLocks noGrp="1"/>
+          </p:cNvSpPr>
+          <p:nvPr>
+            <p:ph type="body" idx="1"/>
+          </p:nvPr>
+        </p:nvSpPr>
+        <p:spPr/>
+        <p:txBody>
+          <a:bodyPr/>
+          <a:lstStyle/>
+          <a:p>
+            <a:pPr marL="0" marR="0" lvl="0" indent="0" algn="l" defTabSz="914400" rtl="0" eaLnBrk="1" fontAlgn="auto" latinLnBrk="0" hangingPunct="1">
+              <a:lnSpc>
+                <a:spcPct val="100000"/>
+              </a:lnSpc>
+              <a:spcBef>
+                <a:spcPts val="0"/>
+              </a:spcBef>
+              <a:spcAft>
+                <a:spcPts val="0"/>
+              </a:spcAft>
+              <a:buClrTx/>
+              <a:buSzTx/>
+              <a:buFontTx/>
+              <a:buNone/>
+              <a:tabLst/>
+              <a:defRPr/>
+            </a:pPr>
+            <a:endParaRPr lang="de-DE" dirty="0"/>
+          </a:p>
+        </p:txBody>
+      </p:sp>
+      <p:sp>
+        <p:nvSpPr>
+          <p:cNvPr id="4" name="Foliennummernplatzhalter 3">
+            <a:extLst>
+              <a:ext uri="{FF2B5EF4-FFF2-40B4-BE49-F238E27FC236}">
+                <a16:creationId xmlns:a16="http://schemas.microsoft.com/office/drawing/2014/main" id="{CDE56A9F-A4E2-B891-8294-EAD336CC0E00}"/>
+              </a:ext>
+            </a:extLst>
+          </p:cNvPr>
+          <p:cNvSpPr>
+            <a:spLocks noGrp="1"/>
+          </p:cNvSpPr>
+          <p:nvPr>
+            <p:ph type="sldNum" sz="quarter" idx="10"/>
+          </p:nvPr>
+        </p:nvSpPr>
+        <p:spPr/>
+        <p:txBody>
+          <a:bodyPr/>
+          <a:lstStyle/>
+          <a:p>
+            <a:fld id="{A1D51158-57A2-499A-9688-191D0F3AC541}" type="slidenum">
+              <a:rPr lang="de-DE" smtClean="0"/>
+              <a:t>8</a:t>
+            </a:fld>
+            <a:endParaRPr lang="de-DE"/>
+          </a:p>
+        </p:txBody>
+      </p:sp>
+    </p:spTree>
+    <p:extLst>
+      <p:ext uri="{BB962C8B-B14F-4D97-AF65-F5344CB8AC3E}">
+        <p14:creationId xmlns:p14="http://schemas.microsoft.com/office/powerpoint/2010/main" val="1922207876"/>
       </p:ext>
     </p:extLst>
   </p:cSld>
@@ -4073,7 +4264,7 @@
         <p:cNvPr id="1" name="">
           <a:extLst>
             <a:ext uri="{FF2B5EF4-FFF2-40B4-BE49-F238E27FC236}">
-              <a16:creationId xmlns:a16="http://schemas.microsoft.com/office/drawing/2014/main" id="{1215FA46-AE33-FA52-E973-726BD461C133}"/>
+              <a16:creationId xmlns:a16="http://schemas.microsoft.com/office/drawing/2014/main" id="{2DBBAC22-C364-448D-F533-1F5B9FEA6235}"/>
             </a:ext>
           </a:extLst>
         </p:cNvPr>
@@ -4093,7 +4284,7 @@
           <p:cNvPr id="2" name="Folienbildplatzhalter 1">
             <a:extLst>
               <a:ext uri="{FF2B5EF4-FFF2-40B4-BE49-F238E27FC236}">
-                <a16:creationId xmlns:a16="http://schemas.microsoft.com/office/drawing/2014/main" id="{A617BB08-8D34-9A86-BAA7-06DDA35B27E8}"/>
+                <a16:creationId xmlns:a16="http://schemas.microsoft.com/office/drawing/2014/main" id="{52E0BEF5-655B-DCDF-CB3D-13E4E795692F}"/>
               </a:ext>
             </a:extLst>
           </p:cNvPr>
@@ -4111,7 +4302,7 @@
           <p:cNvPr id="3" name="Notizenplatzhalter 2">
             <a:extLst>
               <a:ext uri="{FF2B5EF4-FFF2-40B4-BE49-F238E27FC236}">
-                <a16:creationId xmlns:a16="http://schemas.microsoft.com/office/drawing/2014/main" id="{6D482189-3878-3C54-28FF-23580FF135E7}"/>
+                <a16:creationId xmlns:a16="http://schemas.microsoft.com/office/drawing/2014/main" id="{316B7DBE-E1E5-5B4E-5DB9-C7FB531F7A2F}"/>
               </a:ext>
             </a:extLst>
           </p:cNvPr>
@@ -4217,7 +4408,7 @@
           <p:cNvPr id="4" name="Foliennummernplatzhalter 3">
             <a:extLst>
               <a:ext uri="{FF2B5EF4-FFF2-40B4-BE49-F238E27FC236}">
-                <a16:creationId xmlns:a16="http://schemas.microsoft.com/office/drawing/2014/main" id="{BFC2EDCD-B41C-47AD-4D57-6C1237D90626}"/>
+                <a16:creationId xmlns:a16="http://schemas.microsoft.com/office/drawing/2014/main" id="{0E073C4D-ED3B-D1AA-1794-731964BECB67}"/>
               </a:ext>
             </a:extLst>
           </p:cNvPr>
@@ -4244,7 +4435,7 @@
     </p:spTree>
     <p:extLst>
       <p:ext uri="{BB962C8B-B14F-4D97-AF65-F5344CB8AC3E}">
-        <p14:creationId xmlns:p14="http://schemas.microsoft.com/office/powerpoint/2010/main" val="625726974"/>
+        <p14:creationId xmlns:p14="http://schemas.microsoft.com/office/powerpoint/2010/main" val="837534374"/>
       </p:ext>
     </p:extLst>
   </p:cSld>
@@ -4262,7 +4453,7 @@
         <p:cNvPr id="1" name="">
           <a:extLst>
             <a:ext uri="{FF2B5EF4-FFF2-40B4-BE49-F238E27FC236}">
-              <a16:creationId xmlns:a16="http://schemas.microsoft.com/office/drawing/2014/main" id="{2DBBAC22-C364-448D-F533-1F5B9FEA6235}"/>
+              <a16:creationId xmlns:a16="http://schemas.microsoft.com/office/drawing/2014/main" id="{354FB7E6-DD2E-A4E4-E7D5-7108EDEFA238}"/>
             </a:ext>
           </a:extLst>
         </p:cNvPr>
@@ -4282,7 +4473,7 @@
           <p:cNvPr id="2" name="Folienbildplatzhalter 1">
             <a:extLst>
               <a:ext uri="{FF2B5EF4-FFF2-40B4-BE49-F238E27FC236}">
-                <a16:creationId xmlns:a16="http://schemas.microsoft.com/office/drawing/2014/main" id="{52E0BEF5-655B-DCDF-CB3D-13E4E795692F}"/>
+                <a16:creationId xmlns:a16="http://schemas.microsoft.com/office/drawing/2014/main" id="{140BF9D9-AF36-1501-343F-45F666EE4555}"/>
               </a:ext>
             </a:extLst>
           </p:cNvPr>
@@ -4300,7 +4491,7 @@
           <p:cNvPr id="3" name="Notizenplatzhalter 2">
             <a:extLst>
               <a:ext uri="{FF2B5EF4-FFF2-40B4-BE49-F238E27FC236}">
-                <a16:creationId xmlns:a16="http://schemas.microsoft.com/office/drawing/2014/main" id="{316B7DBE-E1E5-5B4E-5DB9-C7FB531F7A2F}"/>
+                <a16:creationId xmlns:a16="http://schemas.microsoft.com/office/drawing/2014/main" id="{B447E684-6BA5-ECD1-209F-27EF92487037}"/>
               </a:ext>
             </a:extLst>
           </p:cNvPr>
@@ -4406,7 +4597,7 @@
           <p:cNvPr id="4" name="Foliennummernplatzhalter 3">
             <a:extLst>
               <a:ext uri="{FF2B5EF4-FFF2-40B4-BE49-F238E27FC236}">
-                <a16:creationId xmlns:a16="http://schemas.microsoft.com/office/drawing/2014/main" id="{0E073C4D-ED3B-D1AA-1794-731964BECB67}"/>
+                <a16:creationId xmlns:a16="http://schemas.microsoft.com/office/drawing/2014/main" id="{BDCBD0C6-981D-DB32-5923-9F613AC87A2D}"/>
               </a:ext>
             </a:extLst>
           </p:cNvPr>
@@ -4433,7 +4624,7 @@
     </p:spTree>
     <p:extLst>
       <p:ext uri="{BB962C8B-B14F-4D97-AF65-F5344CB8AC3E}">
-        <p14:creationId xmlns:p14="http://schemas.microsoft.com/office/powerpoint/2010/main" val="837534374"/>
+        <p14:creationId xmlns:p14="http://schemas.microsoft.com/office/powerpoint/2010/main" val="4232481214"/>
       </p:ext>
     </p:extLst>
   </p:cSld>
@@ -43704,495 +43895,6 @@
         <p:cNvPr id="1" name="">
           <a:extLst>
             <a:ext uri="{FF2B5EF4-FFF2-40B4-BE49-F238E27FC236}">
-              <a16:creationId xmlns:a16="http://schemas.microsoft.com/office/drawing/2014/main" id="{2DF45826-CD7A-E15B-CF80-B01DD0755A2B}"/>
-            </a:ext>
-          </a:extLst>
-        </p:cNvPr>
-        <p:cNvGrpSpPr/>
-        <p:nvPr/>
-      </p:nvGrpSpPr>
-      <p:grpSpPr>
-        <a:xfrm>
-          <a:off x="0" y="0"/>
-          <a:ext cx="0" cy="0"/>
-          <a:chOff x="0" y="0"/>
-          <a:chExt cx="0" cy="0"/>
-        </a:xfrm>
-      </p:grpSpPr>
-      <p:sp>
-        <p:nvSpPr>
-          <p:cNvPr id="49" name="Textplatzhalter 48">
-            <a:extLst>
-              <a:ext uri="{FF2B5EF4-FFF2-40B4-BE49-F238E27FC236}">
-                <a16:creationId xmlns:a16="http://schemas.microsoft.com/office/drawing/2014/main" id="{0260CAEE-7F08-5B2D-27A0-E939ADA6A36E}"/>
-              </a:ext>
-            </a:extLst>
-          </p:cNvPr>
-          <p:cNvSpPr>
-            <a:spLocks noGrp="1"/>
-          </p:cNvSpPr>
-          <p:nvPr>
-            <p:ph type="body" sz="quarter" idx="13"/>
-          </p:nvPr>
-        </p:nvSpPr>
-        <p:spPr>
-          <a:solidFill>
-            <a:srgbClr val="004976"/>
-          </a:solidFill>
-        </p:spPr>
-        <p:txBody>
-          <a:bodyPr/>
-          <a:lstStyle/>
-          <a:p>
-            <a:endParaRPr lang="de-DE" dirty="0"/>
-          </a:p>
-        </p:txBody>
-      </p:sp>
-      <p:sp>
-        <p:nvSpPr>
-          <p:cNvPr id="2" name="Titel 1">
-            <a:extLst>
-              <a:ext uri="{FF2B5EF4-FFF2-40B4-BE49-F238E27FC236}">
-                <a16:creationId xmlns:a16="http://schemas.microsoft.com/office/drawing/2014/main" id="{47F75075-37C1-3E02-D287-153FE3BBD56D}"/>
-              </a:ext>
-            </a:extLst>
-          </p:cNvPr>
-          <p:cNvSpPr>
-            <a:spLocks noGrp="1"/>
-          </p:cNvSpPr>
-          <p:nvPr>
-            <p:ph type="title"/>
-          </p:nvPr>
-        </p:nvSpPr>
-        <p:spPr/>
-        <p:txBody>
-          <a:bodyPr/>
-          <a:lstStyle/>
-          <a:p>
-            <a:r>
-              <a:rPr lang="de-DE" dirty="0"/>
-              <a:t>Mean Forecast </a:t>
-            </a:r>
-            <a:r>
-              <a:rPr lang="de-DE" dirty="0" err="1"/>
-              <a:t>Comparison</a:t>
-            </a:r>
-            <a:endParaRPr lang="de-DE" dirty="0"/>
-          </a:p>
-        </p:txBody>
-      </p:sp>
-      <p:sp>
-        <p:nvSpPr>
-          <p:cNvPr id="14" name="Textplatzhalter 13">
-            <a:extLst>
-              <a:ext uri="{FF2B5EF4-FFF2-40B4-BE49-F238E27FC236}">
-                <a16:creationId xmlns:a16="http://schemas.microsoft.com/office/drawing/2014/main" id="{DBA12B9B-5655-88C2-A497-756C9159D9B9}"/>
-              </a:ext>
-            </a:extLst>
-          </p:cNvPr>
-          <p:cNvSpPr>
-            <a:spLocks noGrp="1"/>
-          </p:cNvSpPr>
-          <p:nvPr>
-            <p:ph type="body" sz="quarter" idx="39"/>
-          </p:nvPr>
-        </p:nvSpPr>
-        <p:spPr/>
-        <p:txBody>
-          <a:bodyPr/>
-          <a:lstStyle/>
-          <a:p>
-            <a:r>
-              <a:rPr lang="de-DE" dirty="0"/>
-              <a:t>QLIKE</a:t>
-            </a:r>
-          </a:p>
-        </p:txBody>
-      </p:sp>
-      <p:sp>
-        <p:nvSpPr>
-          <p:cNvPr id="6" name="Foliennummernplatzhalter 5">
-            <a:extLst>
-              <a:ext uri="{FF2B5EF4-FFF2-40B4-BE49-F238E27FC236}">
-                <a16:creationId xmlns:a16="http://schemas.microsoft.com/office/drawing/2014/main" id="{E23C9122-50C5-30F3-4C48-8E903AF834B9}"/>
-              </a:ext>
-            </a:extLst>
-          </p:cNvPr>
-          <p:cNvSpPr>
-            <a:spLocks noGrp="1"/>
-          </p:cNvSpPr>
-          <p:nvPr>
-            <p:ph type="sldNum" sz="quarter" idx="38"/>
-          </p:nvPr>
-        </p:nvSpPr>
-        <p:spPr/>
-        <p:txBody>
-          <a:bodyPr/>
-          <a:lstStyle/>
-          <a:p>
-            <a:fld id="{A23FFA10-0470-4638-936A-23EC73946E25}" type="slidenum">
-              <a:rPr lang="de-DE" smtClean="0"/>
-              <a:pPr/>
-              <a:t>11</a:t>
-            </a:fld>
-            <a:endParaRPr lang="de-DE" dirty="0"/>
-          </a:p>
-        </p:txBody>
-      </p:sp>
-      <p:sp>
-        <p:nvSpPr>
-          <p:cNvPr id="3" name="Inhaltsplatzhalter 34">
-            <a:extLst>
-              <a:ext uri="{FF2B5EF4-FFF2-40B4-BE49-F238E27FC236}">
-                <a16:creationId xmlns:a16="http://schemas.microsoft.com/office/drawing/2014/main" id="{A2CC36B3-692E-0339-57FA-497B8403677D}"/>
-              </a:ext>
-            </a:extLst>
-          </p:cNvPr>
-          <p:cNvSpPr>
-            <a:spLocks noGrp="1"/>
-          </p:cNvSpPr>
-          <p:nvPr>
-            <p:ph idx="1"/>
-          </p:nvPr>
-        </p:nvSpPr>
-        <p:spPr>
-          <a:xfrm>
-            <a:off x="361950" y="1376363"/>
-            <a:ext cx="11468100" cy="4776773"/>
-          </a:xfrm>
-        </p:spPr>
-        <p:txBody>
-          <a:bodyPr/>
-          <a:lstStyle/>
-          <a:p>
-            <a:r>
-              <a:rPr lang="en-US" dirty="0"/>
-              <a:t>QLIKE for mean/median forecasts is robust to proxy noise (Patton, 2011):</a:t>
-            </a:r>
-          </a:p>
-          <a:p>
-            <a:pPr marL="0" indent="0">
-              <a:buNone/>
-            </a:pPr>
-            <a:endParaRPr lang="en-US" dirty="0"/>
-          </a:p>
-          <a:p>
-            <a:pPr marL="0" indent="0">
-              <a:buNone/>
-            </a:pPr>
-            <a:endParaRPr lang="en-US" dirty="0"/>
-          </a:p>
-          <a:p>
-            <a:r>
-              <a:rPr lang="de-DE" dirty="0"/>
-              <a:t>Patton (2011) </a:t>
-            </a:r>
-            <a:r>
-              <a:rPr lang="de-DE" dirty="0" err="1"/>
-              <a:t>proved</a:t>
-            </a:r>
-            <a:r>
-              <a:rPr lang="de-DE" dirty="0"/>
-              <a:t> </a:t>
-            </a:r>
-            <a:r>
-              <a:rPr lang="de-DE" dirty="0" err="1"/>
-              <a:t>that</a:t>
-            </a:r>
-            <a:r>
-              <a:rPr lang="de-DE" dirty="0"/>
-              <a:t> </a:t>
-            </a:r>
-            <a:r>
-              <a:rPr lang="de-DE" dirty="0" err="1"/>
-              <a:t>among</a:t>
-            </a:r>
-            <a:r>
-              <a:rPr lang="de-DE" dirty="0"/>
-              <a:t> </a:t>
-            </a:r>
-            <a:r>
-              <a:rPr lang="de-DE" dirty="0" err="1"/>
-              <a:t>standard</a:t>
-            </a:r>
-            <a:r>
-              <a:rPr lang="de-DE" dirty="0"/>
-              <a:t> </a:t>
-            </a:r>
-            <a:r>
-              <a:rPr lang="de-DE" dirty="0" err="1"/>
-              <a:t>loss</a:t>
-            </a:r>
-            <a:r>
-              <a:rPr lang="de-DE" dirty="0"/>
-              <a:t> </a:t>
-            </a:r>
-            <a:r>
-              <a:rPr lang="de-DE" dirty="0" err="1"/>
-              <a:t>functions</a:t>
-            </a:r>
-            <a:r>
-              <a:rPr lang="de-DE" dirty="0"/>
-              <a:t>, </a:t>
-            </a:r>
-            <a:r>
-              <a:rPr lang="de-DE" dirty="0" err="1"/>
-              <a:t>only</a:t>
-            </a:r>
-            <a:r>
-              <a:rPr lang="de-DE" dirty="0"/>
-              <a:t> MSE and QLIKE </a:t>
-            </a:r>
-            <a:r>
-              <a:rPr lang="de-DE" dirty="0" err="1"/>
-              <a:t>produce</a:t>
-            </a:r>
-            <a:r>
-              <a:rPr lang="de-DE" dirty="0"/>
-              <a:t> </a:t>
-            </a:r>
-            <a:r>
-              <a:rPr lang="de-DE" dirty="0" err="1"/>
-              <a:t>model</a:t>
-            </a:r>
-            <a:r>
-              <a:rPr lang="de-DE" dirty="0"/>
-              <a:t> </a:t>
-            </a:r>
-            <a:r>
-              <a:rPr lang="de-DE" dirty="0" err="1"/>
-              <a:t>rankings</a:t>
-            </a:r>
-            <a:r>
-              <a:rPr lang="de-DE" dirty="0"/>
-              <a:t> </a:t>
-            </a:r>
-            <a:r>
-              <a:rPr lang="de-DE" dirty="0" err="1"/>
-              <a:t>that</a:t>
-            </a:r>
-            <a:r>
-              <a:rPr lang="de-DE" dirty="0"/>
-              <a:t> </a:t>
-            </a:r>
-            <a:r>
-              <a:rPr lang="de-DE" dirty="0" err="1"/>
-              <a:t>are</a:t>
-            </a:r>
-            <a:r>
-              <a:rPr lang="de-DE" dirty="0"/>
-              <a:t> </a:t>
-            </a:r>
-            <a:r>
-              <a:rPr lang="de-DE" i="1" dirty="0"/>
-              <a:t>robust </a:t>
-            </a:r>
-            <a:r>
-              <a:rPr lang="de-DE" i="1" dirty="0" err="1"/>
-              <a:t>to</a:t>
-            </a:r>
-            <a:r>
-              <a:rPr lang="de-DE" i="1" dirty="0"/>
-              <a:t> </a:t>
-            </a:r>
-            <a:r>
-              <a:rPr lang="de-DE" i="1" dirty="0" err="1"/>
-              <a:t>noise</a:t>
-            </a:r>
-            <a:r>
-              <a:rPr lang="de-DE" i="1" dirty="0"/>
-              <a:t> in </a:t>
-            </a:r>
-            <a:r>
-              <a:rPr lang="de-DE" i="1" dirty="0" err="1"/>
-              <a:t>the</a:t>
-            </a:r>
-            <a:r>
-              <a:rPr lang="de-DE" i="1" dirty="0"/>
-              <a:t> </a:t>
-            </a:r>
-            <a:r>
-              <a:rPr lang="de-DE" i="1" dirty="0" err="1"/>
-              <a:t>volatility</a:t>
-            </a:r>
-            <a:r>
-              <a:rPr lang="de-DE" i="1" dirty="0"/>
-              <a:t> </a:t>
-            </a:r>
-            <a:r>
-              <a:rPr lang="de-DE" i="1" dirty="0" err="1"/>
-              <a:t>proxy</a:t>
-            </a:r>
-            <a:r>
-              <a:rPr lang="de-DE" dirty="0"/>
-              <a:t>. </a:t>
-            </a:r>
-          </a:p>
-          <a:p>
-            <a:pPr lvl="1"/>
-            <a:r>
-              <a:rPr lang="de-DE" dirty="0"/>
-              <a:t>Also </a:t>
-            </a:r>
-            <a:r>
-              <a:rPr lang="de-DE" dirty="0" err="1"/>
-              <a:t>it</a:t>
-            </a:r>
-            <a:r>
-              <a:rPr lang="de-DE" dirty="0"/>
-              <a:t> </a:t>
-            </a:r>
-            <a:r>
-              <a:rPr lang="de-DE" dirty="0" err="1"/>
-              <a:t>penalizes</a:t>
-            </a:r>
-            <a:r>
-              <a:rPr lang="de-DE" dirty="0"/>
-              <a:t> </a:t>
-            </a:r>
-            <a:r>
-              <a:rPr lang="de-DE" dirty="0" err="1"/>
-              <a:t>under</a:t>
-            </a:r>
-            <a:r>
-              <a:rPr lang="de-DE" dirty="0"/>
-              <a:t> </a:t>
-            </a:r>
-            <a:r>
-              <a:rPr lang="de-DE" dirty="0" err="1"/>
-              <a:t>prediction</a:t>
-            </a:r>
-            <a:r>
-              <a:rPr lang="de-DE" dirty="0"/>
-              <a:t> </a:t>
-            </a:r>
-            <a:r>
-              <a:rPr lang="de-DE" dirty="0" err="1"/>
-              <a:t>more</a:t>
-            </a:r>
-            <a:r>
-              <a:rPr lang="de-DE" dirty="0"/>
-              <a:t> </a:t>
-            </a:r>
-            <a:r>
-              <a:rPr lang="de-DE" dirty="0" err="1"/>
-              <a:t>than</a:t>
-            </a:r>
-            <a:r>
-              <a:rPr lang="de-DE" dirty="0"/>
-              <a:t> </a:t>
-            </a:r>
-            <a:r>
-              <a:rPr lang="de-DE" dirty="0" err="1"/>
-              <a:t>under</a:t>
-            </a:r>
-            <a:r>
-              <a:rPr lang="de-DE" dirty="0"/>
-              <a:t> </a:t>
-            </a:r>
-            <a:r>
-              <a:rPr lang="de-DE" dirty="0" err="1"/>
-              <a:t>prediction</a:t>
-            </a:r>
-            <a:r>
-              <a:rPr lang="de-DE" dirty="0"/>
-              <a:t> </a:t>
-            </a:r>
-            <a:r>
-              <a:rPr lang="de-DE" dirty="0" err="1"/>
-              <a:t>which</a:t>
-            </a:r>
-            <a:r>
-              <a:rPr lang="de-DE" dirty="0"/>
-              <a:t> </a:t>
-            </a:r>
-            <a:r>
-              <a:rPr lang="de-DE" dirty="0" err="1"/>
-              <a:t>is</a:t>
-            </a:r>
-            <a:r>
-              <a:rPr lang="de-DE" dirty="0"/>
-              <a:t> relevant </a:t>
-            </a:r>
-            <a:r>
-              <a:rPr lang="de-DE" dirty="0" err="1"/>
-              <a:t>for</a:t>
-            </a:r>
-            <a:r>
-              <a:rPr lang="de-DE" dirty="0"/>
-              <a:t> </a:t>
-            </a:r>
-            <a:r>
-              <a:rPr lang="de-DE" dirty="0" err="1"/>
-              <a:t>procurement</a:t>
-            </a:r>
-            <a:endParaRPr lang="de-DE" dirty="0"/>
-          </a:p>
-          <a:p>
-            <a:pPr marL="0" indent="0">
-              <a:buNone/>
-            </a:pPr>
-            <a:endParaRPr lang="de-DE" b="1" u="sng" dirty="0"/>
-          </a:p>
-        </p:txBody>
-      </p:sp>
-      <p:pic>
-        <p:nvPicPr>
-          <p:cNvPr id="7" name="Grafik 6">
-            <a:extLst>
-              <a:ext uri="{FF2B5EF4-FFF2-40B4-BE49-F238E27FC236}">
-                <a16:creationId xmlns:a16="http://schemas.microsoft.com/office/drawing/2014/main" id="{3F1EC8CD-7C88-4BF1-4977-F87381D322A5}"/>
-              </a:ext>
-            </a:extLst>
-          </p:cNvPr>
-          <p:cNvPicPr>
-            <a:picLocks noChangeAspect="1"/>
-          </p:cNvPicPr>
-          <p:nvPr/>
-        </p:nvPicPr>
-        <p:blipFill>
-          <a:blip r:embed="rId3">
-            <a:extLst>
-              <a:ext uri="{28A0092B-C50C-407E-A947-70E740481C1C}">
-                <a14:useLocalDpi xmlns:a14="http://schemas.microsoft.com/office/drawing/2010/main" val="0"/>
-              </a:ext>
-            </a:extLst>
-          </a:blip>
-          <a:stretch>
-            <a:fillRect/>
-          </a:stretch>
-        </p:blipFill>
-        <p:spPr>
-          <a:xfrm>
-            <a:off x="4391396" y="1830462"/>
-            <a:ext cx="3409208" cy="838018"/>
-          </a:xfrm>
-          <a:prstGeom prst="rect">
-            <a:avLst/>
-          </a:prstGeom>
-        </p:spPr>
-      </p:pic>
-    </p:spTree>
-    <p:extLst>
-      <p:ext uri="{BB962C8B-B14F-4D97-AF65-F5344CB8AC3E}">
-        <p14:creationId xmlns:p14="http://schemas.microsoft.com/office/powerpoint/2010/main" val="2232173289"/>
-      </p:ext>
-    </p:extLst>
-  </p:cSld>
-  <p:clrMapOvr>
-    <a:masterClrMapping/>
-  </p:clrMapOvr>
-</p:sld>
-</file>
-
-<file path=ppt/slides/slide12.xml><?xml version="1.0" encoding="utf-8"?>
-<p:sld xmlns:a="http://schemas.openxmlformats.org/drawingml/2006/main" xmlns:r="http://schemas.openxmlformats.org/officeDocument/2006/relationships" xmlns:p="http://schemas.openxmlformats.org/presentationml/2006/main">
-  <p:cSld>
-    <p:spTree>
-      <p:nvGrpSpPr>
-        <p:cNvPr id="1" name="">
-          <a:extLst>
-            <a:ext uri="{FF2B5EF4-FFF2-40B4-BE49-F238E27FC236}">
               <a16:creationId xmlns:a16="http://schemas.microsoft.com/office/drawing/2014/main" id="{701E397E-2433-715E-02CE-BBCE628BBF8F}"/>
             </a:ext>
           </a:extLst>
@@ -44330,7 +44032,7 @@
             <a:fld id="{A23FFA10-0470-4638-936A-23EC73946E25}" type="slidenum">
               <a:rPr lang="de-DE" smtClean="0"/>
               <a:pPr/>
-              <a:t>12</a:t>
+              <a:t>11</a:t>
             </a:fld>
             <a:endParaRPr lang="de-DE" dirty="0"/>
           </a:p>
@@ -44364,7 +44066,7 @@
         </p:blipFill>
         <p:spPr>
           <a:xfrm>
-            <a:off x="1087790" y="1514545"/>
+            <a:off x="1087790" y="1432406"/>
             <a:ext cx="10016419" cy="4730618"/>
           </a:xfrm>
           <a:prstGeom prst="rect">
@@ -44385,442 +44087,7 @@
 </p:sld>
 </file>
 
-<file path=ppt/slides/slide13.xml><?xml version="1.0" encoding="utf-8"?>
-<p:sld xmlns:a="http://schemas.openxmlformats.org/drawingml/2006/main" xmlns:r="http://schemas.openxmlformats.org/officeDocument/2006/relationships" xmlns:p="http://schemas.openxmlformats.org/presentationml/2006/main">
-  <p:cSld>
-    <p:spTree>
-      <p:nvGrpSpPr>
-        <p:cNvPr id="1" name="">
-          <a:extLst>
-            <a:ext uri="{FF2B5EF4-FFF2-40B4-BE49-F238E27FC236}">
-              <a16:creationId xmlns:a16="http://schemas.microsoft.com/office/drawing/2014/main" id="{D257866F-65E9-392B-DA00-F4269CC7133C}"/>
-            </a:ext>
-          </a:extLst>
-        </p:cNvPr>
-        <p:cNvGrpSpPr/>
-        <p:nvPr/>
-      </p:nvGrpSpPr>
-      <p:grpSpPr>
-        <a:xfrm>
-          <a:off x="0" y="0"/>
-          <a:ext cx="0" cy="0"/>
-          <a:chOff x="0" y="0"/>
-          <a:chExt cx="0" cy="0"/>
-        </a:xfrm>
-      </p:grpSpPr>
-      <p:sp>
-        <p:nvSpPr>
-          <p:cNvPr id="49" name="Textplatzhalter 48">
-            <a:extLst>
-              <a:ext uri="{FF2B5EF4-FFF2-40B4-BE49-F238E27FC236}">
-                <a16:creationId xmlns:a16="http://schemas.microsoft.com/office/drawing/2014/main" id="{29CDFDE0-7184-DF00-9F38-BC5C8B066EE6}"/>
-              </a:ext>
-            </a:extLst>
-          </p:cNvPr>
-          <p:cNvSpPr>
-            <a:spLocks noGrp="1"/>
-          </p:cNvSpPr>
-          <p:nvPr>
-            <p:ph type="body" sz="quarter" idx="13"/>
-          </p:nvPr>
-        </p:nvSpPr>
-        <p:spPr>
-          <a:solidFill>
-            <a:srgbClr val="004976"/>
-          </a:solidFill>
-        </p:spPr>
-        <p:txBody>
-          <a:bodyPr/>
-          <a:lstStyle/>
-          <a:p>
-            <a:endParaRPr lang="de-DE" dirty="0"/>
-          </a:p>
-        </p:txBody>
-      </p:sp>
-      <p:sp>
-        <p:nvSpPr>
-          <p:cNvPr id="2" name="Titel 1">
-            <a:extLst>
-              <a:ext uri="{FF2B5EF4-FFF2-40B4-BE49-F238E27FC236}">
-                <a16:creationId xmlns:a16="http://schemas.microsoft.com/office/drawing/2014/main" id="{A5DE0D2B-81E9-44BC-662C-FDA13B0C977B}"/>
-              </a:ext>
-            </a:extLst>
-          </p:cNvPr>
-          <p:cNvSpPr>
-            <a:spLocks noGrp="1"/>
-          </p:cNvSpPr>
-          <p:nvPr>
-            <p:ph type="title"/>
-          </p:nvPr>
-        </p:nvSpPr>
-        <p:spPr/>
-        <p:txBody>
-          <a:bodyPr/>
-          <a:lstStyle/>
-          <a:p>
-            <a:r>
-              <a:rPr lang="de-DE" dirty="0"/>
-              <a:t>Upper-Tail Quantile </a:t>
-            </a:r>
-            <a:r>
-              <a:rPr lang="de-DE" dirty="0" err="1"/>
-              <a:t>Comparison</a:t>
-            </a:r>
-            <a:endParaRPr lang="de-DE" dirty="0"/>
-          </a:p>
-        </p:txBody>
-      </p:sp>
-      <p:sp>
-        <p:nvSpPr>
-          <p:cNvPr id="14" name="Textplatzhalter 13">
-            <a:extLst>
-              <a:ext uri="{FF2B5EF4-FFF2-40B4-BE49-F238E27FC236}">
-                <a16:creationId xmlns:a16="http://schemas.microsoft.com/office/drawing/2014/main" id="{54BF008C-5768-885A-E6C4-7B691078FCAD}"/>
-              </a:ext>
-            </a:extLst>
-          </p:cNvPr>
-          <p:cNvSpPr>
-            <a:spLocks noGrp="1"/>
-          </p:cNvSpPr>
-          <p:nvPr>
-            <p:ph type="body" sz="quarter" idx="39"/>
-          </p:nvPr>
-        </p:nvSpPr>
-        <p:spPr/>
-        <p:txBody>
-          <a:bodyPr/>
-          <a:lstStyle/>
-          <a:p>
-            <a:r>
-              <a:rPr lang="de-DE" dirty="0"/>
-              <a:t>Quantile Loss</a:t>
-            </a:r>
-          </a:p>
-        </p:txBody>
-      </p:sp>
-      <p:sp>
-        <p:nvSpPr>
-          <p:cNvPr id="6" name="Foliennummernplatzhalter 5">
-            <a:extLst>
-              <a:ext uri="{FF2B5EF4-FFF2-40B4-BE49-F238E27FC236}">
-                <a16:creationId xmlns:a16="http://schemas.microsoft.com/office/drawing/2014/main" id="{4D896CE4-31A6-32C4-2603-6FEB6C782297}"/>
-              </a:ext>
-            </a:extLst>
-          </p:cNvPr>
-          <p:cNvSpPr>
-            <a:spLocks noGrp="1"/>
-          </p:cNvSpPr>
-          <p:nvPr>
-            <p:ph type="sldNum" sz="quarter" idx="38"/>
-          </p:nvPr>
-        </p:nvSpPr>
-        <p:spPr/>
-        <p:txBody>
-          <a:bodyPr/>
-          <a:lstStyle/>
-          <a:p>
-            <a:fld id="{A23FFA10-0470-4638-936A-23EC73946E25}" type="slidenum">
-              <a:rPr lang="de-DE" smtClean="0"/>
-              <a:pPr/>
-              <a:t>13</a:t>
-            </a:fld>
-            <a:endParaRPr lang="de-DE" dirty="0"/>
-          </a:p>
-        </p:txBody>
-      </p:sp>
-      <mc:AlternateContent xmlns:mc="http://schemas.openxmlformats.org/markup-compatibility/2006" xmlns:a14="http://schemas.microsoft.com/office/drawing/2010/main">
-        <mc:Choice Requires="a14">
-          <p:sp>
-            <p:nvSpPr>
-              <p:cNvPr id="3" name="Inhaltsplatzhalter 34">
-                <a:extLst>
-                  <a:ext uri="{FF2B5EF4-FFF2-40B4-BE49-F238E27FC236}">
-                    <a16:creationId xmlns:a16="http://schemas.microsoft.com/office/drawing/2014/main" id="{5AAC02AD-412C-4CA6-6D41-037921129DF2}"/>
-                  </a:ext>
-                </a:extLst>
-              </p:cNvPr>
-              <p:cNvSpPr>
-                <a:spLocks noGrp="1"/>
-              </p:cNvSpPr>
-              <p:nvPr>
-                <p:ph idx="1"/>
-              </p:nvPr>
-            </p:nvSpPr>
-            <p:spPr>
-              <a:xfrm>
-                <a:off x="361950" y="1376363"/>
-                <a:ext cx="11468100" cy="4776773"/>
-              </a:xfrm>
-            </p:spPr>
-            <p:txBody>
-              <a:bodyPr/>
-              <a:lstStyle/>
-              <a:p>
-                <a:r>
-                  <a:rPr lang="en-US" dirty="0"/>
-                  <a:t>Quantile Loss for distributional forecasts:</a:t>
-                </a:r>
-              </a:p>
-              <a:p>
-                <a:endParaRPr lang="en-US" dirty="0"/>
-              </a:p>
-              <a:p>
-                <a:pPr marL="0" indent="0">
-                  <a:buNone/>
-                </a:pPr>
-                <a:endParaRPr lang="en-US" dirty="0"/>
-              </a:p>
-              <a:p>
-                <a:pPr marL="0" indent="0">
-                  <a:buNone/>
-                </a:pPr>
-                <a:endParaRPr lang="en-US" dirty="0"/>
-              </a:p>
-              <a:p>
-                <a:r>
-                  <a:rPr lang="de-DE" dirty="0" err="1"/>
-                  <a:t>Uses</a:t>
-                </a:r>
-                <a:r>
-                  <a:rPr lang="de-DE" dirty="0"/>
-                  <a:t> </a:t>
-                </a:r>
-                <a:r>
-                  <a:rPr lang="de-DE" dirty="0" err="1"/>
-                  <a:t>the</a:t>
-                </a:r>
-                <a:r>
-                  <a:rPr lang="de-DE" dirty="0"/>
-                  <a:t> same check </a:t>
-                </a:r>
-                <a:r>
-                  <a:rPr lang="de-DE" dirty="0" err="1"/>
-                  <a:t>function</a:t>
-                </a:r>
-                <a:r>
-                  <a:rPr lang="de-DE" dirty="0"/>
-                  <a:t> </a:t>
-                </a:r>
-                <a14:m>
-                  <m:oMath xmlns:m="http://schemas.openxmlformats.org/officeDocument/2006/math">
-                    <m:sSub>
-                      <m:sSubPr>
-                        <m:ctrlPr>
-                          <a:rPr lang="de-DE" i="1" dirty="0" smtClean="0">
-                            <a:latin typeface="Cambria Math" panose="02040503050406030204" pitchFamily="18" charset="0"/>
-                          </a:rPr>
-                        </m:ctrlPr>
-                      </m:sSubPr>
-                      <m:e>
-                        <m:r>
-                          <a:rPr lang="de-DE" i="1" dirty="0">
-                            <a:latin typeface="Cambria Math" panose="02040503050406030204" pitchFamily="18" charset="0"/>
-                          </a:rPr>
-                          <m:t>𝜌</m:t>
-                        </m:r>
-                      </m:e>
-                      <m:sub>
-                        <m:r>
-                          <a:rPr lang="de-DE" i="1" dirty="0">
-                            <a:latin typeface="Cambria Math" panose="02040503050406030204" pitchFamily="18" charset="0"/>
-                          </a:rPr>
-                          <m:t>𝜏</m:t>
-                        </m:r>
-                      </m:sub>
-                    </m:sSub>
-                  </m:oMath>
-                </a14:m>
-                <a:r>
-                  <a:rPr lang="de-DE" dirty="0"/>
-                  <a:t> </a:t>
-                </a:r>
-                <a:r>
-                  <a:rPr lang="de-DE" dirty="0" err="1"/>
-                  <a:t>as</a:t>
-                </a:r>
-                <a:r>
-                  <a:rPr lang="de-DE" dirty="0"/>
-                  <a:t> </a:t>
-                </a:r>
-                <a:r>
-                  <a:rPr lang="de-DE" dirty="0" err="1"/>
-                  <a:t>estimation</a:t>
-                </a:r>
-                <a:r>
-                  <a:rPr lang="de-DE" dirty="0"/>
-                  <a:t>. This </a:t>
-                </a:r>
-                <a:r>
-                  <a:rPr lang="de-DE" dirty="0" err="1"/>
-                  <a:t>makes</a:t>
-                </a:r>
-                <a:r>
-                  <a:rPr lang="de-DE" dirty="0"/>
-                  <a:t> HAR-QR „</a:t>
-                </a:r>
-                <a:r>
-                  <a:rPr lang="de-DE" dirty="0" err="1"/>
-                  <a:t>coherent</a:t>
-                </a:r>
-                <a:r>
-                  <a:rPr lang="de-DE" dirty="0"/>
-                  <a:t>“ </a:t>
-                </a:r>
-                <a:r>
-                  <a:rPr lang="de-DE" sz="1200" dirty="0"/>
-                  <a:t>(</a:t>
-                </a:r>
-                <a:r>
-                  <a:rPr lang="de-DE" sz="1200" dirty="0" err="1"/>
-                  <a:t>Puke</a:t>
-                </a:r>
-                <a:r>
-                  <a:rPr lang="de-DE" sz="1200" dirty="0"/>
-                  <a:t> and Schweikert 2026)</a:t>
-                </a:r>
-              </a:p>
-              <a:p>
-                <a:endParaRPr lang="de-DE" dirty="0"/>
-              </a:p>
-              <a:p>
-                <a:pPr marL="0" indent="0">
-                  <a:buNone/>
-                </a:pPr>
-                <a:endParaRPr lang="de-DE" b="1" u="sng" dirty="0"/>
-              </a:p>
-            </p:txBody>
-          </p:sp>
-        </mc:Choice>
-        <mc:Fallback xmlns="">
-          <p:sp>
-            <p:nvSpPr>
-              <p:cNvPr id="3" name="Inhaltsplatzhalter 34">
-                <a:extLst>
-                  <a:ext uri="{FF2B5EF4-FFF2-40B4-BE49-F238E27FC236}">
-                    <a16:creationId xmlns:a16="http://schemas.microsoft.com/office/drawing/2014/main" id="{5AAC02AD-412C-4CA6-6D41-037921129DF2}"/>
-                  </a:ext>
-                </a:extLst>
-              </p:cNvPr>
-              <p:cNvSpPr>
-                <a:spLocks noGrp="1" noRot="1" noChangeAspect="1" noMove="1" noResize="1" noEditPoints="1" noAdjustHandles="1" noChangeArrowheads="1" noChangeShapeType="1" noTextEdit="1"/>
-              </p:cNvSpPr>
-              <p:nvPr>
-                <p:ph idx="1"/>
-              </p:nvPr>
-            </p:nvSpPr>
-            <p:spPr>
-              <a:xfrm>
-                <a:off x="361950" y="1376363"/>
-                <a:ext cx="11468100" cy="4776773"/>
-              </a:xfrm>
-              <a:blipFill>
-                <a:blip r:embed="rId3"/>
-                <a:stretch>
-                  <a:fillRect l="-1488" t="-1916"/>
-                </a:stretch>
-              </a:blipFill>
-            </p:spPr>
-            <p:txBody>
-              <a:bodyPr/>
-              <a:lstStyle/>
-              <a:p>
-                <a:r>
-                  <a:rPr lang="de-DE">
-                    <a:noFill/>
-                  </a:rPr>
-                  <a:t> </a:t>
-                </a:r>
-              </a:p>
-            </p:txBody>
-          </p:sp>
-        </mc:Fallback>
-      </mc:AlternateContent>
-      <p:pic>
-        <p:nvPicPr>
-          <p:cNvPr id="5" name="Grafik 4">
-            <a:extLst>
-              <a:ext uri="{FF2B5EF4-FFF2-40B4-BE49-F238E27FC236}">
-                <a16:creationId xmlns:a16="http://schemas.microsoft.com/office/drawing/2014/main" id="{6FFE5A9F-C1D2-D269-E530-1A5FF6D6E4A8}"/>
-              </a:ext>
-            </a:extLst>
-          </p:cNvPr>
-          <p:cNvPicPr>
-            <a:picLocks noChangeAspect="1"/>
-          </p:cNvPicPr>
-          <p:nvPr/>
-        </p:nvPicPr>
-        <p:blipFill>
-          <a:blip r:embed="rId4">
-            <a:extLst>
-              <a:ext uri="{28A0092B-C50C-407E-A947-70E740481C1C}">
-                <a14:useLocalDpi xmlns:a14="http://schemas.microsoft.com/office/drawing/2010/main" val="0"/>
-              </a:ext>
-            </a:extLst>
-          </a:blip>
-          <a:stretch>
-            <a:fillRect/>
-          </a:stretch>
-        </p:blipFill>
-        <p:spPr>
-          <a:xfrm>
-            <a:off x="4391396" y="1781484"/>
-            <a:ext cx="3120449" cy="888797"/>
-          </a:xfrm>
-          <a:prstGeom prst="rect">
-            <a:avLst/>
-          </a:prstGeom>
-        </p:spPr>
-      </p:pic>
-      <p:pic>
-        <p:nvPicPr>
-          <p:cNvPr id="9" name="Grafik 8">
-            <a:extLst>
-              <a:ext uri="{FF2B5EF4-FFF2-40B4-BE49-F238E27FC236}">
-                <a16:creationId xmlns:a16="http://schemas.microsoft.com/office/drawing/2014/main" id="{2F1E5FB8-F5E6-0833-A49A-91F20B4C99B0}"/>
-              </a:ext>
-            </a:extLst>
-          </p:cNvPr>
-          <p:cNvPicPr>
-            <a:picLocks noChangeAspect="1"/>
-          </p:cNvPicPr>
-          <p:nvPr/>
-        </p:nvPicPr>
-        <p:blipFill>
-          <a:blip r:embed="rId5">
-            <a:extLst>
-              <a:ext uri="{28A0092B-C50C-407E-A947-70E740481C1C}">
-                <a14:useLocalDpi xmlns:a14="http://schemas.microsoft.com/office/drawing/2010/main" val="0"/>
-              </a:ext>
-            </a:extLst>
-          </a:blip>
-          <a:stretch>
-            <a:fillRect/>
-          </a:stretch>
-        </p:blipFill>
-        <p:spPr>
-          <a:xfrm>
-            <a:off x="1964534" y="3855549"/>
-            <a:ext cx="8262931" cy="1112318"/>
-          </a:xfrm>
-          <a:prstGeom prst="rect">
-            <a:avLst/>
-          </a:prstGeom>
-        </p:spPr>
-      </p:pic>
-    </p:spTree>
-    <p:extLst>
-      <p:ext uri="{BB962C8B-B14F-4D97-AF65-F5344CB8AC3E}">
-        <p14:creationId xmlns:p14="http://schemas.microsoft.com/office/powerpoint/2010/main" val="692685198"/>
-      </p:ext>
-    </p:extLst>
-  </p:cSld>
-  <p:clrMapOvr>
-    <a:masterClrMapping/>
-  </p:clrMapOvr>
-</p:sld>
-</file>
-
-<file path=ppt/slides/slide14.xml><?xml version="1.0" encoding="utf-8"?>
+<file path=ppt/slides/slide12.xml><?xml version="1.0" encoding="utf-8"?>
 <p:sld xmlns:a="http://schemas.openxmlformats.org/drawingml/2006/main" xmlns:r="http://schemas.openxmlformats.org/officeDocument/2006/relationships" xmlns:p="http://schemas.openxmlformats.org/presentationml/2006/main">
   <p:cSld>
     <p:spTree>
@@ -44965,7 +44232,7 @@
             <a:fld id="{A23FFA10-0470-4638-936A-23EC73946E25}" type="slidenum">
               <a:rPr lang="de-DE" smtClean="0"/>
               <a:pPr/>
-              <a:t>14</a:t>
+              <a:t>12</a:t>
             </a:fld>
             <a:endParaRPr lang="de-DE" dirty="0"/>
           </a:p>
@@ -45035,7 +44302,7 @@
         </p:blipFill>
         <p:spPr>
           <a:xfrm>
-            <a:off x="914294" y="1396557"/>
+            <a:off x="740800" y="1406727"/>
             <a:ext cx="10363409" cy="4730618"/>
           </a:xfrm>
           <a:prstGeom prst="rect">
@@ -45269,7 +44536,7 @@
                   <a:srgbClr val="000000"/>
                 </a:solidFill>
               </a:rPr>
-              <a:t> (HAR-OLS, GARCH, Hist. </a:t>
+              <a:t> (GARCH, Hist. </a:t>
             </a:r>
             <a:r>
               <a:rPr lang="de-DE" b="1" dirty="0" err="1">
@@ -45301,7 +44568,7 @@
                   <a:srgbClr val="000000"/>
                 </a:solidFill>
               </a:rPr>
-              <a:t>  </a:t>
+              <a:t> </a:t>
             </a:r>
             <a:r>
               <a:rPr lang="de-DE" b="1" dirty="0" err="1">
@@ -45370,6 +44637,89 @@
           </a:p>
         </p:txBody>
       </p:sp>
+      <p:cxnSp>
+        <p:nvCxnSpPr>
+          <p:cNvPr id="7" name="Gerader Verbinder 6">
+            <a:extLst>
+              <a:ext uri="{FF2B5EF4-FFF2-40B4-BE49-F238E27FC236}">
+                <a16:creationId xmlns:a16="http://schemas.microsoft.com/office/drawing/2014/main" id="{59DC5F0A-CBA1-FE7F-1C96-A199A49F0C15}"/>
+              </a:ext>
+            </a:extLst>
+          </p:cNvPr>
+          <p:cNvCxnSpPr/>
+          <p:nvPr/>
+        </p:nvCxnSpPr>
+        <p:spPr>
+          <a:xfrm>
+            <a:off x="7226710" y="4748981"/>
+            <a:ext cx="3382296" cy="196645"/>
+          </a:xfrm>
+          <a:prstGeom prst="line">
+            <a:avLst/>
+          </a:prstGeom>
+          <a:ln w="28575">
+            <a:solidFill>
+              <a:srgbClr val="C00000"/>
+            </a:solidFill>
+          </a:ln>
+        </p:spPr>
+        <p:style>
+          <a:lnRef idx="1">
+            <a:schemeClr val="accent1"/>
+          </a:lnRef>
+          <a:fillRef idx="0">
+            <a:schemeClr val="accent1"/>
+          </a:fillRef>
+          <a:effectRef idx="0">
+            <a:schemeClr val="accent1"/>
+          </a:effectRef>
+          <a:fontRef idx="minor">
+            <a:schemeClr val="tx1"/>
+          </a:fontRef>
+        </p:style>
+      </p:cxnSp>
+      <p:cxnSp>
+        <p:nvCxnSpPr>
+          <p:cNvPr id="10" name="Gerade Verbindung mit Pfeil 9">
+            <a:extLst>
+              <a:ext uri="{FF2B5EF4-FFF2-40B4-BE49-F238E27FC236}">
+                <a16:creationId xmlns:a16="http://schemas.microsoft.com/office/drawing/2014/main" id="{AF649778-C077-B503-99B7-9656F8FB9DEC}"/>
+              </a:ext>
+            </a:extLst>
+          </p:cNvPr>
+          <p:cNvCxnSpPr/>
+          <p:nvPr/>
+        </p:nvCxnSpPr>
+        <p:spPr>
+          <a:xfrm>
+            <a:off x="609600" y="157316"/>
+            <a:ext cx="914400" cy="914400"/>
+          </a:xfrm>
+          <a:prstGeom prst="straightConnector1">
+            <a:avLst/>
+          </a:prstGeom>
+          <a:ln>
+            <a:solidFill>
+              <a:schemeClr val="tx2"/>
+            </a:solidFill>
+            <a:tailEnd type="triangle"/>
+          </a:ln>
+        </p:spPr>
+        <p:style>
+          <a:lnRef idx="1">
+            <a:schemeClr val="accent1"/>
+          </a:lnRef>
+          <a:fillRef idx="0">
+            <a:schemeClr val="accent1"/>
+          </a:fillRef>
+          <a:effectRef idx="0">
+            <a:schemeClr val="accent1"/>
+          </a:effectRef>
+          <a:fontRef idx="minor">
+            <a:schemeClr val="tx1"/>
+          </a:fontRef>
+        </p:style>
+      </p:cxnSp>
     </p:spTree>
     <p:extLst>
       <p:ext uri="{BB962C8B-B14F-4D97-AF65-F5344CB8AC3E}">
@@ -45383,7 +44733,7 @@
 </p:sld>
 </file>
 
-<file path=ppt/slides/slide15.xml><?xml version="1.0" encoding="utf-8"?>
+<file path=ppt/slides/slide13.xml><?xml version="1.0" encoding="utf-8"?>
 <p:sld xmlns:a="http://schemas.openxmlformats.org/drawingml/2006/main" xmlns:r="http://schemas.openxmlformats.org/officeDocument/2006/relationships" xmlns:p="http://schemas.openxmlformats.org/presentationml/2006/main">
   <p:cSld>
     <p:spTree>
@@ -45528,7 +44878,7 @@
             <a:fld id="{A23FFA10-0470-4638-936A-23EC73946E25}" type="slidenum">
               <a:rPr lang="de-DE" smtClean="0"/>
               <a:pPr/>
-              <a:t>15</a:t>
+              <a:t>13</a:t>
             </a:fld>
             <a:endParaRPr lang="de-DE" dirty="0"/>
           </a:p>
@@ -45583,7 +44933,7 @@
 </p:sld>
 </file>
 
-<file path=ppt/slides/slide16.xml><?xml version="1.0" encoding="utf-8"?>
+<file path=ppt/slides/slide14.xml><?xml version="1.0" encoding="utf-8"?>
 <p:sld xmlns:a="http://schemas.openxmlformats.org/drawingml/2006/main" xmlns:r="http://schemas.openxmlformats.org/officeDocument/2006/relationships" xmlns:p="http://schemas.openxmlformats.org/presentationml/2006/main">
   <p:cSld>
     <p:spTree>
@@ -45717,7 +45067,7 @@
             <a:fld id="{A23FFA10-0470-4638-936A-23EC73946E25}" type="slidenum">
               <a:rPr lang="de-DE" smtClean="0"/>
               <a:pPr/>
-              <a:t>16</a:t>
+              <a:t>14</a:t>
             </a:fld>
             <a:endParaRPr lang="de-DE" dirty="0"/>
           </a:p>
@@ -46070,7 +45420,7 @@
 </p:sld>
 </file>
 
-<file path=ppt/slides/slide17.xml><?xml version="1.0" encoding="utf-8"?>
+<file path=ppt/slides/slide15.xml><?xml version="1.0" encoding="utf-8"?>
 <p:sld xmlns:a="http://schemas.openxmlformats.org/drawingml/2006/main" xmlns:r="http://schemas.openxmlformats.org/officeDocument/2006/relationships" xmlns:p="http://schemas.openxmlformats.org/presentationml/2006/main">
   <p:cSld>
     <p:spTree>
@@ -46212,7 +45562,7 @@
             <a:fld id="{A23FFA10-0470-4638-936A-23EC73946E25}" type="slidenum">
               <a:rPr lang="de-DE" smtClean="0"/>
               <a:pPr/>
-              <a:t>17</a:t>
+              <a:t>15</a:t>
             </a:fld>
             <a:endParaRPr lang="de-DE" dirty="0"/>
           </a:p>
@@ -46303,7 +45653,7 @@
 </p:sld>
 </file>
 
-<file path=ppt/slides/slide18.xml><?xml version="1.0" encoding="utf-8"?>
+<file path=ppt/slides/slide16.xml><?xml version="1.0" encoding="utf-8"?>
 <p:sld xmlns:a="http://schemas.openxmlformats.org/drawingml/2006/main" xmlns:r="http://schemas.openxmlformats.org/officeDocument/2006/relationships" xmlns:p="http://schemas.openxmlformats.org/presentationml/2006/main">
   <p:cSld>
     <p:spTree>
@@ -46459,7 +45809,7 @@
             <a:fld id="{A23FFA10-0470-4638-936A-23EC73946E25}" type="slidenum">
               <a:rPr lang="de-DE" smtClean="0"/>
               <a:pPr/>
-              <a:t>18</a:t>
+              <a:t>16</a:t>
             </a:fld>
             <a:endParaRPr lang="de-DE" dirty="0"/>
           </a:p>
@@ -46713,7 +46063,7 @@
 </p:sld>
 </file>
 
-<file path=ppt/slides/slide19.xml><?xml version="1.0" encoding="utf-8"?>
+<file path=ppt/slides/slide17.xml><?xml version="1.0" encoding="utf-8"?>
 <p:sld xmlns:a="http://schemas.openxmlformats.org/drawingml/2006/main" xmlns:r="http://schemas.openxmlformats.org/officeDocument/2006/relationships" xmlns:p="http://schemas.openxmlformats.org/presentationml/2006/main">
   <p:cSld>
     <p:spTree>
@@ -46847,7 +46197,7 @@
             <a:fld id="{A23FFA10-0470-4638-936A-23EC73946E25}" type="slidenum">
               <a:rPr lang="de-DE" smtClean="0"/>
               <a:pPr/>
-              <a:t>19</a:t>
+              <a:t>17</a:t>
             </a:fld>
             <a:endParaRPr lang="de-DE" dirty="0"/>
           </a:p>
@@ -47066,7 +46416,7 @@
             <a:pPr lvl="1"/>
             <a:r>
               <a:rPr lang="en-US" dirty="0"/>
-              <a:t>Reason: ENSO is a slow moving climate variable, can’t predict next days vol.</a:t>
+              <a:t>Reason: ENSO is a slow-moving climate variable, can’t predict next days vol.</a:t>
             </a:r>
           </a:p>
           <a:p>
@@ -47079,7 +46429,7 @@
             </a:pPr>
             <a:r>
               <a:rPr lang="en-US" b="1" dirty="0"/>
-              <a:t>2 - Long horizons + upper tail: ENSO shines</a:t>
+              <a:t>2 - Long horizons + upper tail: ENSO improves forecast</a:t>
             </a:r>
           </a:p>
           <a:p>
@@ -47123,7 +46473,15 @@
             </a:r>
             <a:r>
               <a:rPr lang="de-DE" b="1" dirty="0" err="1"/>
-              <a:t>mean</a:t>
+              <a:t>middle</a:t>
+            </a:r>
+            <a:r>
+              <a:rPr lang="de-DE" b="1" dirty="0"/>
+              <a:t> </a:t>
+            </a:r>
+            <a:r>
+              <a:rPr lang="de-DE" b="1" dirty="0" err="1"/>
+              <a:t>quantile</a:t>
             </a:r>
             <a:r>
               <a:rPr lang="de-DE" b="1" dirty="0"/>
@@ -47145,6 +46503,501 @@
     <p:extLst>
       <p:ext uri="{BB962C8B-B14F-4D97-AF65-F5344CB8AC3E}">
         <p14:creationId xmlns:p14="http://schemas.microsoft.com/office/powerpoint/2010/main" val="2191724272"/>
+      </p:ext>
+    </p:extLst>
+  </p:cSld>
+  <p:clrMapOvr>
+    <a:masterClrMapping/>
+  </p:clrMapOvr>
+</p:sld>
+</file>
+
+<file path=ppt/slides/slide18.xml><?xml version="1.0" encoding="utf-8"?>
+<p:sld xmlns:a="http://schemas.openxmlformats.org/drawingml/2006/main" xmlns:r="http://schemas.openxmlformats.org/officeDocument/2006/relationships" xmlns:p="http://schemas.openxmlformats.org/presentationml/2006/main">
+  <p:cSld>
+    <p:spTree>
+      <p:nvGrpSpPr>
+        <p:cNvPr id="1" name="">
+          <a:extLst>
+            <a:ext uri="{FF2B5EF4-FFF2-40B4-BE49-F238E27FC236}">
+              <a16:creationId xmlns:a16="http://schemas.microsoft.com/office/drawing/2014/main" id="{81EA773D-4023-2724-BC16-A61DFA05BECA}"/>
+            </a:ext>
+          </a:extLst>
+        </p:cNvPr>
+        <p:cNvGrpSpPr/>
+        <p:nvPr/>
+      </p:nvGrpSpPr>
+      <p:grpSpPr>
+        <a:xfrm>
+          <a:off x="0" y="0"/>
+          <a:ext cx="0" cy="0"/>
+          <a:chOff x="0" y="0"/>
+          <a:chExt cx="0" cy="0"/>
+        </a:xfrm>
+      </p:grpSpPr>
+      <p:sp>
+        <p:nvSpPr>
+          <p:cNvPr id="49" name="Textplatzhalter 48">
+            <a:extLst>
+              <a:ext uri="{FF2B5EF4-FFF2-40B4-BE49-F238E27FC236}">
+                <a16:creationId xmlns:a16="http://schemas.microsoft.com/office/drawing/2014/main" id="{E3CFFF2E-D7DF-3672-9713-5EA279E23122}"/>
+              </a:ext>
+            </a:extLst>
+          </p:cNvPr>
+          <p:cNvSpPr>
+            <a:spLocks noGrp="1"/>
+          </p:cNvSpPr>
+          <p:nvPr>
+            <p:ph type="body" sz="quarter" idx="13"/>
+          </p:nvPr>
+        </p:nvSpPr>
+        <p:spPr>
+          <a:solidFill>
+            <a:srgbClr val="004976"/>
+          </a:solidFill>
+        </p:spPr>
+        <p:txBody>
+          <a:bodyPr/>
+          <a:lstStyle/>
+          <a:p>
+            <a:endParaRPr lang="de-DE"/>
+          </a:p>
+        </p:txBody>
+      </p:sp>
+      <p:sp>
+        <p:nvSpPr>
+          <p:cNvPr id="2" name="Titel 1">
+            <a:extLst>
+              <a:ext uri="{FF2B5EF4-FFF2-40B4-BE49-F238E27FC236}">
+                <a16:creationId xmlns:a16="http://schemas.microsoft.com/office/drawing/2014/main" id="{DC097853-9204-547C-C1A5-F7AC7FAF12A2}"/>
+              </a:ext>
+            </a:extLst>
+          </p:cNvPr>
+          <p:cNvSpPr>
+            <a:spLocks noGrp="1"/>
+          </p:cNvSpPr>
+          <p:nvPr>
+            <p:ph type="title"/>
+          </p:nvPr>
+        </p:nvSpPr>
+        <p:spPr/>
+        <p:txBody>
+          <a:bodyPr/>
+          <a:lstStyle/>
+          <a:p>
+            <a:r>
+              <a:rPr lang="de-DE" dirty="0"/>
+              <a:t>Model Confidence Set</a:t>
+            </a:r>
+          </a:p>
+        </p:txBody>
+      </p:sp>
+      <p:sp>
+        <p:nvSpPr>
+          <p:cNvPr id="14" name="Textplatzhalter 13">
+            <a:extLst>
+              <a:ext uri="{FF2B5EF4-FFF2-40B4-BE49-F238E27FC236}">
+                <a16:creationId xmlns:a16="http://schemas.microsoft.com/office/drawing/2014/main" id="{A2D07FA2-A251-0847-16A5-814723AC9A17}"/>
+              </a:ext>
+            </a:extLst>
+          </p:cNvPr>
+          <p:cNvSpPr>
+            <a:spLocks noGrp="1"/>
+          </p:cNvSpPr>
+          <p:nvPr>
+            <p:ph type="body" sz="quarter" idx="39"/>
+          </p:nvPr>
+        </p:nvSpPr>
+        <p:spPr/>
+        <p:txBody>
+          <a:bodyPr/>
+          <a:lstStyle/>
+          <a:p>
+            <a:endParaRPr lang="de-DE" dirty="0"/>
+          </a:p>
+        </p:txBody>
+      </p:sp>
+      <p:sp>
+        <p:nvSpPr>
+          <p:cNvPr id="6" name="Foliennummernplatzhalter 5">
+            <a:extLst>
+              <a:ext uri="{FF2B5EF4-FFF2-40B4-BE49-F238E27FC236}">
+                <a16:creationId xmlns:a16="http://schemas.microsoft.com/office/drawing/2014/main" id="{182E4CBB-0A11-274A-E36E-8FB845087450}"/>
+              </a:ext>
+            </a:extLst>
+          </p:cNvPr>
+          <p:cNvSpPr>
+            <a:spLocks noGrp="1"/>
+          </p:cNvSpPr>
+          <p:nvPr>
+            <p:ph type="sldNum" sz="quarter" idx="38"/>
+          </p:nvPr>
+        </p:nvSpPr>
+        <p:spPr/>
+        <p:txBody>
+          <a:bodyPr/>
+          <a:lstStyle/>
+          <a:p>
+            <a:fld id="{A23FFA10-0470-4638-936A-23EC73946E25}" type="slidenum">
+              <a:rPr lang="de-DE" smtClean="0"/>
+              <a:pPr/>
+              <a:t>18</a:t>
+            </a:fld>
+            <a:endParaRPr lang="de-DE" dirty="0"/>
+          </a:p>
+        </p:txBody>
+      </p:sp>
+      <p:pic>
+        <p:nvPicPr>
+          <p:cNvPr id="5" name="Grafik 4">
+            <a:extLst>
+              <a:ext uri="{FF2B5EF4-FFF2-40B4-BE49-F238E27FC236}">
+                <a16:creationId xmlns:a16="http://schemas.microsoft.com/office/drawing/2014/main" id="{44D6A4C3-8FEC-E9C3-32C1-7566D1D41883}"/>
+              </a:ext>
+            </a:extLst>
+          </p:cNvPr>
+          <p:cNvPicPr>
+            <a:picLocks noChangeAspect="1"/>
+          </p:cNvPicPr>
+          <p:nvPr/>
+        </p:nvPicPr>
+        <p:blipFill>
+          <a:blip r:embed="rId3">
+            <a:extLst>
+              <a:ext uri="{28A0092B-C50C-407E-A947-70E740481C1C}">
+                <a14:useLocalDpi xmlns:a14="http://schemas.microsoft.com/office/drawing/2010/main" val="0"/>
+              </a:ext>
+            </a:extLst>
+          </a:blip>
+          <a:srcRect t="44385"/>
+          <a:stretch>
+            <a:fillRect/>
+          </a:stretch>
+        </p:blipFill>
+        <p:spPr>
+          <a:xfrm>
+            <a:off x="228820" y="1805158"/>
+            <a:ext cx="11734360" cy="4357866"/>
+          </a:xfrm>
+          <a:prstGeom prst="rect">
+            <a:avLst/>
+          </a:prstGeom>
+        </p:spPr>
+      </p:pic>
+    </p:spTree>
+    <p:extLst>
+      <p:ext uri="{BB962C8B-B14F-4D97-AF65-F5344CB8AC3E}">
+        <p14:creationId xmlns:p14="http://schemas.microsoft.com/office/powerpoint/2010/main" val="857411303"/>
+      </p:ext>
+    </p:extLst>
+  </p:cSld>
+  <p:clrMapOvr>
+    <a:masterClrMapping/>
+  </p:clrMapOvr>
+</p:sld>
+</file>
+
+<file path=ppt/slides/slide19.xml><?xml version="1.0" encoding="utf-8"?>
+<p:sld xmlns:a="http://schemas.openxmlformats.org/drawingml/2006/main" xmlns:r="http://schemas.openxmlformats.org/officeDocument/2006/relationships" xmlns:p="http://schemas.openxmlformats.org/presentationml/2006/main">
+  <p:cSld>
+    <p:spTree>
+      <p:nvGrpSpPr>
+        <p:cNvPr id="1" name=""/>
+        <p:cNvGrpSpPr/>
+        <p:nvPr/>
+      </p:nvGrpSpPr>
+      <p:grpSpPr>
+        <a:xfrm>
+          <a:off x="0" y="0"/>
+          <a:ext cx="0" cy="0"/>
+          <a:chOff x="0" y="0"/>
+          <a:chExt cx="0" cy="0"/>
+        </a:xfrm>
+      </p:grpSpPr>
+      <p:sp>
+        <p:nvSpPr>
+          <p:cNvPr id="34" name="Textplatzhalter 33">
+            <a:extLst>
+              <a:ext uri="{FF2B5EF4-FFF2-40B4-BE49-F238E27FC236}">
+                <a16:creationId xmlns:a16="http://schemas.microsoft.com/office/drawing/2014/main" id="{5058796B-BC4B-4019-8620-8146C8E814B2}"/>
+              </a:ext>
+            </a:extLst>
+          </p:cNvPr>
+          <p:cNvSpPr>
+            <a:spLocks noGrp="1"/>
+          </p:cNvSpPr>
+          <p:nvPr>
+            <p:ph type="body" sz="quarter" idx="40"/>
+          </p:nvPr>
+        </p:nvSpPr>
+        <p:spPr>
+          <a:solidFill>
+            <a:srgbClr val="004976"/>
+          </a:solidFill>
+        </p:spPr>
+        <p:txBody>
+          <a:bodyPr/>
+          <a:lstStyle/>
+          <a:p>
+            <a:endParaRPr lang="de-DE"/>
+          </a:p>
+        </p:txBody>
+      </p:sp>
+      <p:sp>
+        <p:nvSpPr>
+          <p:cNvPr id="31" name="Bildplatzhalter 30">
+            <a:extLst>
+              <a:ext uri="{FF2B5EF4-FFF2-40B4-BE49-F238E27FC236}">
+                <a16:creationId xmlns:a16="http://schemas.microsoft.com/office/drawing/2014/main" id="{E9B87456-C1D8-4F5B-9083-84320E92D55D}"/>
+              </a:ext>
+            </a:extLst>
+          </p:cNvPr>
+          <p:cNvSpPr>
+            <a:spLocks noGrp="1"/>
+          </p:cNvSpPr>
+          <p:nvPr>
+            <p:ph type="pic" sz="quarter" idx="13"/>
+          </p:nvPr>
+        </p:nvSpPr>
+        <p:spPr/>
+        <p:txBody>
+          <a:bodyPr/>
+          <a:lstStyle/>
+          <a:p>
+            <a:endParaRPr lang="de-DE"/>
+          </a:p>
+        </p:txBody>
+      </p:sp>
+      <p:sp>
+        <p:nvSpPr>
+          <p:cNvPr id="9" name="Textplatzhalter 8">
+            <a:extLst>
+              <a:ext uri="{FF2B5EF4-FFF2-40B4-BE49-F238E27FC236}">
+                <a16:creationId xmlns:a16="http://schemas.microsoft.com/office/drawing/2014/main" id="{F8910AA3-3AFE-4188-B8C0-9EF663F14644}"/>
+              </a:ext>
+            </a:extLst>
+          </p:cNvPr>
+          <p:cNvSpPr>
+            <a:spLocks noGrp="1"/>
+          </p:cNvSpPr>
+          <p:nvPr>
+            <p:ph type="body" sz="quarter" idx="19"/>
+          </p:nvPr>
+        </p:nvSpPr>
+        <p:spPr/>
+        <p:txBody>
+          <a:bodyPr/>
+          <a:lstStyle/>
+          <a:p>
+            <a:endParaRPr lang="de-DE" dirty="0"/>
+          </a:p>
+        </p:txBody>
+      </p:sp>
+      <p:sp>
+        <p:nvSpPr>
+          <p:cNvPr id="10" name="Textplatzhalter 9">
+            <a:extLst>
+              <a:ext uri="{FF2B5EF4-FFF2-40B4-BE49-F238E27FC236}">
+                <a16:creationId xmlns:a16="http://schemas.microsoft.com/office/drawing/2014/main" id="{66587AAF-FBB7-4C0A-ABD8-D4E8720A38AD}"/>
+              </a:ext>
+            </a:extLst>
+          </p:cNvPr>
+          <p:cNvSpPr>
+            <a:spLocks noGrp="1"/>
+          </p:cNvSpPr>
+          <p:nvPr>
+            <p:ph type="body" sz="quarter" idx="20"/>
+          </p:nvPr>
+        </p:nvSpPr>
+        <p:spPr/>
+        <p:txBody>
+          <a:bodyPr/>
+          <a:lstStyle/>
+          <a:p>
+            <a:endParaRPr lang="de-DE" dirty="0"/>
+          </a:p>
+        </p:txBody>
+      </p:sp>
+      <p:sp>
+        <p:nvSpPr>
+          <p:cNvPr id="11" name="Textplatzhalter 10">
+            <a:extLst>
+              <a:ext uri="{FF2B5EF4-FFF2-40B4-BE49-F238E27FC236}">
+                <a16:creationId xmlns:a16="http://schemas.microsoft.com/office/drawing/2014/main" id="{4A0A8A0C-9222-48B8-9EF3-C579C9CBDCCA}"/>
+              </a:ext>
+            </a:extLst>
+          </p:cNvPr>
+          <p:cNvSpPr>
+            <a:spLocks noGrp="1"/>
+          </p:cNvSpPr>
+          <p:nvPr>
+            <p:ph type="body" sz="quarter" idx="21"/>
+          </p:nvPr>
+        </p:nvSpPr>
+        <p:spPr/>
+        <p:txBody>
+          <a:bodyPr/>
+          <a:lstStyle/>
+          <a:p>
+            <a:endParaRPr lang="de-DE" dirty="0"/>
+          </a:p>
+        </p:txBody>
+      </p:sp>
+      <p:sp>
+        <p:nvSpPr>
+          <p:cNvPr id="12" name="Textplatzhalter 11">
+            <a:extLst>
+              <a:ext uri="{FF2B5EF4-FFF2-40B4-BE49-F238E27FC236}">
+                <a16:creationId xmlns:a16="http://schemas.microsoft.com/office/drawing/2014/main" id="{31BA8D7C-AECA-4EB7-AF67-CB68F7277E03}"/>
+              </a:ext>
+            </a:extLst>
+          </p:cNvPr>
+          <p:cNvSpPr>
+            <a:spLocks noGrp="1"/>
+          </p:cNvSpPr>
+          <p:nvPr>
+            <p:ph type="body" sz="quarter" idx="22"/>
+          </p:nvPr>
+        </p:nvSpPr>
+        <p:spPr/>
+        <p:txBody>
+          <a:bodyPr/>
+          <a:lstStyle/>
+          <a:p>
+            <a:endParaRPr lang="de-DE" dirty="0"/>
+          </a:p>
+        </p:txBody>
+      </p:sp>
+      <p:sp>
+        <p:nvSpPr>
+          <p:cNvPr id="32" name="Textplatzhalter 31">
+            <a:extLst>
+              <a:ext uri="{FF2B5EF4-FFF2-40B4-BE49-F238E27FC236}">
+                <a16:creationId xmlns:a16="http://schemas.microsoft.com/office/drawing/2014/main" id="{AC2606EE-DF11-437F-B9B2-B09736C82DF0}"/>
+              </a:ext>
+            </a:extLst>
+          </p:cNvPr>
+          <p:cNvSpPr>
+            <a:spLocks noGrp="1"/>
+          </p:cNvSpPr>
+          <p:nvPr>
+            <p:ph type="body" sz="quarter" idx="35"/>
+          </p:nvPr>
+        </p:nvSpPr>
+        <p:spPr/>
+        <p:txBody>
+          <a:bodyPr/>
+          <a:lstStyle/>
+          <a:p>
+            <a:endParaRPr lang="de-DE"/>
+          </a:p>
+        </p:txBody>
+      </p:sp>
+      <p:sp>
+        <p:nvSpPr>
+          <p:cNvPr id="33" name="Textplatzhalter 32">
+            <a:extLst>
+              <a:ext uri="{FF2B5EF4-FFF2-40B4-BE49-F238E27FC236}">
+                <a16:creationId xmlns:a16="http://schemas.microsoft.com/office/drawing/2014/main" id="{48C6FFC0-3252-4080-A399-35506F09CA45}"/>
+              </a:ext>
+            </a:extLst>
+          </p:cNvPr>
+          <p:cNvSpPr>
+            <a:spLocks noGrp="1"/>
+          </p:cNvSpPr>
+          <p:nvPr>
+            <p:ph type="body" sz="quarter" idx="39"/>
+          </p:nvPr>
+        </p:nvSpPr>
+        <p:spPr/>
+        <p:txBody>
+          <a:bodyPr/>
+          <a:lstStyle/>
+          <a:p>
+            <a:endParaRPr lang="de-DE"/>
+          </a:p>
+        </p:txBody>
+      </p:sp>
+      <p:sp>
+        <p:nvSpPr>
+          <p:cNvPr id="4" name="Titel 3">
+            <a:extLst>
+              <a:ext uri="{FF2B5EF4-FFF2-40B4-BE49-F238E27FC236}">
+                <a16:creationId xmlns:a16="http://schemas.microsoft.com/office/drawing/2014/main" id="{03B3FD09-B193-421F-ADFF-24DC448BF555}"/>
+              </a:ext>
+            </a:extLst>
+          </p:cNvPr>
+          <p:cNvSpPr>
+            <a:spLocks noGrp="1"/>
+          </p:cNvSpPr>
+          <p:nvPr>
+            <p:ph type="title"/>
+          </p:nvPr>
+        </p:nvSpPr>
+        <p:spPr/>
+        <p:txBody>
+          <a:bodyPr>
+            <a:normAutofit fontScale="90000"/>
+          </a:bodyPr>
+          <a:lstStyle/>
+          <a:p>
+            <a:endParaRPr lang="de-DE" dirty="0"/>
+          </a:p>
+        </p:txBody>
+      </p:sp>
+      <p:sp>
+        <p:nvSpPr>
+          <p:cNvPr id="7" name="Bildplatzhalter 6"/>
+          <p:cNvSpPr>
+            <a:spLocks noGrp="1"/>
+          </p:cNvSpPr>
+          <p:nvPr>
+            <p:ph type="pic" sz="quarter" idx="12"/>
+          </p:nvPr>
+        </p:nvSpPr>
+        <p:spPr/>
+        <p:txBody>
+          <a:bodyPr/>
+          <a:lstStyle/>
+          <a:p>
+            <a:endParaRPr lang="de-DE"/>
+          </a:p>
+        </p:txBody>
+      </p:sp>
+      <p:sp>
+        <p:nvSpPr>
+          <p:cNvPr id="5" name="Foliennummernplatzhalter 4">
+            <a:extLst>
+              <a:ext uri="{FF2B5EF4-FFF2-40B4-BE49-F238E27FC236}">
+                <a16:creationId xmlns:a16="http://schemas.microsoft.com/office/drawing/2014/main" id="{BD83E7EA-050B-409D-91B9-97B0D6492EFF}"/>
+              </a:ext>
+            </a:extLst>
+          </p:cNvPr>
+          <p:cNvSpPr>
+            <a:spLocks noGrp="1"/>
+          </p:cNvSpPr>
+          <p:nvPr>
+            <p:ph type="sldNum" sz="quarter" idx="38"/>
+          </p:nvPr>
+        </p:nvSpPr>
+        <p:spPr/>
+        <p:txBody>
+          <a:bodyPr/>
+          <a:lstStyle/>
+          <a:p>
+            <a:fld id="{A23FFA10-0470-4638-936A-23EC73946E25}" type="slidenum">
+              <a:rPr lang="de-DE" smtClean="0"/>
+              <a:pPr/>
+              <a:t>19</a:t>
+            </a:fld>
+            <a:endParaRPr lang="de-DE" dirty="0"/>
+          </a:p>
+        </p:txBody>
+      </p:sp>
+    </p:spTree>
+    <p:extLst>
+      <p:ext uri="{BB962C8B-B14F-4D97-AF65-F5344CB8AC3E}">
+        <p14:creationId xmlns:p14="http://schemas.microsoft.com/office/powerpoint/2010/main" val="2213563075"/>
       </p:ext>
     </p:extLst>
   </p:cSld>
@@ -47759,13 +47612,7 @@
   <p:cSld>
     <p:spTree>
       <p:nvGrpSpPr>
-        <p:cNvPr id="1" name="">
-          <a:extLst>
-            <a:ext uri="{FF2B5EF4-FFF2-40B4-BE49-F238E27FC236}">
-              <a16:creationId xmlns:a16="http://schemas.microsoft.com/office/drawing/2014/main" id="{81EA773D-4023-2724-BC16-A61DFA05BECA}"/>
-            </a:ext>
-          </a:extLst>
-        </p:cNvPr>
+        <p:cNvPr id="1" name=""/>
         <p:cNvGrpSpPr/>
         <p:nvPr/>
       </p:nvGrpSpPr>
@@ -47779,18 +47626,18 @@
       </p:grpSpPr>
       <p:sp>
         <p:nvSpPr>
-          <p:cNvPr id="49" name="Textplatzhalter 48">
-            <a:extLst>
-              <a:ext uri="{FF2B5EF4-FFF2-40B4-BE49-F238E27FC236}">
-                <a16:creationId xmlns:a16="http://schemas.microsoft.com/office/drawing/2014/main" id="{E3CFFF2E-D7DF-3672-9713-5EA279E23122}"/>
-              </a:ext>
-            </a:extLst>
-          </p:cNvPr>
-          <p:cNvSpPr>
-            <a:spLocks noGrp="1"/>
-          </p:cNvSpPr>
-          <p:nvPr>
-            <p:ph type="body" sz="quarter" idx="13"/>
+          <p:cNvPr id="41" name="Textplatzhalter 40">
+            <a:extLst>
+              <a:ext uri="{FF2B5EF4-FFF2-40B4-BE49-F238E27FC236}">
+                <a16:creationId xmlns:a16="http://schemas.microsoft.com/office/drawing/2014/main" id="{DF84F6E6-58AC-4AD2-B3AA-97E8BE0912F6}"/>
+              </a:ext>
+            </a:extLst>
+          </p:cNvPr>
+          <p:cNvSpPr>
+            <a:spLocks noGrp="1"/>
+          </p:cNvSpPr>
+          <p:nvPr>
+            <p:ph type="body" sz="quarter" idx="40"/>
           </p:nvPr>
         </p:nvSpPr>
         <p:spPr>
@@ -47808,18 +47655,18 @@
       </p:sp>
       <p:sp>
         <p:nvSpPr>
-          <p:cNvPr id="2" name="Titel 1">
-            <a:extLst>
-              <a:ext uri="{FF2B5EF4-FFF2-40B4-BE49-F238E27FC236}">
-                <a16:creationId xmlns:a16="http://schemas.microsoft.com/office/drawing/2014/main" id="{DC097853-9204-547C-C1A5-F7AC7FAF12A2}"/>
-              </a:ext>
-            </a:extLst>
-          </p:cNvPr>
-          <p:cNvSpPr>
-            <a:spLocks noGrp="1"/>
-          </p:cNvSpPr>
-          <p:nvPr>
-            <p:ph type="title"/>
+          <p:cNvPr id="37" name="Bildplatzhalter 36">
+            <a:extLst>
+              <a:ext uri="{FF2B5EF4-FFF2-40B4-BE49-F238E27FC236}">
+                <a16:creationId xmlns:a16="http://schemas.microsoft.com/office/drawing/2014/main" id="{4CCCBFF2-833F-49A3-A213-45CC2AD61017}"/>
+              </a:ext>
+            </a:extLst>
+          </p:cNvPr>
+          <p:cNvSpPr>
+            <a:spLocks noGrp="1"/>
+          </p:cNvSpPr>
+          <p:nvPr>
+            <p:ph type="pic" sz="quarter" idx="12"/>
           </p:nvPr>
         </p:nvSpPr>
         <p:spPr/>
@@ -47827,27 +47674,24 @@
           <a:bodyPr/>
           <a:lstStyle/>
           <a:p>
-            <a:r>
-              <a:rPr lang="de-DE" dirty="0"/>
-              <a:t>Model Confidence Set</a:t>
-            </a:r>
-          </a:p>
-        </p:txBody>
-      </p:sp>
-      <p:sp>
-        <p:nvSpPr>
-          <p:cNvPr id="14" name="Textplatzhalter 13">
-            <a:extLst>
-              <a:ext uri="{FF2B5EF4-FFF2-40B4-BE49-F238E27FC236}">
-                <a16:creationId xmlns:a16="http://schemas.microsoft.com/office/drawing/2014/main" id="{A2D07FA2-A251-0847-16A5-814723AC9A17}"/>
-              </a:ext>
-            </a:extLst>
-          </p:cNvPr>
-          <p:cNvSpPr>
-            <a:spLocks noGrp="1"/>
-          </p:cNvSpPr>
-          <p:nvPr>
-            <p:ph type="body" sz="quarter" idx="39"/>
+            <a:endParaRPr lang="de-DE"/>
+          </a:p>
+        </p:txBody>
+      </p:sp>
+      <p:sp>
+        <p:nvSpPr>
+          <p:cNvPr id="38" name="Bildplatzhalter 37">
+            <a:extLst>
+              <a:ext uri="{FF2B5EF4-FFF2-40B4-BE49-F238E27FC236}">
+                <a16:creationId xmlns:a16="http://schemas.microsoft.com/office/drawing/2014/main" id="{26BF64C2-9F0C-4CFC-89F0-80F66F9CE8EC}"/>
+              </a:ext>
+            </a:extLst>
+          </p:cNvPr>
+          <p:cNvSpPr>
+            <a:spLocks noGrp="1"/>
+          </p:cNvSpPr>
+          <p:nvPr>
+            <p:ph type="pic" sz="quarter" idx="13"/>
           </p:nvPr>
         </p:nvSpPr>
         <p:spPr/>
@@ -47855,24 +47699,251 @@
           <a:bodyPr/>
           <a:lstStyle/>
           <a:p>
+            <a:endParaRPr lang="de-DE"/>
+          </a:p>
+        </p:txBody>
+      </p:sp>
+      <p:sp>
+        <p:nvSpPr>
+          <p:cNvPr id="39" name="Bildplatzhalter 38">
+            <a:extLst>
+              <a:ext uri="{FF2B5EF4-FFF2-40B4-BE49-F238E27FC236}">
+                <a16:creationId xmlns:a16="http://schemas.microsoft.com/office/drawing/2014/main" id="{CF245758-37EE-4760-88C2-922D3DE3514D}"/>
+              </a:ext>
+            </a:extLst>
+          </p:cNvPr>
+          <p:cNvSpPr>
+            <a:spLocks noGrp="1"/>
+          </p:cNvSpPr>
+          <p:nvPr>
+            <p:ph type="pic" sz="quarter" idx="14"/>
+          </p:nvPr>
+        </p:nvSpPr>
+        <p:spPr/>
+        <p:txBody>
+          <a:bodyPr/>
+          <a:lstStyle/>
+          <a:p>
+            <a:endParaRPr lang="de-DE"/>
+          </a:p>
+        </p:txBody>
+      </p:sp>
+      <p:sp>
+        <p:nvSpPr>
+          <p:cNvPr id="9" name="Textplatzhalter 8">
+            <a:extLst>
+              <a:ext uri="{FF2B5EF4-FFF2-40B4-BE49-F238E27FC236}">
+                <a16:creationId xmlns:a16="http://schemas.microsoft.com/office/drawing/2014/main" id="{52422B47-2488-46C8-A0E8-358BE5EA28BB}"/>
+              </a:ext>
+            </a:extLst>
+          </p:cNvPr>
+          <p:cNvSpPr>
+            <a:spLocks noGrp="1"/>
+          </p:cNvSpPr>
+          <p:nvPr>
+            <p:ph type="body" sz="quarter" idx="19"/>
+          </p:nvPr>
+        </p:nvSpPr>
+        <p:spPr/>
+        <p:txBody>
+          <a:bodyPr/>
+          <a:lstStyle/>
+          <a:p>
             <a:endParaRPr lang="de-DE" dirty="0"/>
           </a:p>
         </p:txBody>
       </p:sp>
       <p:sp>
         <p:nvSpPr>
-          <p:cNvPr id="6" name="Foliennummernplatzhalter 5">
-            <a:extLst>
-              <a:ext uri="{FF2B5EF4-FFF2-40B4-BE49-F238E27FC236}">
-                <a16:creationId xmlns:a16="http://schemas.microsoft.com/office/drawing/2014/main" id="{182E4CBB-0A11-274A-E36E-8FB845087450}"/>
-              </a:ext>
-            </a:extLst>
-          </p:cNvPr>
-          <p:cNvSpPr>
-            <a:spLocks noGrp="1"/>
-          </p:cNvSpPr>
-          <p:nvPr>
-            <p:ph type="sldNum" sz="quarter" idx="38"/>
+          <p:cNvPr id="10" name="Textplatzhalter 9">
+            <a:extLst>
+              <a:ext uri="{FF2B5EF4-FFF2-40B4-BE49-F238E27FC236}">
+                <a16:creationId xmlns:a16="http://schemas.microsoft.com/office/drawing/2014/main" id="{E82BA654-35B8-4BE9-8DA3-435E0B13BDF5}"/>
+              </a:ext>
+            </a:extLst>
+          </p:cNvPr>
+          <p:cNvSpPr>
+            <a:spLocks noGrp="1"/>
+          </p:cNvSpPr>
+          <p:nvPr>
+            <p:ph type="body" sz="quarter" idx="21"/>
+          </p:nvPr>
+        </p:nvSpPr>
+        <p:spPr/>
+        <p:txBody>
+          <a:bodyPr/>
+          <a:lstStyle/>
+          <a:p>
+            <a:endParaRPr lang="de-DE" dirty="0"/>
+          </a:p>
+        </p:txBody>
+      </p:sp>
+      <p:sp>
+        <p:nvSpPr>
+          <p:cNvPr id="12" name="Textplatzhalter 11">
+            <a:extLst>
+              <a:ext uri="{FF2B5EF4-FFF2-40B4-BE49-F238E27FC236}">
+                <a16:creationId xmlns:a16="http://schemas.microsoft.com/office/drawing/2014/main" id="{EE50FF58-8D4E-4B92-B3A2-42B280185ECE}"/>
+              </a:ext>
+            </a:extLst>
+          </p:cNvPr>
+          <p:cNvSpPr>
+            <a:spLocks noGrp="1"/>
+          </p:cNvSpPr>
+          <p:nvPr>
+            <p:ph type="body" sz="quarter" idx="23"/>
+          </p:nvPr>
+        </p:nvSpPr>
+        <p:spPr/>
+        <p:txBody>
+          <a:bodyPr/>
+          <a:lstStyle/>
+          <a:p>
+            <a:endParaRPr lang="de-DE" dirty="0"/>
+          </a:p>
+        </p:txBody>
+      </p:sp>
+      <p:sp>
+        <p:nvSpPr>
+          <p:cNvPr id="13" name="Textplatzhalter 12">
+            <a:extLst>
+              <a:ext uri="{FF2B5EF4-FFF2-40B4-BE49-F238E27FC236}">
+                <a16:creationId xmlns:a16="http://schemas.microsoft.com/office/drawing/2014/main" id="{318C0C78-0724-40C3-84FB-24EA22EE9EAB}"/>
+              </a:ext>
+            </a:extLst>
+          </p:cNvPr>
+          <p:cNvSpPr>
+            <a:spLocks noGrp="1"/>
+          </p:cNvSpPr>
+          <p:nvPr>
+            <p:ph type="body" sz="quarter" idx="24"/>
+          </p:nvPr>
+        </p:nvSpPr>
+        <p:spPr/>
+        <p:txBody>
+          <a:bodyPr/>
+          <a:lstStyle/>
+          <a:p>
+            <a:endParaRPr lang="de-DE" dirty="0"/>
+          </a:p>
+        </p:txBody>
+      </p:sp>
+      <p:sp>
+        <p:nvSpPr>
+          <p:cNvPr id="15" name="Textplatzhalter 14">
+            <a:extLst>
+              <a:ext uri="{FF2B5EF4-FFF2-40B4-BE49-F238E27FC236}">
+                <a16:creationId xmlns:a16="http://schemas.microsoft.com/office/drawing/2014/main" id="{E238645A-61B3-4860-8CA4-07B3A420D475}"/>
+              </a:ext>
+            </a:extLst>
+          </p:cNvPr>
+          <p:cNvSpPr>
+            <a:spLocks noGrp="1"/>
+          </p:cNvSpPr>
+          <p:nvPr>
+            <p:ph type="body" sz="quarter" idx="26"/>
+          </p:nvPr>
+        </p:nvSpPr>
+        <p:spPr/>
+        <p:txBody>
+          <a:bodyPr/>
+          <a:lstStyle/>
+          <a:p>
+            <a:endParaRPr lang="de-DE" dirty="0"/>
+          </a:p>
+        </p:txBody>
+      </p:sp>
+      <p:sp>
+        <p:nvSpPr>
+          <p:cNvPr id="16" name="Textplatzhalter 15">
+            <a:extLst>
+              <a:ext uri="{FF2B5EF4-FFF2-40B4-BE49-F238E27FC236}">
+                <a16:creationId xmlns:a16="http://schemas.microsoft.com/office/drawing/2014/main" id="{A9979C31-3B2D-4F0E-93A5-996147DFC001}"/>
+              </a:ext>
+            </a:extLst>
+          </p:cNvPr>
+          <p:cNvSpPr>
+            <a:spLocks noGrp="1"/>
+          </p:cNvSpPr>
+          <p:nvPr>
+            <p:ph type="body" sz="quarter" idx="27"/>
+          </p:nvPr>
+        </p:nvSpPr>
+        <p:spPr/>
+        <p:txBody>
+          <a:bodyPr/>
+          <a:lstStyle/>
+          <a:p>
+            <a:endParaRPr lang="de-DE" dirty="0"/>
+          </a:p>
+        </p:txBody>
+      </p:sp>
+      <p:sp>
+        <p:nvSpPr>
+          <p:cNvPr id="40" name="Textplatzhalter 39">
+            <a:extLst>
+              <a:ext uri="{FF2B5EF4-FFF2-40B4-BE49-F238E27FC236}">
+                <a16:creationId xmlns:a16="http://schemas.microsoft.com/office/drawing/2014/main" id="{41074EB3-A4FF-4848-9999-FBD9A7BA0EAD}"/>
+              </a:ext>
+            </a:extLst>
+          </p:cNvPr>
+          <p:cNvSpPr>
+            <a:spLocks noGrp="1"/>
+          </p:cNvSpPr>
+          <p:nvPr>
+            <p:ph type="body" sz="quarter" idx="39"/>
+          </p:nvPr>
+        </p:nvSpPr>
+        <p:spPr/>
+        <p:txBody>
+          <a:bodyPr/>
+          <a:lstStyle/>
+          <a:p>
+            <a:endParaRPr lang="de-DE"/>
+          </a:p>
+        </p:txBody>
+      </p:sp>
+      <p:sp>
+        <p:nvSpPr>
+          <p:cNvPr id="5" name="Titel 4">
+            <a:extLst>
+              <a:ext uri="{FF2B5EF4-FFF2-40B4-BE49-F238E27FC236}">
+                <a16:creationId xmlns:a16="http://schemas.microsoft.com/office/drawing/2014/main" id="{EF6C0EA7-A125-451F-AB1C-C74E32942D8E}"/>
+              </a:ext>
+            </a:extLst>
+          </p:cNvPr>
+          <p:cNvSpPr>
+            <a:spLocks noGrp="1"/>
+          </p:cNvSpPr>
+          <p:nvPr>
+            <p:ph type="title"/>
+          </p:nvPr>
+        </p:nvSpPr>
+        <p:spPr/>
+        <p:txBody>
+          <a:bodyPr>
+            <a:normAutofit fontScale="90000"/>
+          </a:bodyPr>
+          <a:lstStyle/>
+          <a:p>
+            <a:endParaRPr lang="de-DE" dirty="0"/>
+          </a:p>
+        </p:txBody>
+      </p:sp>
+      <p:sp>
+        <p:nvSpPr>
+          <p:cNvPr id="4" name="Foliennummernplatzhalter 3">
+            <a:extLst>
+              <a:ext uri="{FF2B5EF4-FFF2-40B4-BE49-F238E27FC236}">
+                <a16:creationId xmlns:a16="http://schemas.microsoft.com/office/drawing/2014/main" id="{9E94D581-7B30-418F-A650-CFF3DD57B558}"/>
+              </a:ext>
+            </a:extLst>
+          </p:cNvPr>
+          <p:cNvSpPr>
+            <a:spLocks noGrp="1"/>
+          </p:cNvSpPr>
+          <p:nvPr>
+            <p:ph type="sldNum" sz="quarter" idx="17"/>
           </p:nvPr>
         </p:nvSpPr>
         <p:spPr/>
@@ -47889,47 +47960,10 @@
           </a:p>
         </p:txBody>
       </p:sp>
-      <p:pic>
-        <p:nvPicPr>
-          <p:cNvPr id="5" name="Grafik 4">
-            <a:extLst>
-              <a:ext uri="{FF2B5EF4-FFF2-40B4-BE49-F238E27FC236}">
-                <a16:creationId xmlns:a16="http://schemas.microsoft.com/office/drawing/2014/main" id="{44D6A4C3-8FEC-E9C3-32C1-7566D1D41883}"/>
-              </a:ext>
-            </a:extLst>
-          </p:cNvPr>
-          <p:cNvPicPr>
-            <a:picLocks noChangeAspect="1"/>
-          </p:cNvPicPr>
-          <p:nvPr/>
-        </p:nvPicPr>
-        <p:blipFill>
-          <a:blip r:embed="rId3">
-            <a:extLst>
-              <a:ext uri="{28A0092B-C50C-407E-A947-70E740481C1C}">
-                <a14:useLocalDpi xmlns:a14="http://schemas.microsoft.com/office/drawing/2010/main" val="0"/>
-              </a:ext>
-            </a:extLst>
-          </a:blip>
-          <a:srcRect t="44385"/>
-          <a:stretch>
-            <a:fillRect/>
-          </a:stretch>
-        </p:blipFill>
-        <p:spPr>
-          <a:xfrm>
-            <a:off x="228820" y="1805158"/>
-            <a:ext cx="11734360" cy="4357866"/>
-          </a:xfrm>
-          <a:prstGeom prst="rect">
-            <a:avLst/>
-          </a:prstGeom>
-        </p:spPr>
-      </p:pic>
     </p:spTree>
     <p:extLst>
       <p:ext uri="{BB962C8B-B14F-4D97-AF65-F5344CB8AC3E}">
-        <p14:creationId xmlns:p14="http://schemas.microsoft.com/office/powerpoint/2010/main" val="857411303"/>
+        <p14:creationId xmlns:p14="http://schemas.microsoft.com/office/powerpoint/2010/main" val="325271355"/>
       </p:ext>
     </p:extLst>
   </p:cSld>
@@ -47958,10 +47992,10 @@
       </p:grpSpPr>
       <p:sp>
         <p:nvSpPr>
-          <p:cNvPr id="34" name="Textplatzhalter 33">
-            <a:extLst>
-              <a:ext uri="{FF2B5EF4-FFF2-40B4-BE49-F238E27FC236}">
-                <a16:creationId xmlns:a16="http://schemas.microsoft.com/office/drawing/2014/main" id="{5058796B-BC4B-4019-8620-8146C8E814B2}"/>
+          <p:cNvPr id="27" name="Textplatzhalter 26">
+            <a:extLst>
+              <a:ext uri="{FF2B5EF4-FFF2-40B4-BE49-F238E27FC236}">
+                <a16:creationId xmlns:a16="http://schemas.microsoft.com/office/drawing/2014/main" id="{21201D5F-1160-465C-8471-37CF2A792D9A}"/>
               </a:ext>
             </a:extLst>
           </p:cNvPr>
@@ -47972,11 +48006,7 @@
             <p:ph type="body" sz="quarter" idx="40"/>
           </p:nvPr>
         </p:nvSpPr>
-        <p:spPr>
-          <a:solidFill>
-            <a:srgbClr val="004976"/>
-          </a:solidFill>
-        </p:spPr>
+        <p:spPr/>
         <p:txBody>
           <a:bodyPr/>
           <a:lstStyle/>
@@ -47987,18 +48017,18 @@
       </p:sp>
       <p:sp>
         <p:nvSpPr>
-          <p:cNvPr id="31" name="Bildplatzhalter 30">
-            <a:extLst>
-              <a:ext uri="{FF2B5EF4-FFF2-40B4-BE49-F238E27FC236}">
-                <a16:creationId xmlns:a16="http://schemas.microsoft.com/office/drawing/2014/main" id="{E9B87456-C1D8-4F5B-9083-84320E92D55D}"/>
-              </a:ext>
-            </a:extLst>
-          </p:cNvPr>
-          <p:cNvSpPr>
-            <a:spLocks noGrp="1"/>
-          </p:cNvSpPr>
-          <p:nvPr>
-            <p:ph type="pic" sz="quarter" idx="13"/>
+          <p:cNvPr id="22" name="Bildplatzhalter 21">
+            <a:extLst>
+              <a:ext uri="{FF2B5EF4-FFF2-40B4-BE49-F238E27FC236}">
+                <a16:creationId xmlns:a16="http://schemas.microsoft.com/office/drawing/2014/main" id="{3D91EF25-05B8-4FBF-B3AC-A22B3D7C652D}"/>
+              </a:ext>
+            </a:extLst>
+          </p:cNvPr>
+          <p:cNvSpPr>
+            <a:spLocks noGrp="1"/>
+          </p:cNvSpPr>
+          <p:nvPr>
+            <p:ph type="pic" sz="quarter" idx="12"/>
           </p:nvPr>
         </p:nvSpPr>
         <p:spPr/>
@@ -48012,18 +48042,18 @@
       </p:sp>
       <p:sp>
         <p:nvSpPr>
-          <p:cNvPr id="9" name="Textplatzhalter 8">
-            <a:extLst>
-              <a:ext uri="{FF2B5EF4-FFF2-40B4-BE49-F238E27FC236}">
-                <a16:creationId xmlns:a16="http://schemas.microsoft.com/office/drawing/2014/main" id="{F8910AA3-3AFE-4188-B8C0-9EF663F14644}"/>
-              </a:ext>
-            </a:extLst>
-          </p:cNvPr>
-          <p:cNvSpPr>
-            <a:spLocks noGrp="1"/>
-          </p:cNvSpPr>
-          <p:nvPr>
-            <p:ph type="body" sz="quarter" idx="19"/>
+          <p:cNvPr id="23" name="Bildplatzhalter 22">
+            <a:extLst>
+              <a:ext uri="{FF2B5EF4-FFF2-40B4-BE49-F238E27FC236}">
+                <a16:creationId xmlns:a16="http://schemas.microsoft.com/office/drawing/2014/main" id="{3C8B6AEE-380A-4603-96A7-778B702B9400}"/>
+              </a:ext>
+            </a:extLst>
+          </p:cNvPr>
+          <p:cNvSpPr>
+            <a:spLocks noGrp="1"/>
+          </p:cNvSpPr>
+          <p:nvPr>
+            <p:ph type="pic" sz="quarter" idx="13"/>
           </p:nvPr>
         </p:nvSpPr>
         <p:spPr/>
@@ -48031,24 +48061,24 @@
           <a:bodyPr/>
           <a:lstStyle/>
           <a:p>
-            <a:endParaRPr lang="de-DE" dirty="0"/>
-          </a:p>
-        </p:txBody>
-      </p:sp>
-      <p:sp>
-        <p:nvSpPr>
-          <p:cNvPr id="10" name="Textplatzhalter 9">
-            <a:extLst>
-              <a:ext uri="{FF2B5EF4-FFF2-40B4-BE49-F238E27FC236}">
-                <a16:creationId xmlns:a16="http://schemas.microsoft.com/office/drawing/2014/main" id="{66587AAF-FBB7-4C0A-ABD8-D4E8720A38AD}"/>
-              </a:ext>
-            </a:extLst>
-          </p:cNvPr>
-          <p:cNvSpPr>
-            <a:spLocks noGrp="1"/>
-          </p:cNvSpPr>
-          <p:nvPr>
-            <p:ph type="body" sz="quarter" idx="20"/>
+            <a:endParaRPr lang="de-DE"/>
+          </a:p>
+        </p:txBody>
+      </p:sp>
+      <p:sp>
+        <p:nvSpPr>
+          <p:cNvPr id="24" name="Bildplatzhalter 23">
+            <a:extLst>
+              <a:ext uri="{FF2B5EF4-FFF2-40B4-BE49-F238E27FC236}">
+                <a16:creationId xmlns:a16="http://schemas.microsoft.com/office/drawing/2014/main" id="{24EA9E23-592A-451D-B5DA-BD1FB8A6A936}"/>
+              </a:ext>
+            </a:extLst>
+          </p:cNvPr>
+          <p:cNvSpPr>
+            <a:spLocks noGrp="1"/>
+          </p:cNvSpPr>
+          <p:nvPr>
+            <p:ph type="pic" sz="quarter" idx="14"/>
           </p:nvPr>
         </p:nvSpPr>
         <p:spPr/>
@@ -48056,24 +48086,24 @@
           <a:bodyPr/>
           <a:lstStyle/>
           <a:p>
-            <a:endParaRPr lang="de-DE" dirty="0"/>
-          </a:p>
-        </p:txBody>
-      </p:sp>
-      <p:sp>
-        <p:nvSpPr>
-          <p:cNvPr id="11" name="Textplatzhalter 10">
-            <a:extLst>
-              <a:ext uri="{FF2B5EF4-FFF2-40B4-BE49-F238E27FC236}">
-                <a16:creationId xmlns:a16="http://schemas.microsoft.com/office/drawing/2014/main" id="{4A0A8A0C-9222-48B8-9EF3-C579C9CBDCCA}"/>
-              </a:ext>
-            </a:extLst>
-          </p:cNvPr>
-          <p:cNvSpPr>
-            <a:spLocks noGrp="1"/>
-          </p:cNvSpPr>
-          <p:nvPr>
-            <p:ph type="body" sz="quarter" idx="21"/>
+            <a:endParaRPr lang="de-DE"/>
+          </a:p>
+        </p:txBody>
+      </p:sp>
+      <p:sp>
+        <p:nvSpPr>
+          <p:cNvPr id="25" name="Bildplatzhalter 24">
+            <a:extLst>
+              <a:ext uri="{FF2B5EF4-FFF2-40B4-BE49-F238E27FC236}">
+                <a16:creationId xmlns:a16="http://schemas.microsoft.com/office/drawing/2014/main" id="{96CD876B-BB8F-4ABF-84F4-29B07B6941B1}"/>
+              </a:ext>
+            </a:extLst>
+          </p:cNvPr>
+          <p:cNvSpPr>
+            <a:spLocks noGrp="1"/>
+          </p:cNvSpPr>
+          <p:nvPr>
+            <p:ph type="pic" sz="quarter" idx="15"/>
           </p:nvPr>
         </p:nvSpPr>
         <p:spPr/>
@@ -48081,24 +48111,24 @@
           <a:bodyPr/>
           <a:lstStyle/>
           <a:p>
-            <a:endParaRPr lang="de-DE" dirty="0"/>
-          </a:p>
-        </p:txBody>
-      </p:sp>
-      <p:sp>
-        <p:nvSpPr>
-          <p:cNvPr id="12" name="Textplatzhalter 11">
-            <a:extLst>
-              <a:ext uri="{FF2B5EF4-FFF2-40B4-BE49-F238E27FC236}">
-                <a16:creationId xmlns:a16="http://schemas.microsoft.com/office/drawing/2014/main" id="{31BA8D7C-AECA-4EB7-AF67-CB68F7277E03}"/>
-              </a:ext>
-            </a:extLst>
-          </p:cNvPr>
-          <p:cNvSpPr>
-            <a:spLocks noGrp="1"/>
-          </p:cNvSpPr>
-          <p:nvPr>
-            <p:ph type="body" sz="quarter" idx="22"/>
+            <a:endParaRPr lang="de-DE"/>
+          </a:p>
+        </p:txBody>
+      </p:sp>
+      <p:sp>
+        <p:nvSpPr>
+          <p:cNvPr id="10" name="Textplatzhalter 9">
+            <a:extLst>
+              <a:ext uri="{FF2B5EF4-FFF2-40B4-BE49-F238E27FC236}">
+                <a16:creationId xmlns:a16="http://schemas.microsoft.com/office/drawing/2014/main" id="{F7CC391E-3579-489C-874B-223FE1F7A7A3}"/>
+              </a:ext>
+            </a:extLst>
+          </p:cNvPr>
+          <p:cNvSpPr>
+            <a:spLocks noGrp="1"/>
+          </p:cNvSpPr>
+          <p:nvPr>
+            <p:ph type="body" sz="quarter" idx="20"/>
           </p:nvPr>
         </p:nvSpPr>
         <p:spPr/>
@@ -48112,18 +48142,18 @@
       </p:sp>
       <p:sp>
         <p:nvSpPr>
-          <p:cNvPr id="32" name="Textplatzhalter 31">
-            <a:extLst>
-              <a:ext uri="{FF2B5EF4-FFF2-40B4-BE49-F238E27FC236}">
-                <a16:creationId xmlns:a16="http://schemas.microsoft.com/office/drawing/2014/main" id="{AC2606EE-DF11-437F-B9B2-B09736C82DF0}"/>
-              </a:ext>
-            </a:extLst>
-          </p:cNvPr>
-          <p:cNvSpPr>
-            <a:spLocks noGrp="1"/>
-          </p:cNvSpPr>
-          <p:nvPr>
-            <p:ph type="body" sz="quarter" idx="35"/>
+          <p:cNvPr id="11" name="Textplatzhalter 10">
+            <a:extLst>
+              <a:ext uri="{FF2B5EF4-FFF2-40B4-BE49-F238E27FC236}">
+                <a16:creationId xmlns:a16="http://schemas.microsoft.com/office/drawing/2014/main" id="{3E1F22C6-8D9E-4713-BDAF-F6E3E20BB939}"/>
+              </a:ext>
+            </a:extLst>
+          </p:cNvPr>
+          <p:cNvSpPr>
+            <a:spLocks noGrp="1"/>
+          </p:cNvSpPr>
+          <p:nvPr>
+            <p:ph type="body" sz="quarter" idx="21"/>
           </p:nvPr>
         </p:nvSpPr>
         <p:spPr/>
@@ -48131,24 +48161,24 @@
           <a:bodyPr/>
           <a:lstStyle/>
           <a:p>
-            <a:endParaRPr lang="de-DE"/>
-          </a:p>
-        </p:txBody>
-      </p:sp>
-      <p:sp>
-        <p:nvSpPr>
-          <p:cNvPr id="33" name="Textplatzhalter 32">
-            <a:extLst>
-              <a:ext uri="{FF2B5EF4-FFF2-40B4-BE49-F238E27FC236}">
-                <a16:creationId xmlns:a16="http://schemas.microsoft.com/office/drawing/2014/main" id="{48C6FFC0-3252-4080-A399-35506F09CA45}"/>
-              </a:ext>
-            </a:extLst>
-          </p:cNvPr>
-          <p:cNvSpPr>
-            <a:spLocks noGrp="1"/>
-          </p:cNvSpPr>
-          <p:nvPr>
-            <p:ph type="body" sz="quarter" idx="39"/>
+            <a:endParaRPr lang="de-DE" dirty="0"/>
+          </a:p>
+        </p:txBody>
+      </p:sp>
+      <p:sp>
+        <p:nvSpPr>
+          <p:cNvPr id="13" name="Textplatzhalter 12">
+            <a:extLst>
+              <a:ext uri="{FF2B5EF4-FFF2-40B4-BE49-F238E27FC236}">
+                <a16:creationId xmlns:a16="http://schemas.microsoft.com/office/drawing/2014/main" id="{2E7B5716-E91F-48FB-A394-066C499A3826}"/>
+              </a:ext>
+            </a:extLst>
+          </p:cNvPr>
+          <p:cNvSpPr>
+            <a:spLocks noGrp="1"/>
+          </p:cNvSpPr>
+          <p:nvPr>
+            <p:ph type="body" sz="quarter" idx="23"/>
           </p:nvPr>
         </p:nvSpPr>
         <p:spPr/>
@@ -48156,16 +48186,166 @@
           <a:bodyPr/>
           <a:lstStyle/>
           <a:p>
+            <a:endParaRPr lang="de-DE" dirty="0"/>
+          </a:p>
+        </p:txBody>
+      </p:sp>
+      <p:sp>
+        <p:nvSpPr>
+          <p:cNvPr id="14" name="Textplatzhalter 13">
+            <a:extLst>
+              <a:ext uri="{FF2B5EF4-FFF2-40B4-BE49-F238E27FC236}">
+                <a16:creationId xmlns:a16="http://schemas.microsoft.com/office/drawing/2014/main" id="{72C85398-4C1F-4CF0-A2E5-3EB2516EAB0F}"/>
+              </a:ext>
+            </a:extLst>
+          </p:cNvPr>
+          <p:cNvSpPr>
+            <a:spLocks noGrp="1"/>
+          </p:cNvSpPr>
+          <p:nvPr>
+            <p:ph type="body" sz="quarter" idx="24"/>
+          </p:nvPr>
+        </p:nvSpPr>
+        <p:spPr/>
+        <p:txBody>
+          <a:bodyPr/>
+          <a:lstStyle/>
+          <a:p>
+            <a:endParaRPr lang="de-DE" dirty="0"/>
+          </a:p>
+        </p:txBody>
+      </p:sp>
+      <p:sp>
+        <p:nvSpPr>
+          <p:cNvPr id="16" name="Textplatzhalter 15">
+            <a:extLst>
+              <a:ext uri="{FF2B5EF4-FFF2-40B4-BE49-F238E27FC236}">
+                <a16:creationId xmlns:a16="http://schemas.microsoft.com/office/drawing/2014/main" id="{9B820611-C2BE-47A1-8290-41FFCC42C712}"/>
+              </a:ext>
+            </a:extLst>
+          </p:cNvPr>
+          <p:cNvSpPr>
+            <a:spLocks noGrp="1"/>
+          </p:cNvSpPr>
+          <p:nvPr>
+            <p:ph type="body" sz="quarter" idx="26"/>
+          </p:nvPr>
+        </p:nvSpPr>
+        <p:spPr/>
+        <p:txBody>
+          <a:bodyPr/>
+          <a:lstStyle/>
+          <a:p>
+            <a:endParaRPr lang="de-DE" dirty="0"/>
+          </a:p>
+        </p:txBody>
+      </p:sp>
+      <p:sp>
+        <p:nvSpPr>
+          <p:cNvPr id="17" name="Textplatzhalter 16">
+            <a:extLst>
+              <a:ext uri="{FF2B5EF4-FFF2-40B4-BE49-F238E27FC236}">
+                <a16:creationId xmlns:a16="http://schemas.microsoft.com/office/drawing/2014/main" id="{85AC0060-36C6-497C-9D96-E995B9AECC34}"/>
+              </a:ext>
+            </a:extLst>
+          </p:cNvPr>
+          <p:cNvSpPr>
+            <a:spLocks noGrp="1"/>
+          </p:cNvSpPr>
+          <p:nvPr>
+            <p:ph type="body" sz="quarter" idx="27"/>
+          </p:nvPr>
+        </p:nvSpPr>
+        <p:spPr/>
+        <p:txBody>
+          <a:bodyPr/>
+          <a:lstStyle/>
+          <a:p>
+            <a:endParaRPr lang="de-DE" dirty="0"/>
+          </a:p>
+        </p:txBody>
+      </p:sp>
+      <p:sp>
+        <p:nvSpPr>
+          <p:cNvPr id="19" name="Textplatzhalter 18">
+            <a:extLst>
+              <a:ext uri="{FF2B5EF4-FFF2-40B4-BE49-F238E27FC236}">
+                <a16:creationId xmlns:a16="http://schemas.microsoft.com/office/drawing/2014/main" id="{2B22C803-A52D-4A0D-89F9-1E3052BD024A}"/>
+              </a:ext>
+            </a:extLst>
+          </p:cNvPr>
+          <p:cNvSpPr>
+            <a:spLocks noGrp="1"/>
+          </p:cNvSpPr>
+          <p:nvPr>
+            <p:ph type="body" sz="quarter" idx="29"/>
+          </p:nvPr>
+        </p:nvSpPr>
+        <p:spPr/>
+        <p:txBody>
+          <a:bodyPr/>
+          <a:lstStyle/>
+          <a:p>
+            <a:endParaRPr lang="de-DE" dirty="0"/>
+          </a:p>
+        </p:txBody>
+      </p:sp>
+      <p:sp>
+        <p:nvSpPr>
+          <p:cNvPr id="20" name="Textplatzhalter 19">
+            <a:extLst>
+              <a:ext uri="{FF2B5EF4-FFF2-40B4-BE49-F238E27FC236}">
+                <a16:creationId xmlns:a16="http://schemas.microsoft.com/office/drawing/2014/main" id="{9AB8AB29-C963-4D07-8235-5ED056944F1D}"/>
+              </a:ext>
+            </a:extLst>
+          </p:cNvPr>
+          <p:cNvSpPr>
+            <a:spLocks noGrp="1"/>
+          </p:cNvSpPr>
+          <p:nvPr>
+            <p:ph type="body" sz="quarter" idx="30"/>
+          </p:nvPr>
+        </p:nvSpPr>
+        <p:spPr/>
+        <p:txBody>
+          <a:bodyPr/>
+          <a:lstStyle/>
+          <a:p>
+            <a:endParaRPr lang="de-DE" dirty="0"/>
+          </a:p>
+        </p:txBody>
+      </p:sp>
+      <p:sp>
+        <p:nvSpPr>
+          <p:cNvPr id="26" name="Textplatzhalter 25">
+            <a:extLst>
+              <a:ext uri="{FF2B5EF4-FFF2-40B4-BE49-F238E27FC236}">
+                <a16:creationId xmlns:a16="http://schemas.microsoft.com/office/drawing/2014/main" id="{151AF37C-3A9C-4FBE-A523-229E91C06BD4}"/>
+              </a:ext>
+            </a:extLst>
+          </p:cNvPr>
+          <p:cNvSpPr>
+            <a:spLocks noGrp="1"/>
+          </p:cNvSpPr>
+          <p:nvPr>
+            <p:ph type="body" sz="quarter" idx="39"/>
+          </p:nvPr>
+        </p:nvSpPr>
+        <p:spPr/>
+        <p:txBody>
+          <a:bodyPr/>
+          <a:lstStyle/>
+          <a:p>
             <a:endParaRPr lang="de-DE"/>
           </a:p>
         </p:txBody>
       </p:sp>
       <p:sp>
         <p:nvSpPr>
-          <p:cNvPr id="4" name="Titel 3">
-            <a:extLst>
-              <a:ext uri="{FF2B5EF4-FFF2-40B4-BE49-F238E27FC236}">
-                <a16:creationId xmlns:a16="http://schemas.microsoft.com/office/drawing/2014/main" id="{03B3FD09-B193-421F-ADFF-24DC448BF555}"/>
+          <p:cNvPr id="6" name="Titel 5">
+            <a:extLst>
+              <a:ext uri="{FF2B5EF4-FFF2-40B4-BE49-F238E27FC236}">
+                <a16:creationId xmlns:a16="http://schemas.microsoft.com/office/drawing/2014/main" id="{78BD4460-2B0A-4072-9964-52CF3F5DCFD6}"/>
               </a:ext>
             </a:extLst>
           </p:cNvPr>
@@ -48189,37 +48369,18 @@
       </p:sp>
       <p:sp>
         <p:nvSpPr>
-          <p:cNvPr id="7" name="Bildplatzhalter 6"/>
-          <p:cNvSpPr>
-            <a:spLocks noGrp="1"/>
-          </p:cNvSpPr>
-          <p:nvPr>
-            <p:ph type="pic" sz="quarter" idx="12"/>
-          </p:nvPr>
-        </p:nvSpPr>
-        <p:spPr/>
-        <p:txBody>
-          <a:bodyPr/>
-          <a:lstStyle/>
-          <a:p>
-            <a:endParaRPr lang="de-DE"/>
-          </a:p>
-        </p:txBody>
-      </p:sp>
-      <p:sp>
-        <p:nvSpPr>
-          <p:cNvPr id="5" name="Foliennummernplatzhalter 4">
-            <a:extLst>
-              <a:ext uri="{FF2B5EF4-FFF2-40B4-BE49-F238E27FC236}">
-                <a16:creationId xmlns:a16="http://schemas.microsoft.com/office/drawing/2014/main" id="{BD83E7EA-050B-409D-91B9-97B0D6492EFF}"/>
-              </a:ext>
-            </a:extLst>
-          </p:cNvPr>
-          <p:cNvSpPr>
-            <a:spLocks noGrp="1"/>
-          </p:cNvSpPr>
-          <p:nvPr>
-            <p:ph type="sldNum" sz="quarter" idx="38"/>
+          <p:cNvPr id="4" name="Foliennummernplatzhalter 3">
+            <a:extLst>
+              <a:ext uri="{FF2B5EF4-FFF2-40B4-BE49-F238E27FC236}">
+                <a16:creationId xmlns:a16="http://schemas.microsoft.com/office/drawing/2014/main" id="{D1EB737B-B9B8-4A7E-86A4-23E77F90986B}"/>
+              </a:ext>
+            </a:extLst>
+          </p:cNvPr>
+          <p:cNvSpPr>
+            <a:spLocks noGrp="1"/>
+          </p:cNvSpPr>
+          <p:nvPr>
+            <p:ph type="sldNum" sz="quarter" idx="18"/>
           </p:nvPr>
         </p:nvSpPr>
         <p:spPr/>
@@ -48239,7 +48400,7 @@
     </p:spTree>
     <p:extLst>
       <p:ext uri="{BB962C8B-B14F-4D97-AF65-F5344CB8AC3E}">
-        <p14:creationId xmlns:p14="http://schemas.microsoft.com/office/powerpoint/2010/main" val="2213563075"/>
+        <p14:creationId xmlns:p14="http://schemas.microsoft.com/office/powerpoint/2010/main" val="2878445597"/>
       </p:ext>
     </p:extLst>
   </p:cSld>
@@ -48254,7 +48415,13 @@
   <p:cSld>
     <p:spTree>
       <p:nvGrpSpPr>
-        <p:cNvPr id="1" name=""/>
+        <p:cNvPr id="1" name="">
+          <a:extLst>
+            <a:ext uri="{FF2B5EF4-FFF2-40B4-BE49-F238E27FC236}">
+              <a16:creationId xmlns:a16="http://schemas.microsoft.com/office/drawing/2014/main" id="{6B8873A7-3310-A2E0-AF72-A004ED42D7ED}"/>
+            </a:ext>
+          </a:extLst>
+        </p:cNvPr>
         <p:cNvGrpSpPr/>
         <p:nvPr/>
       </p:nvGrpSpPr>
@@ -48268,18 +48435,18 @@
       </p:grpSpPr>
       <p:sp>
         <p:nvSpPr>
-          <p:cNvPr id="41" name="Textplatzhalter 40">
-            <a:extLst>
-              <a:ext uri="{FF2B5EF4-FFF2-40B4-BE49-F238E27FC236}">
-                <a16:creationId xmlns:a16="http://schemas.microsoft.com/office/drawing/2014/main" id="{DF84F6E6-58AC-4AD2-B3AA-97E8BE0912F6}"/>
-              </a:ext>
-            </a:extLst>
-          </p:cNvPr>
-          <p:cNvSpPr>
-            <a:spLocks noGrp="1"/>
-          </p:cNvSpPr>
-          <p:nvPr>
-            <p:ph type="body" sz="quarter" idx="40"/>
+          <p:cNvPr id="49" name="Textplatzhalter 48">
+            <a:extLst>
+              <a:ext uri="{FF2B5EF4-FFF2-40B4-BE49-F238E27FC236}">
+                <a16:creationId xmlns:a16="http://schemas.microsoft.com/office/drawing/2014/main" id="{2ED5486E-540E-BE05-D665-5C1EDEF423A9}"/>
+              </a:ext>
+            </a:extLst>
+          </p:cNvPr>
+          <p:cNvSpPr>
+            <a:spLocks noGrp="1"/>
+          </p:cNvSpPr>
+          <p:nvPr>
+            <p:ph type="body" sz="quarter" idx="13"/>
           </p:nvPr>
         </p:nvSpPr>
         <p:spPr>
@@ -48291,24 +48458,24 @@
           <a:bodyPr/>
           <a:lstStyle/>
           <a:p>
-            <a:endParaRPr lang="de-DE"/>
-          </a:p>
-        </p:txBody>
-      </p:sp>
-      <p:sp>
-        <p:nvSpPr>
-          <p:cNvPr id="37" name="Bildplatzhalter 36">
-            <a:extLst>
-              <a:ext uri="{FF2B5EF4-FFF2-40B4-BE49-F238E27FC236}">
-                <a16:creationId xmlns:a16="http://schemas.microsoft.com/office/drawing/2014/main" id="{4CCCBFF2-833F-49A3-A213-45CC2AD61017}"/>
-              </a:ext>
-            </a:extLst>
-          </p:cNvPr>
-          <p:cNvSpPr>
-            <a:spLocks noGrp="1"/>
-          </p:cNvSpPr>
-          <p:nvPr>
-            <p:ph type="pic" sz="quarter" idx="12"/>
+            <a:endParaRPr lang="de-DE" dirty="0"/>
+          </a:p>
+        </p:txBody>
+      </p:sp>
+      <p:sp>
+        <p:nvSpPr>
+          <p:cNvPr id="2" name="Titel 1">
+            <a:extLst>
+              <a:ext uri="{FF2B5EF4-FFF2-40B4-BE49-F238E27FC236}">
+                <a16:creationId xmlns:a16="http://schemas.microsoft.com/office/drawing/2014/main" id="{C30EC800-F596-8BA8-5116-7814BEA17C99}"/>
+              </a:ext>
+            </a:extLst>
+          </p:cNvPr>
+          <p:cNvSpPr>
+            <a:spLocks noGrp="1"/>
+          </p:cNvSpPr>
+          <p:nvPr>
+            <p:ph type="title"/>
           </p:nvPr>
         </p:nvSpPr>
         <p:spPr/>
@@ -48316,24 +48483,27 @@
           <a:bodyPr/>
           <a:lstStyle/>
           <a:p>
-            <a:endParaRPr lang="de-DE"/>
-          </a:p>
-        </p:txBody>
-      </p:sp>
-      <p:sp>
-        <p:nvSpPr>
-          <p:cNvPr id="38" name="Bildplatzhalter 37">
-            <a:extLst>
-              <a:ext uri="{FF2B5EF4-FFF2-40B4-BE49-F238E27FC236}">
-                <a16:creationId xmlns:a16="http://schemas.microsoft.com/office/drawing/2014/main" id="{26BF64C2-9F0C-4CFC-89F0-80F66F9CE8EC}"/>
-              </a:ext>
-            </a:extLst>
-          </p:cNvPr>
-          <p:cNvSpPr>
-            <a:spLocks noGrp="1"/>
-          </p:cNvSpPr>
-          <p:nvPr>
-            <p:ph type="pic" sz="quarter" idx="13"/>
+            <a:r>
+              <a:rPr lang="de-DE" dirty="0"/>
+              <a:t>Proxy Validation</a:t>
+            </a:r>
+          </a:p>
+        </p:txBody>
+      </p:sp>
+      <p:sp>
+        <p:nvSpPr>
+          <p:cNvPr id="14" name="Textplatzhalter 13">
+            <a:extLst>
+              <a:ext uri="{FF2B5EF4-FFF2-40B4-BE49-F238E27FC236}">
+                <a16:creationId xmlns:a16="http://schemas.microsoft.com/office/drawing/2014/main" id="{7D6F1968-58BC-2704-F9D6-C76FB6BDD2C4}"/>
+              </a:ext>
+            </a:extLst>
+          </p:cNvPr>
+          <p:cNvSpPr>
+            <a:spLocks noGrp="1"/>
+          </p:cNvSpPr>
+          <p:nvPr>
+            <p:ph type="body" sz="quarter" idx="39"/>
           </p:nvPr>
         </p:nvSpPr>
         <p:spPr/>
@@ -48341,251 +48511,31 @@
           <a:bodyPr/>
           <a:lstStyle/>
           <a:p>
-            <a:endParaRPr lang="de-DE"/>
-          </a:p>
-        </p:txBody>
-      </p:sp>
-      <p:sp>
-        <p:nvSpPr>
-          <p:cNvPr id="39" name="Bildplatzhalter 38">
-            <a:extLst>
-              <a:ext uri="{FF2B5EF4-FFF2-40B4-BE49-F238E27FC236}">
-                <a16:creationId xmlns:a16="http://schemas.microsoft.com/office/drawing/2014/main" id="{CF245758-37EE-4760-88C2-922D3DE3514D}"/>
-              </a:ext>
-            </a:extLst>
-          </p:cNvPr>
-          <p:cNvSpPr>
-            <a:spLocks noGrp="1"/>
-          </p:cNvSpPr>
-          <p:nvPr>
-            <p:ph type="pic" sz="quarter" idx="14"/>
-          </p:nvPr>
-        </p:nvSpPr>
-        <p:spPr/>
-        <p:txBody>
-          <a:bodyPr/>
-          <a:lstStyle/>
-          <a:p>
-            <a:endParaRPr lang="de-DE"/>
-          </a:p>
-        </p:txBody>
-      </p:sp>
-      <p:sp>
-        <p:nvSpPr>
-          <p:cNvPr id="9" name="Textplatzhalter 8">
-            <a:extLst>
-              <a:ext uri="{FF2B5EF4-FFF2-40B4-BE49-F238E27FC236}">
-                <a16:creationId xmlns:a16="http://schemas.microsoft.com/office/drawing/2014/main" id="{52422B47-2488-46C8-A0E8-358BE5EA28BB}"/>
-              </a:ext>
-            </a:extLst>
-          </p:cNvPr>
-          <p:cNvSpPr>
-            <a:spLocks noGrp="1"/>
-          </p:cNvSpPr>
-          <p:nvPr>
-            <p:ph type="body" sz="quarter" idx="19"/>
-          </p:nvPr>
-        </p:nvSpPr>
-        <p:spPr/>
-        <p:txBody>
-          <a:bodyPr/>
-          <a:lstStyle/>
-          <a:p>
-            <a:endParaRPr lang="de-DE" dirty="0"/>
-          </a:p>
-        </p:txBody>
-      </p:sp>
-      <p:sp>
-        <p:nvSpPr>
-          <p:cNvPr id="10" name="Textplatzhalter 9">
-            <a:extLst>
-              <a:ext uri="{FF2B5EF4-FFF2-40B4-BE49-F238E27FC236}">
-                <a16:creationId xmlns:a16="http://schemas.microsoft.com/office/drawing/2014/main" id="{E82BA654-35B8-4BE9-8DA3-435E0B13BDF5}"/>
-              </a:ext>
-            </a:extLst>
-          </p:cNvPr>
-          <p:cNvSpPr>
-            <a:spLocks noGrp="1"/>
-          </p:cNvSpPr>
-          <p:nvPr>
-            <p:ph type="body" sz="quarter" idx="21"/>
-          </p:nvPr>
-        </p:nvSpPr>
-        <p:spPr/>
-        <p:txBody>
-          <a:bodyPr/>
-          <a:lstStyle/>
-          <a:p>
-            <a:endParaRPr lang="de-DE" dirty="0"/>
-          </a:p>
-        </p:txBody>
-      </p:sp>
-      <p:sp>
-        <p:nvSpPr>
-          <p:cNvPr id="12" name="Textplatzhalter 11">
-            <a:extLst>
-              <a:ext uri="{FF2B5EF4-FFF2-40B4-BE49-F238E27FC236}">
-                <a16:creationId xmlns:a16="http://schemas.microsoft.com/office/drawing/2014/main" id="{EE50FF58-8D4E-4B92-B3A2-42B280185ECE}"/>
-              </a:ext>
-            </a:extLst>
-          </p:cNvPr>
-          <p:cNvSpPr>
-            <a:spLocks noGrp="1"/>
-          </p:cNvSpPr>
-          <p:nvPr>
-            <p:ph type="body" sz="quarter" idx="23"/>
-          </p:nvPr>
-        </p:nvSpPr>
-        <p:spPr/>
-        <p:txBody>
-          <a:bodyPr/>
-          <a:lstStyle/>
-          <a:p>
-            <a:endParaRPr lang="de-DE" dirty="0"/>
-          </a:p>
-        </p:txBody>
-      </p:sp>
-      <p:sp>
-        <p:nvSpPr>
-          <p:cNvPr id="13" name="Textplatzhalter 12">
-            <a:extLst>
-              <a:ext uri="{FF2B5EF4-FFF2-40B4-BE49-F238E27FC236}">
-                <a16:creationId xmlns:a16="http://schemas.microsoft.com/office/drawing/2014/main" id="{318C0C78-0724-40C3-84FB-24EA22EE9EAB}"/>
-              </a:ext>
-            </a:extLst>
-          </p:cNvPr>
-          <p:cNvSpPr>
-            <a:spLocks noGrp="1"/>
-          </p:cNvSpPr>
-          <p:nvPr>
-            <p:ph type="body" sz="quarter" idx="24"/>
-          </p:nvPr>
-        </p:nvSpPr>
-        <p:spPr/>
-        <p:txBody>
-          <a:bodyPr/>
-          <a:lstStyle/>
-          <a:p>
-            <a:endParaRPr lang="de-DE" dirty="0"/>
-          </a:p>
-        </p:txBody>
-      </p:sp>
-      <p:sp>
-        <p:nvSpPr>
-          <p:cNvPr id="15" name="Textplatzhalter 14">
-            <a:extLst>
-              <a:ext uri="{FF2B5EF4-FFF2-40B4-BE49-F238E27FC236}">
-                <a16:creationId xmlns:a16="http://schemas.microsoft.com/office/drawing/2014/main" id="{E238645A-61B3-4860-8CA4-07B3A420D475}"/>
-              </a:ext>
-            </a:extLst>
-          </p:cNvPr>
-          <p:cNvSpPr>
-            <a:spLocks noGrp="1"/>
-          </p:cNvSpPr>
-          <p:nvPr>
-            <p:ph type="body" sz="quarter" idx="26"/>
-          </p:nvPr>
-        </p:nvSpPr>
-        <p:spPr/>
-        <p:txBody>
-          <a:bodyPr/>
-          <a:lstStyle/>
-          <a:p>
-            <a:endParaRPr lang="de-DE" dirty="0"/>
-          </a:p>
-        </p:txBody>
-      </p:sp>
-      <p:sp>
-        <p:nvSpPr>
-          <p:cNvPr id="16" name="Textplatzhalter 15">
-            <a:extLst>
-              <a:ext uri="{FF2B5EF4-FFF2-40B4-BE49-F238E27FC236}">
-                <a16:creationId xmlns:a16="http://schemas.microsoft.com/office/drawing/2014/main" id="{A9979C31-3B2D-4F0E-93A5-996147DFC001}"/>
-              </a:ext>
-            </a:extLst>
-          </p:cNvPr>
-          <p:cNvSpPr>
-            <a:spLocks noGrp="1"/>
-          </p:cNvSpPr>
-          <p:nvPr>
-            <p:ph type="body" sz="quarter" idx="27"/>
-          </p:nvPr>
-        </p:nvSpPr>
-        <p:spPr/>
-        <p:txBody>
-          <a:bodyPr/>
-          <a:lstStyle/>
-          <a:p>
-            <a:endParaRPr lang="de-DE" dirty="0"/>
-          </a:p>
-        </p:txBody>
-      </p:sp>
-      <p:sp>
-        <p:nvSpPr>
-          <p:cNvPr id="40" name="Textplatzhalter 39">
-            <a:extLst>
-              <a:ext uri="{FF2B5EF4-FFF2-40B4-BE49-F238E27FC236}">
-                <a16:creationId xmlns:a16="http://schemas.microsoft.com/office/drawing/2014/main" id="{41074EB3-A4FF-4848-9999-FBD9A7BA0EAD}"/>
-              </a:ext>
-            </a:extLst>
-          </p:cNvPr>
-          <p:cNvSpPr>
-            <a:spLocks noGrp="1"/>
-          </p:cNvSpPr>
-          <p:nvPr>
-            <p:ph type="body" sz="quarter" idx="39"/>
-          </p:nvPr>
-        </p:nvSpPr>
-        <p:spPr/>
-        <p:txBody>
-          <a:bodyPr/>
-          <a:lstStyle/>
-          <a:p>
-            <a:endParaRPr lang="de-DE"/>
-          </a:p>
-        </p:txBody>
-      </p:sp>
-      <p:sp>
-        <p:nvSpPr>
-          <p:cNvPr id="5" name="Titel 4">
-            <a:extLst>
-              <a:ext uri="{FF2B5EF4-FFF2-40B4-BE49-F238E27FC236}">
-                <a16:creationId xmlns:a16="http://schemas.microsoft.com/office/drawing/2014/main" id="{EF6C0EA7-A125-451F-AB1C-C74E32942D8E}"/>
-              </a:ext>
-            </a:extLst>
-          </p:cNvPr>
-          <p:cNvSpPr>
-            <a:spLocks noGrp="1"/>
-          </p:cNvSpPr>
-          <p:nvPr>
-            <p:ph type="title"/>
-          </p:nvPr>
-        </p:nvSpPr>
-        <p:spPr/>
-        <p:txBody>
-          <a:bodyPr>
-            <a:normAutofit fontScale="90000"/>
-          </a:bodyPr>
-          <a:lstStyle/>
-          <a:p>
-            <a:endParaRPr lang="de-DE" dirty="0"/>
-          </a:p>
-        </p:txBody>
-      </p:sp>
-      <p:sp>
-        <p:nvSpPr>
-          <p:cNvPr id="4" name="Foliennummernplatzhalter 3">
-            <a:extLst>
-              <a:ext uri="{FF2B5EF4-FFF2-40B4-BE49-F238E27FC236}">
-                <a16:creationId xmlns:a16="http://schemas.microsoft.com/office/drawing/2014/main" id="{9E94D581-7B30-418F-A650-CFF3DD57B558}"/>
-              </a:ext>
-            </a:extLst>
-          </p:cNvPr>
-          <p:cNvSpPr>
-            <a:spLocks noGrp="1"/>
-          </p:cNvSpPr>
-          <p:nvPr>
-            <p:ph type="sldNum" sz="quarter" idx="17"/>
+            <a:r>
+              <a:rPr lang="de-DE" dirty="0" err="1"/>
+              <a:t>Mincer-Zarnowitz</a:t>
+            </a:r>
+            <a:r>
+              <a:rPr lang="de-DE" dirty="0"/>
+              <a:t> Regression</a:t>
+            </a:r>
+          </a:p>
+        </p:txBody>
+      </p:sp>
+      <p:sp>
+        <p:nvSpPr>
+          <p:cNvPr id="6" name="Foliennummernplatzhalter 5">
+            <a:extLst>
+              <a:ext uri="{FF2B5EF4-FFF2-40B4-BE49-F238E27FC236}">
+                <a16:creationId xmlns:a16="http://schemas.microsoft.com/office/drawing/2014/main" id="{0A363448-1864-4847-ABA4-738271F78F8B}"/>
+              </a:ext>
+            </a:extLst>
+          </p:cNvPr>
+          <p:cNvSpPr>
+            <a:spLocks noGrp="1"/>
+          </p:cNvSpPr>
+          <p:nvPr>
+            <p:ph type="sldNum" sz="quarter" idx="38"/>
           </p:nvPr>
         </p:nvSpPr>
         <p:spPr/>
@@ -48602,10 +48552,275 @@
           </a:p>
         </p:txBody>
       </p:sp>
+      <p:sp>
+        <p:nvSpPr>
+          <p:cNvPr id="3" name="Inhaltsplatzhalter 34">
+            <a:extLst>
+              <a:ext uri="{FF2B5EF4-FFF2-40B4-BE49-F238E27FC236}">
+                <a16:creationId xmlns:a16="http://schemas.microsoft.com/office/drawing/2014/main" id="{0A1D8F78-579A-1381-EC51-CDDED842BB49}"/>
+              </a:ext>
+            </a:extLst>
+          </p:cNvPr>
+          <p:cNvSpPr>
+            <a:spLocks noGrp="1"/>
+          </p:cNvSpPr>
+          <p:nvPr>
+            <p:ph idx="1"/>
+          </p:nvPr>
+        </p:nvSpPr>
+        <p:spPr>
+          <a:xfrm>
+            <a:off x="361950" y="1376363"/>
+            <a:ext cx="11468100" cy="4776773"/>
+          </a:xfrm>
+        </p:spPr>
+        <p:txBody>
+          <a:bodyPr/>
+          <a:lstStyle/>
+          <a:p>
+            <a:r>
+              <a:rPr lang="en-US" dirty="0"/>
+              <a:t>To validate Yang-Zhang as a proxy for true (unobservable) volatility, we regress realized volatility on Yang-Zhang:</a:t>
+            </a:r>
+          </a:p>
+          <a:p>
+            <a:pPr marL="0" indent="0">
+              <a:buNone/>
+            </a:pPr>
+            <a:endParaRPr lang="en-US" dirty="0"/>
+          </a:p>
+          <a:p>
+            <a:pPr marL="0" indent="0">
+              <a:buNone/>
+            </a:pPr>
+            <a:endParaRPr lang="en-US" dirty="0"/>
+          </a:p>
+          <a:p>
+            <a:r>
+              <a:rPr lang="de-DE" dirty="0"/>
+              <a:t>Null </a:t>
+            </a:r>
+            <a:r>
+              <a:rPr lang="de-DE" dirty="0" err="1"/>
+              <a:t>hypothesis</a:t>
+            </a:r>
+            <a:r>
+              <a:rPr lang="de-DE" dirty="0"/>
+              <a:t>:</a:t>
+            </a:r>
+          </a:p>
+          <a:p>
+            <a:pPr marL="0" indent="0">
+              <a:buNone/>
+            </a:pPr>
+            <a:endParaRPr lang="de-DE" b="1" u="sng" dirty="0"/>
+          </a:p>
+          <a:p>
+            <a:pPr marL="0" indent="0">
+              <a:buNone/>
+            </a:pPr>
+            <a:r>
+              <a:rPr lang="de-DE" b="1" u="sng" dirty="0"/>
+              <a:t>Interpretation: </a:t>
+            </a:r>
+          </a:p>
+          <a:p>
+            <a:r>
+              <a:rPr lang="de-DE" dirty="0"/>
+              <a:t>R^2 </a:t>
+            </a:r>
+            <a:r>
+              <a:rPr lang="de-DE" dirty="0" err="1"/>
+              <a:t>measures</a:t>
+            </a:r>
+            <a:r>
+              <a:rPr lang="de-DE" dirty="0"/>
+              <a:t> </a:t>
+            </a:r>
+            <a:r>
+              <a:rPr lang="de-DE" dirty="0" err="1"/>
+              <a:t>how</a:t>
+            </a:r>
+            <a:r>
+              <a:rPr lang="de-DE" dirty="0"/>
+              <a:t> </a:t>
+            </a:r>
+            <a:r>
+              <a:rPr lang="de-DE" dirty="0" err="1"/>
+              <a:t>much</a:t>
+            </a:r>
+            <a:r>
+              <a:rPr lang="de-DE" dirty="0"/>
+              <a:t> Variation in RV </a:t>
+            </a:r>
+            <a:r>
+              <a:rPr lang="de-DE" dirty="0" err="1"/>
+              <a:t>is</a:t>
+            </a:r>
+            <a:r>
+              <a:rPr lang="de-DE" dirty="0"/>
+              <a:t> </a:t>
+            </a:r>
+            <a:r>
+              <a:rPr lang="de-DE" dirty="0" err="1"/>
+              <a:t>explained</a:t>
+            </a:r>
+            <a:r>
+              <a:rPr lang="de-DE" dirty="0"/>
+              <a:t> </a:t>
+            </a:r>
+            <a:r>
+              <a:rPr lang="de-DE" dirty="0" err="1"/>
+              <a:t>by</a:t>
+            </a:r>
+            <a:r>
+              <a:rPr lang="de-DE" dirty="0"/>
+              <a:t> YZ</a:t>
+            </a:r>
+          </a:p>
+          <a:p>
+            <a:r>
+              <a:rPr lang="de-DE" dirty="0" err="1"/>
+              <a:t>Our</a:t>
+            </a:r>
+            <a:r>
+              <a:rPr lang="de-DE" dirty="0"/>
+              <a:t> </a:t>
+            </a:r>
+            <a:r>
+              <a:rPr lang="de-DE" dirty="0" err="1"/>
+              <a:t>result</a:t>
+            </a:r>
+            <a:r>
+              <a:rPr lang="de-DE" dirty="0"/>
+              <a:t>: </a:t>
+            </a:r>
+          </a:p>
+          <a:p>
+            <a:pPr lvl="1"/>
+            <a:r>
+              <a:rPr lang="de-DE" dirty="0"/>
+              <a:t>R^2 = 0.46 at </a:t>
+            </a:r>
+            <a:r>
+              <a:rPr lang="de-DE" dirty="0" err="1"/>
+              <a:t>the</a:t>
+            </a:r>
+            <a:r>
+              <a:rPr lang="de-DE" dirty="0"/>
+              <a:t> </a:t>
+            </a:r>
+            <a:r>
+              <a:rPr lang="de-DE" dirty="0" err="1"/>
+              <a:t>daily</a:t>
+            </a:r>
+            <a:r>
+              <a:rPr lang="de-DE" dirty="0"/>
+              <a:t> </a:t>
+            </a:r>
+            <a:r>
+              <a:rPr lang="de-DE" dirty="0" err="1"/>
+              <a:t>level</a:t>
+            </a:r>
+            <a:r>
+              <a:rPr lang="de-DE" dirty="0"/>
+              <a:t>. R^2 = 0.85 at 22-day </a:t>
+            </a:r>
+            <a:r>
+              <a:rPr lang="de-DE" dirty="0" err="1"/>
+              <a:t>rolling</a:t>
+            </a:r>
+            <a:r>
+              <a:rPr lang="de-DE" dirty="0"/>
+              <a:t> </a:t>
+            </a:r>
+            <a:r>
+              <a:rPr lang="de-DE" dirty="0" err="1"/>
+              <a:t>window</a:t>
+            </a:r>
+            <a:r>
+              <a:rPr lang="de-DE" dirty="0"/>
+              <a:t>.</a:t>
+            </a:r>
+          </a:p>
+        </p:txBody>
+      </p:sp>
+      <p:pic>
+        <p:nvPicPr>
+          <p:cNvPr id="5" name="Grafik 4">
+            <a:extLst>
+              <a:ext uri="{FF2B5EF4-FFF2-40B4-BE49-F238E27FC236}">
+                <a16:creationId xmlns:a16="http://schemas.microsoft.com/office/drawing/2014/main" id="{D327DBD2-B57D-D021-C2E3-E655DBE1FE7E}"/>
+              </a:ext>
+            </a:extLst>
+          </p:cNvPr>
+          <p:cNvPicPr>
+            <a:picLocks noChangeAspect="1"/>
+          </p:cNvPicPr>
+          <p:nvPr/>
+        </p:nvPicPr>
+        <p:blipFill>
+          <a:blip r:embed="rId3">
+            <a:extLst>
+              <a:ext uri="{28A0092B-C50C-407E-A947-70E740481C1C}">
+                <a14:useLocalDpi xmlns:a14="http://schemas.microsoft.com/office/drawing/2010/main" val="0"/>
+              </a:ext>
+            </a:extLst>
+          </a:blip>
+          <a:stretch>
+            <a:fillRect/>
+          </a:stretch>
+        </p:blipFill>
+        <p:spPr>
+          <a:xfrm>
+            <a:off x="4014769" y="2244101"/>
+            <a:ext cx="3670717" cy="620589"/>
+          </a:xfrm>
+          <a:prstGeom prst="rect">
+            <a:avLst/>
+          </a:prstGeom>
+        </p:spPr>
+      </p:pic>
+      <p:pic>
+        <p:nvPicPr>
+          <p:cNvPr id="8" name="Grafik 7">
+            <a:extLst>
+              <a:ext uri="{FF2B5EF4-FFF2-40B4-BE49-F238E27FC236}">
+                <a16:creationId xmlns:a16="http://schemas.microsoft.com/office/drawing/2014/main" id="{70463921-39DB-B827-F6C4-A1B1971239D3}"/>
+              </a:ext>
+            </a:extLst>
+          </p:cNvPr>
+          <p:cNvPicPr>
+            <a:picLocks noChangeAspect="1"/>
+          </p:cNvPicPr>
+          <p:nvPr/>
+        </p:nvPicPr>
+        <p:blipFill>
+          <a:blip r:embed="rId4">
+            <a:extLst>
+              <a:ext uri="{28A0092B-C50C-407E-A947-70E740481C1C}">
+                <a14:useLocalDpi xmlns:a14="http://schemas.microsoft.com/office/drawing/2010/main" val="0"/>
+              </a:ext>
+            </a:extLst>
+          </a:blip>
+          <a:stretch>
+            <a:fillRect/>
+          </a:stretch>
+        </p:blipFill>
+        <p:spPr>
+          <a:xfrm>
+            <a:off x="3021285" y="2990905"/>
+            <a:ext cx="2828843" cy="438095"/>
+          </a:xfrm>
+          <a:prstGeom prst="rect">
+            <a:avLst/>
+          </a:prstGeom>
+        </p:spPr>
+      </p:pic>
     </p:spTree>
     <p:extLst>
       <p:ext uri="{BB962C8B-B14F-4D97-AF65-F5344CB8AC3E}">
-        <p14:creationId xmlns:p14="http://schemas.microsoft.com/office/powerpoint/2010/main" val="325271355"/>
+        <p14:creationId xmlns:p14="http://schemas.microsoft.com/office/powerpoint/2010/main" val="2587452930"/>
       </p:ext>
     </p:extLst>
   </p:cSld>
@@ -48620,7 +48835,13 @@
   <p:cSld>
     <p:spTree>
       <p:nvGrpSpPr>
-        <p:cNvPr id="1" name=""/>
+        <p:cNvPr id="1" name="">
+          <a:extLst>
+            <a:ext uri="{FF2B5EF4-FFF2-40B4-BE49-F238E27FC236}">
+              <a16:creationId xmlns:a16="http://schemas.microsoft.com/office/drawing/2014/main" id="{6B1F981E-27BD-A00A-EAB6-936E76755FAE}"/>
+            </a:ext>
+          </a:extLst>
+        </p:cNvPr>
         <p:cNvGrpSpPr/>
         <p:nvPr/>
       </p:nvGrpSpPr>
@@ -48634,21 +48855,25 @@
       </p:grpSpPr>
       <p:sp>
         <p:nvSpPr>
-          <p:cNvPr id="27" name="Textplatzhalter 26">
-            <a:extLst>
-              <a:ext uri="{FF2B5EF4-FFF2-40B4-BE49-F238E27FC236}">
-                <a16:creationId xmlns:a16="http://schemas.microsoft.com/office/drawing/2014/main" id="{21201D5F-1160-465C-8471-37CF2A792D9A}"/>
-              </a:ext>
-            </a:extLst>
-          </p:cNvPr>
-          <p:cNvSpPr>
-            <a:spLocks noGrp="1"/>
-          </p:cNvSpPr>
-          <p:nvPr>
-            <p:ph type="body" sz="quarter" idx="40"/>
-          </p:nvPr>
-        </p:nvSpPr>
-        <p:spPr/>
+          <p:cNvPr id="49" name="Textplatzhalter 48">
+            <a:extLst>
+              <a:ext uri="{FF2B5EF4-FFF2-40B4-BE49-F238E27FC236}">
+                <a16:creationId xmlns:a16="http://schemas.microsoft.com/office/drawing/2014/main" id="{0B494251-F258-1386-923E-989C0AA988E4}"/>
+              </a:ext>
+            </a:extLst>
+          </p:cNvPr>
+          <p:cNvSpPr>
+            <a:spLocks noGrp="1"/>
+          </p:cNvSpPr>
+          <p:nvPr>
+            <p:ph type="body" sz="quarter" idx="13"/>
+          </p:nvPr>
+        </p:nvSpPr>
+        <p:spPr>
+          <a:solidFill>
+            <a:srgbClr val="004976"/>
+          </a:solidFill>
+        </p:spPr>
         <p:txBody>
           <a:bodyPr/>
           <a:lstStyle/>
@@ -48659,18 +48884,18 @@
       </p:sp>
       <p:sp>
         <p:nvSpPr>
-          <p:cNvPr id="22" name="Bildplatzhalter 21">
-            <a:extLst>
-              <a:ext uri="{FF2B5EF4-FFF2-40B4-BE49-F238E27FC236}">
-                <a16:creationId xmlns:a16="http://schemas.microsoft.com/office/drawing/2014/main" id="{3D91EF25-05B8-4FBF-B3AC-A22B3D7C652D}"/>
-              </a:ext>
-            </a:extLst>
-          </p:cNvPr>
-          <p:cNvSpPr>
-            <a:spLocks noGrp="1"/>
-          </p:cNvSpPr>
-          <p:nvPr>
-            <p:ph type="pic" sz="quarter" idx="12"/>
+          <p:cNvPr id="2" name="Titel 1">
+            <a:extLst>
+              <a:ext uri="{FF2B5EF4-FFF2-40B4-BE49-F238E27FC236}">
+                <a16:creationId xmlns:a16="http://schemas.microsoft.com/office/drawing/2014/main" id="{7FAD0DC1-BB7C-B434-B8AA-EB639ACBDCCF}"/>
+              </a:ext>
+            </a:extLst>
+          </p:cNvPr>
+          <p:cNvSpPr>
+            <a:spLocks noGrp="1"/>
+          </p:cNvSpPr>
+          <p:nvPr>
+            <p:ph type="title"/>
           </p:nvPr>
         </p:nvSpPr>
         <p:spPr/>
@@ -48678,24 +48903,39 @@
           <a:bodyPr/>
           <a:lstStyle/>
           <a:p>
-            <a:endParaRPr lang="de-DE"/>
-          </a:p>
-        </p:txBody>
-      </p:sp>
-      <p:sp>
-        <p:nvSpPr>
-          <p:cNvPr id="23" name="Bildplatzhalter 22">
-            <a:extLst>
-              <a:ext uri="{FF2B5EF4-FFF2-40B4-BE49-F238E27FC236}">
-                <a16:creationId xmlns:a16="http://schemas.microsoft.com/office/drawing/2014/main" id="{3C8B6AEE-380A-4603-96A7-778B702B9400}"/>
-              </a:ext>
-            </a:extLst>
-          </p:cNvPr>
-          <p:cNvSpPr>
-            <a:spLocks noGrp="1"/>
-          </p:cNvSpPr>
-          <p:nvPr>
-            <p:ph type="pic" sz="quarter" idx="13"/>
+            <a:r>
+              <a:rPr lang="de-DE" dirty="0" err="1"/>
+              <a:t>Annualized</a:t>
+            </a:r>
+            <a:r>
+              <a:rPr lang="de-DE" dirty="0"/>
+              <a:t> </a:t>
+            </a:r>
+            <a:r>
+              <a:rPr lang="de-DE" dirty="0" err="1"/>
+              <a:t>Volatility</a:t>
+            </a:r>
+            <a:r>
+              <a:rPr lang="de-DE" dirty="0"/>
+              <a:t> Time Series</a:t>
+            </a:r>
+          </a:p>
+        </p:txBody>
+      </p:sp>
+      <p:sp>
+        <p:nvSpPr>
+          <p:cNvPr id="14" name="Textplatzhalter 13">
+            <a:extLst>
+              <a:ext uri="{FF2B5EF4-FFF2-40B4-BE49-F238E27FC236}">
+                <a16:creationId xmlns:a16="http://schemas.microsoft.com/office/drawing/2014/main" id="{057C9D83-69FF-5CB3-3B16-DF6FA9AE0B77}"/>
+              </a:ext>
+            </a:extLst>
+          </p:cNvPr>
+          <p:cNvSpPr>
+            <a:spLocks noGrp="1"/>
+          </p:cNvSpPr>
+          <p:nvPr>
+            <p:ph type="body" sz="quarter" idx="39"/>
           </p:nvPr>
         </p:nvSpPr>
         <p:spPr/>
@@ -48703,326 +48943,35 @@
           <a:bodyPr/>
           <a:lstStyle/>
           <a:p>
-            <a:endParaRPr lang="de-DE"/>
-          </a:p>
-        </p:txBody>
-      </p:sp>
-      <p:sp>
-        <p:nvSpPr>
-          <p:cNvPr id="24" name="Bildplatzhalter 23">
-            <a:extLst>
-              <a:ext uri="{FF2B5EF4-FFF2-40B4-BE49-F238E27FC236}">
-                <a16:creationId xmlns:a16="http://schemas.microsoft.com/office/drawing/2014/main" id="{24EA9E23-592A-451D-B5DA-BD1FB8A6A936}"/>
-              </a:ext>
-            </a:extLst>
-          </p:cNvPr>
-          <p:cNvSpPr>
-            <a:spLocks noGrp="1"/>
-          </p:cNvSpPr>
-          <p:nvPr>
-            <p:ph type="pic" sz="quarter" idx="14"/>
-          </p:nvPr>
-        </p:nvSpPr>
-        <p:spPr/>
-        <p:txBody>
-          <a:bodyPr/>
-          <a:lstStyle/>
-          <a:p>
-            <a:endParaRPr lang="de-DE"/>
-          </a:p>
-        </p:txBody>
-      </p:sp>
-      <p:sp>
-        <p:nvSpPr>
-          <p:cNvPr id="25" name="Bildplatzhalter 24">
-            <a:extLst>
-              <a:ext uri="{FF2B5EF4-FFF2-40B4-BE49-F238E27FC236}">
-                <a16:creationId xmlns:a16="http://schemas.microsoft.com/office/drawing/2014/main" id="{96CD876B-BB8F-4ABF-84F4-29B07B6941B1}"/>
-              </a:ext>
-            </a:extLst>
-          </p:cNvPr>
-          <p:cNvSpPr>
-            <a:spLocks noGrp="1"/>
-          </p:cNvSpPr>
-          <p:nvPr>
-            <p:ph type="pic" sz="quarter" idx="15"/>
-          </p:nvPr>
-        </p:nvSpPr>
-        <p:spPr/>
-        <p:txBody>
-          <a:bodyPr/>
-          <a:lstStyle/>
-          <a:p>
-            <a:endParaRPr lang="de-DE"/>
-          </a:p>
-        </p:txBody>
-      </p:sp>
-      <p:sp>
-        <p:nvSpPr>
-          <p:cNvPr id="10" name="Textplatzhalter 9">
-            <a:extLst>
-              <a:ext uri="{FF2B5EF4-FFF2-40B4-BE49-F238E27FC236}">
-                <a16:creationId xmlns:a16="http://schemas.microsoft.com/office/drawing/2014/main" id="{F7CC391E-3579-489C-874B-223FE1F7A7A3}"/>
-              </a:ext>
-            </a:extLst>
-          </p:cNvPr>
-          <p:cNvSpPr>
-            <a:spLocks noGrp="1"/>
-          </p:cNvSpPr>
-          <p:nvPr>
-            <p:ph type="body" sz="quarter" idx="20"/>
-          </p:nvPr>
-        </p:nvSpPr>
-        <p:spPr/>
-        <p:txBody>
-          <a:bodyPr/>
-          <a:lstStyle/>
-          <a:p>
-            <a:endParaRPr lang="de-DE" dirty="0"/>
-          </a:p>
-        </p:txBody>
-      </p:sp>
-      <p:sp>
-        <p:nvSpPr>
-          <p:cNvPr id="11" name="Textplatzhalter 10">
-            <a:extLst>
-              <a:ext uri="{FF2B5EF4-FFF2-40B4-BE49-F238E27FC236}">
-                <a16:creationId xmlns:a16="http://schemas.microsoft.com/office/drawing/2014/main" id="{3E1F22C6-8D9E-4713-BDAF-F6E3E20BB939}"/>
-              </a:ext>
-            </a:extLst>
-          </p:cNvPr>
-          <p:cNvSpPr>
-            <a:spLocks noGrp="1"/>
-          </p:cNvSpPr>
-          <p:nvPr>
-            <p:ph type="body" sz="quarter" idx="21"/>
-          </p:nvPr>
-        </p:nvSpPr>
-        <p:spPr/>
-        <p:txBody>
-          <a:bodyPr/>
-          <a:lstStyle/>
-          <a:p>
-            <a:endParaRPr lang="de-DE" dirty="0"/>
-          </a:p>
-        </p:txBody>
-      </p:sp>
-      <p:sp>
-        <p:nvSpPr>
-          <p:cNvPr id="13" name="Textplatzhalter 12">
-            <a:extLst>
-              <a:ext uri="{FF2B5EF4-FFF2-40B4-BE49-F238E27FC236}">
-                <a16:creationId xmlns:a16="http://schemas.microsoft.com/office/drawing/2014/main" id="{2E7B5716-E91F-48FB-A394-066C499A3826}"/>
-              </a:ext>
-            </a:extLst>
-          </p:cNvPr>
-          <p:cNvSpPr>
-            <a:spLocks noGrp="1"/>
-          </p:cNvSpPr>
-          <p:nvPr>
-            <p:ph type="body" sz="quarter" idx="23"/>
-          </p:nvPr>
-        </p:nvSpPr>
-        <p:spPr/>
-        <p:txBody>
-          <a:bodyPr/>
-          <a:lstStyle/>
-          <a:p>
-            <a:endParaRPr lang="de-DE" dirty="0"/>
-          </a:p>
-        </p:txBody>
-      </p:sp>
-      <p:sp>
-        <p:nvSpPr>
-          <p:cNvPr id="14" name="Textplatzhalter 13">
-            <a:extLst>
-              <a:ext uri="{FF2B5EF4-FFF2-40B4-BE49-F238E27FC236}">
-                <a16:creationId xmlns:a16="http://schemas.microsoft.com/office/drawing/2014/main" id="{72C85398-4C1F-4CF0-A2E5-3EB2516EAB0F}"/>
-              </a:ext>
-            </a:extLst>
-          </p:cNvPr>
-          <p:cNvSpPr>
-            <a:spLocks noGrp="1"/>
-          </p:cNvSpPr>
-          <p:nvPr>
-            <p:ph type="body" sz="quarter" idx="24"/>
-          </p:nvPr>
-        </p:nvSpPr>
-        <p:spPr/>
-        <p:txBody>
-          <a:bodyPr/>
-          <a:lstStyle/>
-          <a:p>
-            <a:endParaRPr lang="de-DE" dirty="0"/>
-          </a:p>
-        </p:txBody>
-      </p:sp>
-      <p:sp>
-        <p:nvSpPr>
-          <p:cNvPr id="16" name="Textplatzhalter 15">
-            <a:extLst>
-              <a:ext uri="{FF2B5EF4-FFF2-40B4-BE49-F238E27FC236}">
-                <a16:creationId xmlns:a16="http://schemas.microsoft.com/office/drawing/2014/main" id="{9B820611-C2BE-47A1-8290-41FFCC42C712}"/>
-              </a:ext>
-            </a:extLst>
-          </p:cNvPr>
-          <p:cNvSpPr>
-            <a:spLocks noGrp="1"/>
-          </p:cNvSpPr>
-          <p:nvPr>
-            <p:ph type="body" sz="quarter" idx="26"/>
-          </p:nvPr>
-        </p:nvSpPr>
-        <p:spPr/>
-        <p:txBody>
-          <a:bodyPr/>
-          <a:lstStyle/>
-          <a:p>
-            <a:endParaRPr lang="de-DE" dirty="0"/>
-          </a:p>
-        </p:txBody>
-      </p:sp>
-      <p:sp>
-        <p:nvSpPr>
-          <p:cNvPr id="17" name="Textplatzhalter 16">
-            <a:extLst>
-              <a:ext uri="{FF2B5EF4-FFF2-40B4-BE49-F238E27FC236}">
-                <a16:creationId xmlns:a16="http://schemas.microsoft.com/office/drawing/2014/main" id="{85AC0060-36C6-497C-9D96-E995B9AECC34}"/>
-              </a:ext>
-            </a:extLst>
-          </p:cNvPr>
-          <p:cNvSpPr>
-            <a:spLocks noGrp="1"/>
-          </p:cNvSpPr>
-          <p:nvPr>
-            <p:ph type="body" sz="quarter" idx="27"/>
-          </p:nvPr>
-        </p:nvSpPr>
-        <p:spPr/>
-        <p:txBody>
-          <a:bodyPr/>
-          <a:lstStyle/>
-          <a:p>
-            <a:endParaRPr lang="de-DE" dirty="0"/>
-          </a:p>
-        </p:txBody>
-      </p:sp>
-      <p:sp>
-        <p:nvSpPr>
-          <p:cNvPr id="19" name="Textplatzhalter 18">
-            <a:extLst>
-              <a:ext uri="{FF2B5EF4-FFF2-40B4-BE49-F238E27FC236}">
-                <a16:creationId xmlns:a16="http://schemas.microsoft.com/office/drawing/2014/main" id="{2B22C803-A52D-4A0D-89F9-1E3052BD024A}"/>
-              </a:ext>
-            </a:extLst>
-          </p:cNvPr>
-          <p:cNvSpPr>
-            <a:spLocks noGrp="1"/>
-          </p:cNvSpPr>
-          <p:nvPr>
-            <p:ph type="body" sz="quarter" idx="29"/>
-          </p:nvPr>
-        </p:nvSpPr>
-        <p:spPr/>
-        <p:txBody>
-          <a:bodyPr/>
-          <a:lstStyle/>
-          <a:p>
-            <a:endParaRPr lang="de-DE" dirty="0"/>
-          </a:p>
-        </p:txBody>
-      </p:sp>
-      <p:sp>
-        <p:nvSpPr>
-          <p:cNvPr id="20" name="Textplatzhalter 19">
-            <a:extLst>
-              <a:ext uri="{FF2B5EF4-FFF2-40B4-BE49-F238E27FC236}">
-                <a16:creationId xmlns:a16="http://schemas.microsoft.com/office/drawing/2014/main" id="{9AB8AB29-C963-4D07-8235-5ED056944F1D}"/>
-              </a:ext>
-            </a:extLst>
-          </p:cNvPr>
-          <p:cNvSpPr>
-            <a:spLocks noGrp="1"/>
-          </p:cNvSpPr>
-          <p:nvPr>
-            <p:ph type="body" sz="quarter" idx="30"/>
-          </p:nvPr>
-        </p:nvSpPr>
-        <p:spPr/>
-        <p:txBody>
-          <a:bodyPr/>
-          <a:lstStyle/>
-          <a:p>
-            <a:endParaRPr lang="de-DE" dirty="0"/>
-          </a:p>
-        </p:txBody>
-      </p:sp>
-      <p:sp>
-        <p:nvSpPr>
-          <p:cNvPr id="26" name="Textplatzhalter 25">
-            <a:extLst>
-              <a:ext uri="{FF2B5EF4-FFF2-40B4-BE49-F238E27FC236}">
-                <a16:creationId xmlns:a16="http://schemas.microsoft.com/office/drawing/2014/main" id="{151AF37C-3A9C-4FBE-A523-229E91C06BD4}"/>
-              </a:ext>
-            </a:extLst>
-          </p:cNvPr>
-          <p:cNvSpPr>
-            <a:spLocks noGrp="1"/>
-          </p:cNvSpPr>
-          <p:nvPr>
-            <p:ph type="body" sz="quarter" idx="39"/>
-          </p:nvPr>
-        </p:nvSpPr>
-        <p:spPr/>
-        <p:txBody>
-          <a:bodyPr/>
-          <a:lstStyle/>
-          <a:p>
-            <a:endParaRPr lang="de-DE"/>
-          </a:p>
-        </p:txBody>
-      </p:sp>
-      <p:sp>
-        <p:nvSpPr>
-          <p:cNvPr id="6" name="Titel 5">
-            <a:extLst>
-              <a:ext uri="{FF2B5EF4-FFF2-40B4-BE49-F238E27FC236}">
-                <a16:creationId xmlns:a16="http://schemas.microsoft.com/office/drawing/2014/main" id="{78BD4460-2B0A-4072-9964-52CF3F5DCFD6}"/>
-              </a:ext>
-            </a:extLst>
-          </p:cNvPr>
-          <p:cNvSpPr>
-            <a:spLocks noGrp="1"/>
-          </p:cNvSpPr>
-          <p:nvPr>
-            <p:ph type="title"/>
-          </p:nvPr>
-        </p:nvSpPr>
-        <p:spPr/>
-        <p:txBody>
-          <a:bodyPr>
-            <a:normAutofit fontScale="90000"/>
-          </a:bodyPr>
-          <a:lstStyle/>
-          <a:p>
-            <a:endParaRPr lang="de-DE" dirty="0"/>
-          </a:p>
-        </p:txBody>
-      </p:sp>
-      <p:sp>
-        <p:nvSpPr>
-          <p:cNvPr id="4" name="Foliennummernplatzhalter 3">
-            <a:extLst>
-              <a:ext uri="{FF2B5EF4-FFF2-40B4-BE49-F238E27FC236}">
-                <a16:creationId xmlns:a16="http://schemas.microsoft.com/office/drawing/2014/main" id="{D1EB737B-B9B8-4A7E-86A4-23E77F90986B}"/>
-              </a:ext>
-            </a:extLst>
-          </p:cNvPr>
-          <p:cNvSpPr>
-            <a:spLocks noGrp="1"/>
-          </p:cNvSpPr>
-          <p:nvPr>
-            <p:ph type="sldNum" sz="quarter" idx="18"/>
+            <a:r>
+              <a:rPr lang="de-DE" dirty="0"/>
+              <a:t>Yang-Zhang </a:t>
+            </a:r>
+            <a:r>
+              <a:rPr lang="de-DE" dirty="0" err="1"/>
+              <a:t>ann</a:t>
+            </a:r>
+            <a:r>
+              <a:rPr lang="de-DE" dirty="0"/>
+              <a:t>. Vol. </a:t>
+            </a:r>
+          </a:p>
+        </p:txBody>
+      </p:sp>
+      <p:sp>
+        <p:nvSpPr>
+          <p:cNvPr id="6" name="Foliennummernplatzhalter 5">
+            <a:extLst>
+              <a:ext uri="{FF2B5EF4-FFF2-40B4-BE49-F238E27FC236}">
+                <a16:creationId xmlns:a16="http://schemas.microsoft.com/office/drawing/2014/main" id="{91BD892F-1A60-3E77-B934-4721C0D84ACA}"/>
+              </a:ext>
+            </a:extLst>
+          </p:cNvPr>
+          <p:cNvSpPr>
+            <a:spLocks noGrp="1"/>
+          </p:cNvSpPr>
+          <p:nvPr>
+            <p:ph type="sldNum" sz="quarter" idx="38"/>
           </p:nvPr>
         </p:nvSpPr>
         <p:spPr/>
@@ -49039,16 +48988,343 @@
           </a:p>
         </p:txBody>
       </p:sp>
+      <p:pic>
+        <p:nvPicPr>
+          <p:cNvPr id="11" name="Grafik 10">
+            <a:extLst>
+              <a:ext uri="{FF2B5EF4-FFF2-40B4-BE49-F238E27FC236}">
+                <a16:creationId xmlns:a16="http://schemas.microsoft.com/office/drawing/2014/main" id="{12D62738-9964-7933-6A7D-84F116FA7242}"/>
+              </a:ext>
+            </a:extLst>
+          </p:cNvPr>
+          <p:cNvPicPr>
+            <a:picLocks noChangeAspect="1"/>
+          </p:cNvPicPr>
+          <p:nvPr/>
+        </p:nvPicPr>
+        <p:blipFill>
+          <a:blip r:embed="rId3">
+            <a:extLst>
+              <a:ext uri="{28A0092B-C50C-407E-A947-70E740481C1C}">
+                <a14:useLocalDpi xmlns:a14="http://schemas.microsoft.com/office/drawing/2010/main" val="0"/>
+              </a:ext>
+            </a:extLst>
+          </a:blip>
+          <a:stretch>
+            <a:fillRect/>
+          </a:stretch>
+        </p:blipFill>
+        <p:spPr>
+          <a:xfrm>
+            <a:off x="1683774" y="1185138"/>
+            <a:ext cx="8824452" cy="5672862"/>
+          </a:xfrm>
+          <a:prstGeom prst="rect">
+            <a:avLst/>
+          </a:prstGeom>
+        </p:spPr>
+      </p:pic>
+      <p:sp>
+        <p:nvSpPr>
+          <p:cNvPr id="15" name="Ellipse 14">
+            <a:extLst>
+              <a:ext uri="{FF2B5EF4-FFF2-40B4-BE49-F238E27FC236}">
+                <a16:creationId xmlns:a16="http://schemas.microsoft.com/office/drawing/2014/main" id="{BE812212-A768-9C62-C502-9A8194456E97}"/>
+              </a:ext>
+            </a:extLst>
+          </p:cNvPr>
+          <p:cNvSpPr/>
+          <p:nvPr/>
+        </p:nvSpPr>
+        <p:spPr>
+          <a:xfrm rot="16200000">
+            <a:off x="8598310" y="2040569"/>
+            <a:ext cx="2261419" cy="973394"/>
+          </a:xfrm>
+          <a:prstGeom prst="ellipse">
+            <a:avLst/>
+          </a:prstGeom>
+          <a:noFill/>
+          <a:ln w="28575">
+            <a:solidFill>
+              <a:srgbClr val="C00000"/>
+            </a:solidFill>
+          </a:ln>
+        </p:spPr>
+        <p:style>
+          <a:lnRef idx="2">
+            <a:schemeClr val="accent1">
+              <a:shade val="50000"/>
+            </a:schemeClr>
+          </a:lnRef>
+          <a:fillRef idx="1">
+            <a:schemeClr val="accent1"/>
+          </a:fillRef>
+          <a:effectRef idx="0">
+            <a:schemeClr val="accent1"/>
+          </a:effectRef>
+          <a:fontRef idx="minor">
+            <a:schemeClr val="lt1"/>
+          </a:fontRef>
+        </p:style>
+        <p:txBody>
+          <a:bodyPr rtlCol="0" anchor="ctr"/>
+          <a:lstStyle/>
+          <a:p>
+            <a:pPr algn="ctr"/>
+            <a:endParaRPr lang="de-DE" dirty="0" err="1"/>
+          </a:p>
+        </p:txBody>
+      </p:sp>
+      <p:sp>
+        <p:nvSpPr>
+          <p:cNvPr id="16" name="Ellipse 15">
+            <a:extLst>
+              <a:ext uri="{FF2B5EF4-FFF2-40B4-BE49-F238E27FC236}">
+                <a16:creationId xmlns:a16="http://schemas.microsoft.com/office/drawing/2014/main" id="{7292FACE-40D4-9FC2-0692-CC4EFE87B016}"/>
+              </a:ext>
+            </a:extLst>
+          </p:cNvPr>
+          <p:cNvSpPr/>
+          <p:nvPr/>
+        </p:nvSpPr>
+        <p:spPr>
+          <a:xfrm>
+            <a:off x="2462981" y="2942303"/>
+            <a:ext cx="2261419" cy="973394"/>
+          </a:xfrm>
+          <a:prstGeom prst="ellipse">
+            <a:avLst/>
+          </a:prstGeom>
+          <a:noFill/>
+          <a:ln w="28575">
+            <a:solidFill>
+              <a:srgbClr val="C00000"/>
+            </a:solidFill>
+          </a:ln>
+        </p:spPr>
+        <p:style>
+          <a:lnRef idx="2">
+            <a:schemeClr val="accent1">
+              <a:shade val="50000"/>
+            </a:schemeClr>
+          </a:lnRef>
+          <a:fillRef idx="1">
+            <a:schemeClr val="accent1"/>
+          </a:fillRef>
+          <a:effectRef idx="0">
+            <a:schemeClr val="accent1"/>
+          </a:effectRef>
+          <a:fontRef idx="minor">
+            <a:schemeClr val="lt1"/>
+          </a:fontRef>
+        </p:style>
+        <p:txBody>
+          <a:bodyPr rtlCol="0" anchor="ctr"/>
+          <a:lstStyle/>
+          <a:p>
+            <a:pPr algn="ctr"/>
+            <a:endParaRPr lang="de-DE" dirty="0" err="1"/>
+          </a:p>
+        </p:txBody>
+      </p:sp>
+      <p:sp>
+        <p:nvSpPr>
+          <p:cNvPr id="3" name="Textfeld 2">
+            <a:extLst>
+              <a:ext uri="{FF2B5EF4-FFF2-40B4-BE49-F238E27FC236}">
+                <a16:creationId xmlns:a16="http://schemas.microsoft.com/office/drawing/2014/main" id="{72D1DD46-DC83-FD83-0380-6A5DE54E4087}"/>
+              </a:ext>
+            </a:extLst>
+          </p:cNvPr>
+          <p:cNvSpPr txBox="1"/>
+          <p:nvPr/>
+        </p:nvSpPr>
+        <p:spPr>
+          <a:xfrm>
+            <a:off x="117987" y="5026531"/>
+            <a:ext cx="2163097" cy="646331"/>
+          </a:xfrm>
+          <a:prstGeom prst="rect">
+            <a:avLst/>
+          </a:prstGeom>
+          <a:noFill/>
+        </p:spPr>
+        <p:txBody>
+          <a:bodyPr wrap="square" rtlCol="0">
+            <a:spAutoFit/>
+          </a:bodyPr>
+          <a:lstStyle/>
+          <a:p>
+            <a:pPr algn="l">
+              <a:spcBef>
+                <a:spcPts val="600"/>
+              </a:spcBef>
+              <a:buClr>
+                <a:schemeClr val="tx1"/>
+              </a:buClr>
+            </a:pPr>
+            <a:r>
+              <a:rPr lang="de-DE" dirty="0"/>
+              <a:t>22-day </a:t>
+            </a:r>
+            <a:r>
+              <a:rPr lang="de-DE" dirty="0" err="1"/>
+              <a:t>rolling</a:t>
+            </a:r>
+            <a:r>
+              <a:rPr lang="de-DE" dirty="0"/>
+              <a:t> </a:t>
+            </a:r>
+            <a:r>
+              <a:rPr lang="de-DE" dirty="0" err="1"/>
+              <a:t>window</a:t>
+            </a:r>
+            <a:endParaRPr lang="de-DE" dirty="0"/>
+          </a:p>
+        </p:txBody>
+      </p:sp>
     </p:spTree>
     <p:extLst>
       <p:ext uri="{BB962C8B-B14F-4D97-AF65-F5344CB8AC3E}">
-        <p14:creationId xmlns:p14="http://schemas.microsoft.com/office/powerpoint/2010/main" val="2878445597"/>
+        <p14:creationId xmlns:p14="http://schemas.microsoft.com/office/powerpoint/2010/main" val="3319231591"/>
       </p:ext>
     </p:extLst>
   </p:cSld>
   <p:clrMapOvr>
     <a:masterClrMapping/>
   </p:clrMapOvr>
+  <p:timing>
+    <p:tnLst>
+      <p:par>
+        <p:cTn id="1" dur="indefinite" restart="never" nodeType="tmRoot">
+          <p:childTnLst>
+            <p:seq concurrent="1" nextAc="seek">
+              <p:cTn id="2" dur="indefinite" nodeType="mainSeq">
+                <p:childTnLst>
+                  <p:par>
+                    <p:cTn id="3" fill="hold">
+                      <p:stCondLst>
+                        <p:cond delay="indefinite"/>
+                      </p:stCondLst>
+                      <p:childTnLst>
+                        <p:par>
+                          <p:cTn id="4" fill="hold">
+                            <p:stCondLst>
+                              <p:cond delay="0"/>
+                            </p:stCondLst>
+                            <p:childTnLst>
+                              <p:par>
+                                <p:cTn id="5" presetID="10" presetClass="entr" presetSubtype="0" fill="hold" grpId="0" nodeType="clickEffect">
+                                  <p:stCondLst>
+                                    <p:cond delay="0"/>
+                                  </p:stCondLst>
+                                  <p:childTnLst>
+                                    <p:set>
+                                      <p:cBhvr>
+                                        <p:cTn id="6" dur="1" fill="hold">
+                                          <p:stCondLst>
+                                            <p:cond delay="0"/>
+                                          </p:stCondLst>
+                                        </p:cTn>
+                                        <p:tgtEl>
+                                          <p:spTgt spid="16"/>
+                                        </p:tgtEl>
+                                        <p:attrNameLst>
+                                          <p:attrName>style.visibility</p:attrName>
+                                        </p:attrNameLst>
+                                      </p:cBhvr>
+                                      <p:to>
+                                        <p:strVal val="visible"/>
+                                      </p:to>
+                                    </p:set>
+                                    <p:animEffect transition="in" filter="fade">
+                                      <p:cBhvr>
+                                        <p:cTn id="7" dur="500"/>
+                                        <p:tgtEl>
+                                          <p:spTgt spid="16"/>
+                                        </p:tgtEl>
+                                      </p:cBhvr>
+                                    </p:animEffect>
+                                  </p:childTnLst>
+                                </p:cTn>
+                              </p:par>
+                            </p:childTnLst>
+                          </p:cTn>
+                        </p:par>
+                        <p:par>
+                          <p:cTn id="8" fill="hold">
+                            <p:stCondLst>
+                              <p:cond delay="500"/>
+                            </p:stCondLst>
+                            <p:childTnLst>
+                              <p:par>
+                                <p:cTn id="9" presetID="10" presetClass="entr" presetSubtype="0" fill="hold" grpId="0" nodeType="afterEffect">
+                                  <p:stCondLst>
+                                    <p:cond delay="0"/>
+                                  </p:stCondLst>
+                                  <p:childTnLst>
+                                    <p:set>
+                                      <p:cBhvr>
+                                        <p:cTn id="10" dur="1" fill="hold">
+                                          <p:stCondLst>
+                                            <p:cond delay="0"/>
+                                          </p:stCondLst>
+                                        </p:cTn>
+                                        <p:tgtEl>
+                                          <p:spTgt spid="15"/>
+                                        </p:tgtEl>
+                                        <p:attrNameLst>
+                                          <p:attrName>style.visibility</p:attrName>
+                                        </p:attrNameLst>
+                                      </p:cBhvr>
+                                      <p:to>
+                                        <p:strVal val="visible"/>
+                                      </p:to>
+                                    </p:set>
+                                    <p:animEffect transition="in" filter="fade">
+                                      <p:cBhvr>
+                                        <p:cTn id="11" dur="500"/>
+                                        <p:tgtEl>
+                                          <p:spTgt spid="15"/>
+                                        </p:tgtEl>
+                                      </p:cBhvr>
+                                    </p:animEffect>
+                                  </p:childTnLst>
+                                </p:cTn>
+                              </p:par>
+                            </p:childTnLst>
+                          </p:cTn>
+                        </p:par>
+                      </p:childTnLst>
+                    </p:cTn>
+                  </p:par>
+                </p:childTnLst>
+              </p:cTn>
+              <p:prevCondLst>
+                <p:cond evt="onPrev" delay="0">
+                  <p:tgtEl>
+                    <p:sldTgt/>
+                  </p:tgtEl>
+                </p:cond>
+              </p:prevCondLst>
+              <p:nextCondLst>
+                <p:cond evt="onNext" delay="0">
+                  <p:tgtEl>
+                    <p:sldTgt/>
+                  </p:tgtEl>
+                </p:cond>
+              </p:nextCondLst>
+            </p:seq>
+          </p:childTnLst>
+        </p:cTn>
+      </p:par>
+    </p:tnLst>
+    <p:bldLst>
+      <p:bldP spid="15" grpId="0" animBg="1"/>
+      <p:bldP spid="16" grpId="0" animBg="1"/>
+    </p:bldLst>
+  </p:timing>
 </p:sld>
 </file>
 
@@ -49775,6 +50051,441 @@
         <p:cNvPr id="1" name="">
           <a:extLst>
             <a:ext uri="{FF2B5EF4-FFF2-40B4-BE49-F238E27FC236}">
+              <a16:creationId xmlns:a16="http://schemas.microsoft.com/office/drawing/2014/main" id="{D257866F-65E9-392B-DA00-F4269CC7133C}"/>
+            </a:ext>
+          </a:extLst>
+        </p:cNvPr>
+        <p:cNvGrpSpPr/>
+        <p:nvPr/>
+      </p:nvGrpSpPr>
+      <p:grpSpPr>
+        <a:xfrm>
+          <a:off x="0" y="0"/>
+          <a:ext cx="0" cy="0"/>
+          <a:chOff x="0" y="0"/>
+          <a:chExt cx="0" cy="0"/>
+        </a:xfrm>
+      </p:grpSpPr>
+      <p:sp>
+        <p:nvSpPr>
+          <p:cNvPr id="49" name="Textplatzhalter 48">
+            <a:extLst>
+              <a:ext uri="{FF2B5EF4-FFF2-40B4-BE49-F238E27FC236}">
+                <a16:creationId xmlns:a16="http://schemas.microsoft.com/office/drawing/2014/main" id="{29CDFDE0-7184-DF00-9F38-BC5C8B066EE6}"/>
+              </a:ext>
+            </a:extLst>
+          </p:cNvPr>
+          <p:cNvSpPr>
+            <a:spLocks noGrp="1"/>
+          </p:cNvSpPr>
+          <p:nvPr>
+            <p:ph type="body" sz="quarter" idx="13"/>
+          </p:nvPr>
+        </p:nvSpPr>
+        <p:spPr>
+          <a:solidFill>
+            <a:srgbClr val="004976"/>
+          </a:solidFill>
+        </p:spPr>
+        <p:txBody>
+          <a:bodyPr/>
+          <a:lstStyle/>
+          <a:p>
+            <a:endParaRPr lang="de-DE" dirty="0"/>
+          </a:p>
+        </p:txBody>
+      </p:sp>
+      <p:sp>
+        <p:nvSpPr>
+          <p:cNvPr id="2" name="Titel 1">
+            <a:extLst>
+              <a:ext uri="{FF2B5EF4-FFF2-40B4-BE49-F238E27FC236}">
+                <a16:creationId xmlns:a16="http://schemas.microsoft.com/office/drawing/2014/main" id="{A5DE0D2B-81E9-44BC-662C-FDA13B0C977B}"/>
+              </a:ext>
+            </a:extLst>
+          </p:cNvPr>
+          <p:cNvSpPr>
+            <a:spLocks noGrp="1"/>
+          </p:cNvSpPr>
+          <p:nvPr>
+            <p:ph type="title"/>
+          </p:nvPr>
+        </p:nvSpPr>
+        <p:spPr/>
+        <p:txBody>
+          <a:bodyPr/>
+          <a:lstStyle/>
+          <a:p>
+            <a:r>
+              <a:rPr lang="de-DE" dirty="0"/>
+              <a:t>Upper-Tail Quantile </a:t>
+            </a:r>
+            <a:r>
+              <a:rPr lang="de-DE" dirty="0" err="1"/>
+              <a:t>Comparison</a:t>
+            </a:r>
+            <a:endParaRPr lang="de-DE" dirty="0"/>
+          </a:p>
+        </p:txBody>
+      </p:sp>
+      <p:sp>
+        <p:nvSpPr>
+          <p:cNvPr id="14" name="Textplatzhalter 13">
+            <a:extLst>
+              <a:ext uri="{FF2B5EF4-FFF2-40B4-BE49-F238E27FC236}">
+                <a16:creationId xmlns:a16="http://schemas.microsoft.com/office/drawing/2014/main" id="{54BF008C-5768-885A-E6C4-7B691078FCAD}"/>
+              </a:ext>
+            </a:extLst>
+          </p:cNvPr>
+          <p:cNvSpPr>
+            <a:spLocks noGrp="1"/>
+          </p:cNvSpPr>
+          <p:nvPr>
+            <p:ph type="body" sz="quarter" idx="39"/>
+          </p:nvPr>
+        </p:nvSpPr>
+        <p:spPr/>
+        <p:txBody>
+          <a:bodyPr/>
+          <a:lstStyle/>
+          <a:p>
+            <a:r>
+              <a:rPr lang="de-DE" dirty="0"/>
+              <a:t>Quantile Loss</a:t>
+            </a:r>
+          </a:p>
+        </p:txBody>
+      </p:sp>
+      <p:sp>
+        <p:nvSpPr>
+          <p:cNvPr id="6" name="Foliennummernplatzhalter 5">
+            <a:extLst>
+              <a:ext uri="{FF2B5EF4-FFF2-40B4-BE49-F238E27FC236}">
+                <a16:creationId xmlns:a16="http://schemas.microsoft.com/office/drawing/2014/main" id="{4D896CE4-31A6-32C4-2603-6FEB6C782297}"/>
+              </a:ext>
+            </a:extLst>
+          </p:cNvPr>
+          <p:cNvSpPr>
+            <a:spLocks noGrp="1"/>
+          </p:cNvSpPr>
+          <p:nvPr>
+            <p:ph type="sldNum" sz="quarter" idx="38"/>
+          </p:nvPr>
+        </p:nvSpPr>
+        <p:spPr/>
+        <p:txBody>
+          <a:bodyPr/>
+          <a:lstStyle/>
+          <a:p>
+            <a:fld id="{A23FFA10-0470-4638-936A-23EC73946E25}" type="slidenum">
+              <a:rPr lang="de-DE" smtClean="0"/>
+              <a:pPr/>
+              <a:t>25</a:t>
+            </a:fld>
+            <a:endParaRPr lang="de-DE" dirty="0"/>
+          </a:p>
+        </p:txBody>
+      </p:sp>
+      <mc:AlternateContent xmlns:mc="http://schemas.openxmlformats.org/markup-compatibility/2006" xmlns:a14="http://schemas.microsoft.com/office/drawing/2010/main">
+        <mc:Choice Requires="a14">
+          <p:sp>
+            <p:nvSpPr>
+              <p:cNvPr id="3" name="Inhaltsplatzhalter 34">
+                <a:extLst>
+                  <a:ext uri="{FF2B5EF4-FFF2-40B4-BE49-F238E27FC236}">
+                    <a16:creationId xmlns:a16="http://schemas.microsoft.com/office/drawing/2014/main" id="{5AAC02AD-412C-4CA6-6D41-037921129DF2}"/>
+                  </a:ext>
+                </a:extLst>
+              </p:cNvPr>
+              <p:cNvSpPr>
+                <a:spLocks noGrp="1"/>
+              </p:cNvSpPr>
+              <p:nvPr>
+                <p:ph idx="1"/>
+              </p:nvPr>
+            </p:nvSpPr>
+            <p:spPr>
+              <a:xfrm>
+                <a:off x="361950" y="1376363"/>
+                <a:ext cx="11468100" cy="4776773"/>
+              </a:xfrm>
+            </p:spPr>
+            <p:txBody>
+              <a:bodyPr/>
+              <a:lstStyle/>
+              <a:p>
+                <a:r>
+                  <a:rPr lang="en-US" dirty="0"/>
+                  <a:t>Quantile Loss for distributional forecasts:</a:t>
+                </a:r>
+              </a:p>
+              <a:p>
+                <a:endParaRPr lang="en-US" dirty="0"/>
+              </a:p>
+              <a:p>
+                <a:pPr marL="0" indent="0">
+                  <a:buNone/>
+                </a:pPr>
+                <a:endParaRPr lang="en-US" dirty="0"/>
+              </a:p>
+              <a:p>
+                <a:pPr marL="0" indent="0">
+                  <a:buNone/>
+                </a:pPr>
+                <a:endParaRPr lang="en-US" dirty="0"/>
+              </a:p>
+              <a:p>
+                <a:r>
+                  <a:rPr lang="de-DE" dirty="0" err="1"/>
+                  <a:t>Uses</a:t>
+                </a:r>
+                <a:r>
+                  <a:rPr lang="de-DE" dirty="0"/>
+                  <a:t> </a:t>
+                </a:r>
+                <a:r>
+                  <a:rPr lang="de-DE" dirty="0" err="1"/>
+                  <a:t>the</a:t>
+                </a:r>
+                <a:r>
+                  <a:rPr lang="de-DE" dirty="0"/>
+                  <a:t> same check </a:t>
+                </a:r>
+                <a:r>
+                  <a:rPr lang="de-DE" dirty="0" err="1"/>
+                  <a:t>function</a:t>
+                </a:r>
+                <a:r>
+                  <a:rPr lang="de-DE" dirty="0"/>
+                  <a:t> </a:t>
+                </a:r>
+                <a14:m>
+                  <m:oMath xmlns:m="http://schemas.openxmlformats.org/officeDocument/2006/math">
+                    <m:sSub>
+                      <m:sSubPr>
+                        <m:ctrlPr>
+                          <a:rPr lang="de-DE" i="1" dirty="0" smtClean="0">
+                            <a:latin typeface="Cambria Math" panose="02040503050406030204" pitchFamily="18" charset="0"/>
+                          </a:rPr>
+                        </m:ctrlPr>
+                      </m:sSubPr>
+                      <m:e>
+                        <m:r>
+                          <a:rPr lang="de-DE" i="1" dirty="0">
+                            <a:latin typeface="Cambria Math" panose="02040503050406030204" pitchFamily="18" charset="0"/>
+                          </a:rPr>
+                          <m:t>𝜌</m:t>
+                        </m:r>
+                      </m:e>
+                      <m:sub>
+                        <m:r>
+                          <a:rPr lang="de-DE" i="1" dirty="0">
+                            <a:latin typeface="Cambria Math" panose="02040503050406030204" pitchFamily="18" charset="0"/>
+                          </a:rPr>
+                          <m:t>𝜏</m:t>
+                        </m:r>
+                      </m:sub>
+                    </m:sSub>
+                  </m:oMath>
+                </a14:m>
+                <a:r>
+                  <a:rPr lang="de-DE" dirty="0"/>
+                  <a:t> </a:t>
+                </a:r>
+                <a:r>
+                  <a:rPr lang="de-DE" dirty="0" err="1"/>
+                  <a:t>as</a:t>
+                </a:r>
+                <a:r>
+                  <a:rPr lang="de-DE" dirty="0"/>
+                  <a:t> </a:t>
+                </a:r>
+                <a:r>
+                  <a:rPr lang="de-DE" dirty="0" err="1"/>
+                  <a:t>estimation</a:t>
+                </a:r>
+                <a:r>
+                  <a:rPr lang="de-DE" dirty="0"/>
+                  <a:t>. This </a:t>
+                </a:r>
+                <a:r>
+                  <a:rPr lang="de-DE" dirty="0" err="1"/>
+                  <a:t>makes</a:t>
+                </a:r>
+                <a:r>
+                  <a:rPr lang="de-DE" dirty="0"/>
+                  <a:t> HAR-QR „</a:t>
+                </a:r>
+                <a:r>
+                  <a:rPr lang="de-DE" dirty="0" err="1"/>
+                  <a:t>coherent</a:t>
+                </a:r>
+                <a:r>
+                  <a:rPr lang="de-DE" dirty="0"/>
+                  <a:t>“ </a:t>
+                </a:r>
+                <a:r>
+                  <a:rPr lang="de-DE" sz="1200" dirty="0"/>
+                  <a:t>(</a:t>
+                </a:r>
+                <a:r>
+                  <a:rPr lang="de-DE" sz="1200" dirty="0" err="1"/>
+                  <a:t>Puke</a:t>
+                </a:r>
+                <a:r>
+                  <a:rPr lang="de-DE" sz="1200" dirty="0"/>
+                  <a:t> and Schweikert 2026)</a:t>
+                </a:r>
+              </a:p>
+              <a:p>
+                <a:endParaRPr lang="de-DE" dirty="0"/>
+              </a:p>
+              <a:p>
+                <a:pPr marL="0" indent="0">
+                  <a:buNone/>
+                </a:pPr>
+                <a:endParaRPr lang="de-DE" b="1" u="sng" dirty="0"/>
+              </a:p>
+            </p:txBody>
+          </p:sp>
+        </mc:Choice>
+        <mc:Fallback xmlns="">
+          <p:sp>
+            <p:nvSpPr>
+              <p:cNvPr id="3" name="Inhaltsplatzhalter 34">
+                <a:extLst>
+                  <a:ext uri="{FF2B5EF4-FFF2-40B4-BE49-F238E27FC236}">
+                    <a16:creationId xmlns:a16="http://schemas.microsoft.com/office/drawing/2014/main" id="{5AAC02AD-412C-4CA6-6D41-037921129DF2}"/>
+                  </a:ext>
+                </a:extLst>
+              </p:cNvPr>
+              <p:cNvSpPr>
+                <a:spLocks noGrp="1" noRot="1" noChangeAspect="1" noMove="1" noResize="1" noEditPoints="1" noAdjustHandles="1" noChangeArrowheads="1" noChangeShapeType="1" noTextEdit="1"/>
+              </p:cNvSpPr>
+              <p:nvPr>
+                <p:ph idx="1"/>
+              </p:nvPr>
+            </p:nvSpPr>
+            <p:spPr>
+              <a:xfrm>
+                <a:off x="361950" y="1376363"/>
+                <a:ext cx="11468100" cy="4776773"/>
+              </a:xfrm>
+              <a:blipFill>
+                <a:blip r:embed="rId3"/>
+                <a:stretch>
+                  <a:fillRect l="-1488" t="-1916"/>
+                </a:stretch>
+              </a:blipFill>
+            </p:spPr>
+            <p:txBody>
+              <a:bodyPr/>
+              <a:lstStyle/>
+              <a:p>
+                <a:r>
+                  <a:rPr lang="de-DE">
+                    <a:noFill/>
+                  </a:rPr>
+                  <a:t> </a:t>
+                </a:r>
+              </a:p>
+            </p:txBody>
+          </p:sp>
+        </mc:Fallback>
+      </mc:AlternateContent>
+      <p:pic>
+        <p:nvPicPr>
+          <p:cNvPr id="5" name="Grafik 4">
+            <a:extLst>
+              <a:ext uri="{FF2B5EF4-FFF2-40B4-BE49-F238E27FC236}">
+                <a16:creationId xmlns:a16="http://schemas.microsoft.com/office/drawing/2014/main" id="{6FFE5A9F-C1D2-D269-E530-1A5FF6D6E4A8}"/>
+              </a:ext>
+            </a:extLst>
+          </p:cNvPr>
+          <p:cNvPicPr>
+            <a:picLocks noChangeAspect="1"/>
+          </p:cNvPicPr>
+          <p:nvPr/>
+        </p:nvPicPr>
+        <p:blipFill>
+          <a:blip r:embed="rId4">
+            <a:extLst>
+              <a:ext uri="{28A0092B-C50C-407E-A947-70E740481C1C}">
+                <a14:useLocalDpi xmlns:a14="http://schemas.microsoft.com/office/drawing/2010/main" val="0"/>
+              </a:ext>
+            </a:extLst>
+          </a:blip>
+          <a:stretch>
+            <a:fillRect/>
+          </a:stretch>
+        </p:blipFill>
+        <p:spPr>
+          <a:xfrm>
+            <a:off x="4401228" y="1938800"/>
+            <a:ext cx="3120449" cy="888797"/>
+          </a:xfrm>
+          <a:prstGeom prst="rect">
+            <a:avLst/>
+          </a:prstGeom>
+        </p:spPr>
+      </p:pic>
+      <p:pic>
+        <p:nvPicPr>
+          <p:cNvPr id="9" name="Grafik 8">
+            <a:extLst>
+              <a:ext uri="{FF2B5EF4-FFF2-40B4-BE49-F238E27FC236}">
+                <a16:creationId xmlns:a16="http://schemas.microsoft.com/office/drawing/2014/main" id="{2F1E5FB8-F5E6-0833-A49A-91F20B4C99B0}"/>
+              </a:ext>
+            </a:extLst>
+          </p:cNvPr>
+          <p:cNvPicPr>
+            <a:picLocks noChangeAspect="1"/>
+          </p:cNvPicPr>
+          <p:nvPr/>
+        </p:nvPicPr>
+        <p:blipFill>
+          <a:blip r:embed="rId5">
+            <a:extLst>
+              <a:ext uri="{28A0092B-C50C-407E-A947-70E740481C1C}">
+                <a14:useLocalDpi xmlns:a14="http://schemas.microsoft.com/office/drawing/2010/main" val="0"/>
+              </a:ext>
+            </a:extLst>
+          </a:blip>
+          <a:stretch>
+            <a:fillRect/>
+          </a:stretch>
+        </p:blipFill>
+        <p:spPr>
+          <a:xfrm>
+            <a:off x="1964534" y="3855549"/>
+            <a:ext cx="8262931" cy="1112318"/>
+          </a:xfrm>
+          <a:prstGeom prst="rect">
+            <a:avLst/>
+          </a:prstGeom>
+        </p:spPr>
+      </p:pic>
+    </p:spTree>
+    <p:extLst>
+      <p:ext uri="{BB962C8B-B14F-4D97-AF65-F5344CB8AC3E}">
+        <p14:creationId xmlns:p14="http://schemas.microsoft.com/office/powerpoint/2010/main" val="347503000"/>
+      </p:ext>
+    </p:extLst>
+  </p:cSld>
+  <p:clrMapOvr>
+    <a:masterClrMapping/>
+  </p:clrMapOvr>
+</p:sld>
+</file>
+
+<file path=ppt/slides/slide26.xml><?xml version="1.0" encoding="utf-8"?>
+<p:sld xmlns:a="http://schemas.openxmlformats.org/drawingml/2006/main" xmlns:r="http://schemas.openxmlformats.org/officeDocument/2006/relationships" xmlns:p="http://schemas.openxmlformats.org/presentationml/2006/main">
+  <p:cSld>
+    <p:spTree>
+      <p:nvGrpSpPr>
+        <p:cNvPr id="1" name="">
+          <a:extLst>
+            <a:ext uri="{FF2B5EF4-FFF2-40B4-BE49-F238E27FC236}">
               <a16:creationId xmlns:a16="http://schemas.microsoft.com/office/drawing/2014/main" id="{6EE655A4-84CD-71DA-528E-00942497B3B4}"/>
             </a:ext>
           </a:extLst>
@@ -49919,7 +50630,7 @@
             <a:fld id="{A23FFA10-0470-4638-936A-23EC73946E25}" type="slidenum">
               <a:rPr lang="de-DE" smtClean="0"/>
               <a:pPr/>
-              <a:t>25</a:t>
+              <a:t>26</a:t>
             </a:fld>
             <a:endParaRPr lang="de-DE" dirty="0"/>
           </a:p>
@@ -50045,7 +50756,7 @@
             <p:ph idx="1"/>
             <p:extLst>
               <p:ext uri="{D42A27DB-BD31-4B8C-83A1-F6EECF244321}">
-                <p14:modId xmlns:p14="http://schemas.microsoft.com/office/powerpoint/2010/main" val="747030355"/>
+                <p14:modId xmlns:p14="http://schemas.microsoft.com/office/powerpoint/2010/main" val="4032323436"/>
               </p:ext>
             </p:extLst>
           </p:nvPr>
@@ -51051,20 +51762,14 @@
                         </a:spcAft>
                       </a:pPr>
                       <a:r>
-                        <a:rPr lang="de-DE" sz="1800" baseline="0" noProof="0" dirty="0" err="1">
+                        <a:rPr lang="de-DE" sz="1800" baseline="0" noProof="0" dirty="0">
                           <a:solidFill>
                             <a:srgbClr val="000000"/>
                           </a:solidFill>
                           <a:latin typeface="+mn-lt"/>
                         </a:rPr>
-                        <a:t>No</a:t>
+                        <a:t>-</a:t>
                       </a:r>
-                      <a:endParaRPr lang="de-DE" sz="1800" baseline="0" noProof="0" dirty="0">
-                        <a:solidFill>
-                          <a:srgbClr val="000000"/>
-                        </a:solidFill>
-                        <a:latin typeface="+mn-lt"/>
-                      </a:endParaRPr>
                     </a:p>
                   </a:txBody>
                   <a:tcPr marL="144658" marR="72329" marT="36000" marB="36000" anchor="ctr">
@@ -51129,20 +51834,14 @@
                         </a:spcAft>
                       </a:pPr>
                       <a:r>
-                        <a:rPr lang="de-DE" sz="1800" baseline="0" noProof="0" dirty="0" err="1">
+                        <a:rPr lang="de-DE" sz="1800" baseline="0" noProof="0" dirty="0">
                           <a:solidFill>
                             <a:srgbClr val="000000"/>
                           </a:solidFill>
                           <a:latin typeface="+mn-lt"/>
                         </a:rPr>
-                        <a:t>No</a:t>
+                        <a:t>-</a:t>
                       </a:r>
-                      <a:endParaRPr lang="de-DE" sz="1800" baseline="0" noProof="0" dirty="0">
-                        <a:solidFill>
-                          <a:srgbClr val="000000"/>
-                        </a:solidFill>
-                        <a:latin typeface="+mn-lt"/>
-                      </a:endParaRPr>
                     </a:p>
                   </a:txBody>
                   <a:tcPr marL="144658" marR="72329" marT="36000" marB="36000" anchor="ctr">
@@ -51517,20 +52216,14 @@
                         </a:spcAft>
                       </a:pPr>
                       <a:r>
-                        <a:rPr lang="de-DE" sz="1800" baseline="0" noProof="0" dirty="0" err="1">
+                        <a:rPr lang="de-DE" sz="1800" baseline="0" noProof="0" dirty="0">
                           <a:solidFill>
                             <a:srgbClr val="000000"/>
                           </a:solidFill>
                           <a:latin typeface="+mn-lt"/>
                         </a:rPr>
-                        <a:t>No</a:t>
+                        <a:t>-</a:t>
                       </a:r>
-                      <a:endParaRPr lang="de-DE" sz="1800" baseline="0" noProof="0" dirty="0">
-                        <a:solidFill>
-                          <a:srgbClr val="000000"/>
-                        </a:solidFill>
-                        <a:latin typeface="+mn-lt"/>
-                      </a:endParaRPr>
                     </a:p>
                   </a:txBody>
                   <a:tcPr marL="144658" marR="72329" marT="36000" marB="36000" anchor="ctr">
@@ -51595,20 +52288,14 @@
                         </a:spcAft>
                       </a:pPr>
                       <a:r>
-                        <a:rPr lang="de-DE" sz="1800" baseline="0" noProof="0" dirty="0" err="1">
+                        <a:rPr lang="de-DE" sz="1800" baseline="0" noProof="0" dirty="0">
                           <a:solidFill>
                             <a:srgbClr val="000000"/>
                           </a:solidFill>
                           <a:latin typeface="+mn-lt"/>
                         </a:rPr>
-                        <a:t>No</a:t>
+                        <a:t>-</a:t>
                       </a:r>
-                      <a:endParaRPr lang="de-DE" sz="1800" baseline="0" noProof="0" dirty="0">
-                        <a:solidFill>
-                          <a:srgbClr val="000000"/>
-                        </a:solidFill>
-                        <a:latin typeface="+mn-lt"/>
-                      </a:endParaRPr>
                     </a:p>
                   </a:txBody>
                   <a:tcPr marL="144658" marR="72329" marT="36000" marB="36000" anchor="ctr">
@@ -51673,20 +52360,14 @@
                         </a:spcAft>
                       </a:pPr>
                       <a:r>
-                        <a:rPr lang="de-DE" sz="1800" baseline="0" noProof="0" dirty="0" err="1">
+                        <a:rPr lang="de-DE" sz="1800" baseline="0" noProof="0" dirty="0">
                           <a:solidFill>
                             <a:srgbClr val="000000"/>
                           </a:solidFill>
                           <a:latin typeface="+mn-lt"/>
                         </a:rPr>
-                        <a:t>No</a:t>
+                        <a:t>-</a:t>
                       </a:r>
-                      <a:endParaRPr lang="de-DE" sz="1800" baseline="0" noProof="0" dirty="0">
-                        <a:solidFill>
-                          <a:srgbClr val="000000"/>
-                        </a:solidFill>
-                        <a:latin typeface="+mn-lt"/>
-                      </a:endParaRPr>
                     </a:p>
                   </a:txBody>
                   <a:tcPr marL="144658" marR="72329" marT="36000" marB="36000" anchor="ctr">
@@ -51751,20 +52432,14 @@
                         </a:spcAft>
                       </a:pPr>
                       <a:r>
-                        <a:rPr lang="de-DE" sz="1800" baseline="0" noProof="0" dirty="0" err="1">
+                        <a:rPr lang="de-DE" sz="1800" baseline="0" noProof="0" dirty="0">
                           <a:solidFill>
                             <a:srgbClr val="000000"/>
                           </a:solidFill>
                           <a:latin typeface="+mn-lt"/>
                         </a:rPr>
-                        <a:t>No</a:t>
+                        <a:t>-</a:t>
                       </a:r>
-                      <a:endParaRPr lang="de-DE" sz="1800" baseline="0" noProof="0" dirty="0">
-                        <a:solidFill>
-                          <a:srgbClr val="000000"/>
-                        </a:solidFill>
-                        <a:latin typeface="+mn-lt"/>
-                      </a:endParaRPr>
                     </a:p>
                   </a:txBody>
                   <a:tcPr marL="144658" marR="72329" marT="36000" marB="36000" anchor="ctr">
@@ -53577,7 +54252,12 @@
             <p:ph idx="1"/>
           </p:nvPr>
         </p:nvSpPr>
-        <p:spPr/>
+        <p:spPr>
+          <a:xfrm>
+            <a:off x="361950" y="1376363"/>
+            <a:ext cx="11468100" cy="4493495"/>
+          </a:xfrm>
+        </p:spPr>
         <p:txBody>
           <a:bodyPr/>
           <a:lstStyle/>
@@ -53883,6 +54563,510 @@
 </file>
 
 <file path=ppt/slides/slide5.xml><?xml version="1.0" encoding="utf-8"?>
+<p:sld xmlns:a="http://schemas.openxmlformats.org/drawingml/2006/main" xmlns:r="http://schemas.openxmlformats.org/officeDocument/2006/relationships" xmlns:p="http://schemas.openxmlformats.org/presentationml/2006/main">
+  <p:cSld>
+    <p:spTree>
+      <p:nvGrpSpPr>
+        <p:cNvPr id="1" name="">
+          <a:extLst>
+            <a:ext uri="{FF2B5EF4-FFF2-40B4-BE49-F238E27FC236}">
+              <a16:creationId xmlns:a16="http://schemas.microsoft.com/office/drawing/2014/main" id="{44C6EC9F-7340-609F-9238-F4621954A311}"/>
+            </a:ext>
+          </a:extLst>
+        </p:cNvPr>
+        <p:cNvGrpSpPr/>
+        <p:nvPr/>
+      </p:nvGrpSpPr>
+      <p:grpSpPr>
+        <a:xfrm>
+          <a:off x="0" y="0"/>
+          <a:ext cx="0" cy="0"/>
+          <a:chOff x="0" y="0"/>
+          <a:chExt cx="0" cy="0"/>
+        </a:xfrm>
+      </p:grpSpPr>
+      <p:sp>
+        <p:nvSpPr>
+          <p:cNvPr id="49" name="Textplatzhalter 48">
+            <a:extLst>
+              <a:ext uri="{FF2B5EF4-FFF2-40B4-BE49-F238E27FC236}">
+                <a16:creationId xmlns:a16="http://schemas.microsoft.com/office/drawing/2014/main" id="{DD37FC8C-34FC-0C3A-C8F0-E2A842B106E3}"/>
+              </a:ext>
+            </a:extLst>
+          </p:cNvPr>
+          <p:cNvSpPr>
+            <a:spLocks noGrp="1"/>
+          </p:cNvSpPr>
+          <p:nvPr>
+            <p:ph type="body" sz="quarter" idx="13"/>
+          </p:nvPr>
+        </p:nvSpPr>
+        <p:spPr>
+          <a:solidFill>
+            <a:srgbClr val="004976"/>
+          </a:solidFill>
+        </p:spPr>
+        <p:txBody>
+          <a:bodyPr/>
+          <a:lstStyle/>
+          <a:p>
+            <a:endParaRPr lang="de-DE"/>
+          </a:p>
+        </p:txBody>
+      </p:sp>
+      <p:sp>
+        <p:nvSpPr>
+          <p:cNvPr id="2" name="Titel 1">
+            <a:extLst>
+              <a:ext uri="{FF2B5EF4-FFF2-40B4-BE49-F238E27FC236}">
+                <a16:creationId xmlns:a16="http://schemas.microsoft.com/office/drawing/2014/main" id="{7A02F545-75DC-F09F-5DAA-F2CE39E02466}"/>
+              </a:ext>
+            </a:extLst>
+          </p:cNvPr>
+          <p:cNvSpPr>
+            <a:spLocks noGrp="1"/>
+          </p:cNvSpPr>
+          <p:nvPr>
+            <p:ph type="title"/>
+          </p:nvPr>
+        </p:nvSpPr>
+        <p:spPr/>
+        <p:txBody>
+          <a:bodyPr/>
+          <a:lstStyle/>
+          <a:p>
+            <a:r>
+              <a:rPr lang="de-DE" dirty="0"/>
+              <a:t>Key Design </a:t>
+            </a:r>
+            <a:r>
+              <a:rPr lang="de-DE" dirty="0" err="1"/>
+              <a:t>decisions</a:t>
+            </a:r>
+            <a:endParaRPr lang="de-DE" dirty="0"/>
+          </a:p>
+        </p:txBody>
+      </p:sp>
+      <p:sp>
+        <p:nvSpPr>
+          <p:cNvPr id="14" name="Textplatzhalter 13">
+            <a:extLst>
+              <a:ext uri="{FF2B5EF4-FFF2-40B4-BE49-F238E27FC236}">
+                <a16:creationId xmlns:a16="http://schemas.microsoft.com/office/drawing/2014/main" id="{D77D3E62-00BD-A4A4-8522-B6BC3A7709F6}"/>
+              </a:ext>
+            </a:extLst>
+          </p:cNvPr>
+          <p:cNvSpPr>
+            <a:spLocks noGrp="1"/>
+          </p:cNvSpPr>
+          <p:nvPr>
+            <p:ph type="body" sz="quarter" idx="39"/>
+          </p:nvPr>
+        </p:nvSpPr>
+        <p:spPr/>
+        <p:txBody>
+          <a:bodyPr/>
+          <a:lstStyle/>
+          <a:p>
+            <a:endParaRPr lang="de-DE" dirty="0"/>
+          </a:p>
+        </p:txBody>
+      </p:sp>
+      <p:sp>
+        <p:nvSpPr>
+          <p:cNvPr id="6" name="Foliennummernplatzhalter 5">
+            <a:extLst>
+              <a:ext uri="{FF2B5EF4-FFF2-40B4-BE49-F238E27FC236}">
+                <a16:creationId xmlns:a16="http://schemas.microsoft.com/office/drawing/2014/main" id="{10414A09-9B7A-2062-3510-2F6F883BF671}"/>
+              </a:ext>
+            </a:extLst>
+          </p:cNvPr>
+          <p:cNvSpPr>
+            <a:spLocks noGrp="1"/>
+          </p:cNvSpPr>
+          <p:nvPr>
+            <p:ph type="sldNum" sz="quarter" idx="38"/>
+          </p:nvPr>
+        </p:nvSpPr>
+        <p:spPr/>
+        <p:txBody>
+          <a:bodyPr/>
+          <a:lstStyle/>
+          <a:p>
+            <a:fld id="{A23FFA10-0470-4638-936A-23EC73946E25}" type="slidenum">
+              <a:rPr lang="de-DE" smtClean="0"/>
+              <a:pPr/>
+              <a:t>5</a:t>
+            </a:fld>
+            <a:endParaRPr lang="de-DE" dirty="0"/>
+          </a:p>
+        </p:txBody>
+      </p:sp>
+      <p:sp>
+        <p:nvSpPr>
+          <p:cNvPr id="35" name="Inhaltsplatzhalter 34">
+            <a:extLst>
+              <a:ext uri="{FF2B5EF4-FFF2-40B4-BE49-F238E27FC236}">
+                <a16:creationId xmlns:a16="http://schemas.microsoft.com/office/drawing/2014/main" id="{AF465A1E-32AE-A581-DB26-6F963BB37085}"/>
+              </a:ext>
+            </a:extLst>
+          </p:cNvPr>
+          <p:cNvSpPr>
+            <a:spLocks noGrp="1"/>
+          </p:cNvSpPr>
+          <p:nvPr>
+            <p:ph idx="1"/>
+          </p:nvPr>
+        </p:nvSpPr>
+        <p:spPr/>
+        <p:txBody>
+          <a:bodyPr/>
+          <a:lstStyle/>
+          <a:p>
+            <a:r>
+              <a:rPr lang="de-DE" b="1" dirty="0"/>
+              <a:t>Yang-Zhang </a:t>
+            </a:r>
+            <a:r>
+              <a:rPr lang="de-DE" b="1" dirty="0" err="1"/>
+              <a:t>volatility</a:t>
+            </a:r>
+            <a:r>
+              <a:rPr lang="de-DE" b="1" dirty="0"/>
+              <a:t> </a:t>
+            </a:r>
+            <a:r>
+              <a:rPr lang="de-DE" sz="1200" dirty="0"/>
+              <a:t>(Zhang et al. 2000)</a:t>
+            </a:r>
+          </a:p>
+          <a:p>
+            <a:pPr lvl="1"/>
+            <a:r>
+              <a:rPr lang="de-DE" dirty="0"/>
+              <a:t>40 </a:t>
+            </a:r>
+            <a:r>
+              <a:rPr lang="de-DE" dirty="0" err="1"/>
+              <a:t>years</a:t>
+            </a:r>
+            <a:r>
+              <a:rPr lang="de-DE" dirty="0"/>
+              <a:t> </a:t>
+            </a:r>
+            <a:r>
+              <a:rPr lang="de-DE" dirty="0" err="1"/>
+              <a:t>of</a:t>
+            </a:r>
+            <a:r>
+              <a:rPr lang="de-DE" dirty="0"/>
+              <a:t> </a:t>
+            </a:r>
+            <a:r>
+              <a:rPr lang="de-DE" dirty="0" err="1"/>
+              <a:t>daily</a:t>
+            </a:r>
+            <a:r>
+              <a:rPr lang="de-DE" dirty="0"/>
+              <a:t> OHLCV</a:t>
+            </a:r>
+          </a:p>
+          <a:p>
+            <a:pPr lvl="1"/>
+            <a:r>
+              <a:rPr lang="de-DE" dirty="0" err="1"/>
+              <a:t>Validated</a:t>
+            </a:r>
+            <a:r>
+              <a:rPr lang="de-DE" dirty="0"/>
+              <a:t> </a:t>
+            </a:r>
+            <a:r>
+              <a:rPr lang="de-DE" dirty="0" err="1"/>
+              <a:t>against</a:t>
+            </a:r>
+            <a:r>
+              <a:rPr lang="de-DE" dirty="0"/>
+              <a:t> </a:t>
+            </a:r>
+            <a:r>
+              <a:rPr lang="de-DE" dirty="0" err="1"/>
+              <a:t>correlation</a:t>
+            </a:r>
+            <a:r>
+              <a:rPr lang="de-DE" dirty="0"/>
+              <a:t> </a:t>
+            </a:r>
+            <a:r>
+              <a:rPr lang="de-DE" dirty="0" err="1"/>
+              <a:t>with</a:t>
+            </a:r>
+            <a:r>
+              <a:rPr lang="de-DE" dirty="0"/>
+              <a:t> 5-min RV	</a:t>
+            </a:r>
+          </a:p>
+          <a:p>
+            <a:pPr lvl="1"/>
+            <a:r>
+              <a:rPr lang="de-DE" dirty="0" err="1"/>
+              <a:t>Compared</a:t>
+            </a:r>
+            <a:r>
+              <a:rPr lang="de-DE" dirty="0"/>
+              <a:t> </a:t>
+            </a:r>
+            <a:r>
+              <a:rPr lang="de-DE" dirty="0" err="1"/>
+              <a:t>against</a:t>
+            </a:r>
+            <a:r>
+              <a:rPr lang="de-DE" dirty="0"/>
+              <a:t> </a:t>
+            </a:r>
+            <a:r>
+              <a:rPr lang="de-DE" dirty="0" err="1"/>
+              <a:t>Garman</a:t>
+            </a:r>
+            <a:r>
+              <a:rPr lang="de-DE" dirty="0"/>
+              <a:t>-Klass, Parkinson &amp; Close-</a:t>
+            </a:r>
+            <a:r>
+              <a:rPr lang="de-DE" dirty="0" err="1"/>
+              <a:t>to</a:t>
+            </a:r>
+            <a:r>
+              <a:rPr lang="de-DE" dirty="0"/>
+              <a:t>-</a:t>
+            </a:r>
+            <a:r>
+              <a:rPr lang="de-DE" dirty="0" err="1"/>
+              <a:t>close</a:t>
+            </a:r>
+            <a:endParaRPr lang="de-DE" dirty="0"/>
+          </a:p>
+          <a:p>
+            <a:pPr lvl="1"/>
+            <a:endParaRPr lang="de-DE" dirty="0"/>
+          </a:p>
+        </p:txBody>
+      </p:sp>
+    </p:spTree>
+    <p:extLst>
+      <p:ext uri="{BB962C8B-B14F-4D97-AF65-F5344CB8AC3E}">
+        <p14:creationId xmlns:p14="http://schemas.microsoft.com/office/powerpoint/2010/main" val="845533718"/>
+      </p:ext>
+    </p:extLst>
+  </p:cSld>
+  <p:clrMapOvr>
+    <a:masterClrMapping/>
+  </p:clrMapOvr>
+</p:sld>
+</file>
+
+<file path=ppt/slides/slide6.xml><?xml version="1.0" encoding="utf-8"?>
+<p:sld xmlns:a="http://schemas.openxmlformats.org/drawingml/2006/main" xmlns:r="http://schemas.openxmlformats.org/officeDocument/2006/relationships" xmlns:p="http://schemas.openxmlformats.org/presentationml/2006/main">
+  <p:cSld>
+    <p:spTree>
+      <p:nvGrpSpPr>
+        <p:cNvPr id="1" name="">
+          <a:extLst>
+            <a:ext uri="{FF2B5EF4-FFF2-40B4-BE49-F238E27FC236}">
+              <a16:creationId xmlns:a16="http://schemas.microsoft.com/office/drawing/2014/main" id="{2F7B0975-CF59-E739-0699-C5CC318108B3}"/>
+            </a:ext>
+          </a:extLst>
+        </p:cNvPr>
+        <p:cNvGrpSpPr/>
+        <p:nvPr/>
+      </p:nvGrpSpPr>
+      <p:grpSpPr>
+        <a:xfrm>
+          <a:off x="0" y="0"/>
+          <a:ext cx="0" cy="0"/>
+          <a:chOff x="0" y="0"/>
+          <a:chExt cx="0" cy="0"/>
+        </a:xfrm>
+      </p:grpSpPr>
+      <p:sp>
+        <p:nvSpPr>
+          <p:cNvPr id="49" name="Textplatzhalter 48">
+            <a:extLst>
+              <a:ext uri="{FF2B5EF4-FFF2-40B4-BE49-F238E27FC236}">
+                <a16:creationId xmlns:a16="http://schemas.microsoft.com/office/drawing/2014/main" id="{5C83D746-077F-C3CF-A17D-4D18E76A4FC6}"/>
+              </a:ext>
+            </a:extLst>
+          </p:cNvPr>
+          <p:cNvSpPr>
+            <a:spLocks noGrp="1"/>
+          </p:cNvSpPr>
+          <p:nvPr>
+            <p:ph type="body" sz="quarter" idx="13"/>
+          </p:nvPr>
+        </p:nvSpPr>
+        <p:spPr>
+          <a:solidFill>
+            <a:srgbClr val="004976"/>
+          </a:solidFill>
+        </p:spPr>
+        <p:txBody>
+          <a:bodyPr/>
+          <a:lstStyle/>
+          <a:p>
+            <a:endParaRPr lang="de-DE"/>
+          </a:p>
+        </p:txBody>
+      </p:sp>
+      <p:sp>
+        <p:nvSpPr>
+          <p:cNvPr id="2" name="Titel 1">
+            <a:extLst>
+              <a:ext uri="{FF2B5EF4-FFF2-40B4-BE49-F238E27FC236}">
+                <a16:creationId xmlns:a16="http://schemas.microsoft.com/office/drawing/2014/main" id="{8255E303-DF50-53A2-227D-29D8D3DF941A}"/>
+              </a:ext>
+            </a:extLst>
+          </p:cNvPr>
+          <p:cNvSpPr>
+            <a:spLocks noGrp="1"/>
+          </p:cNvSpPr>
+          <p:nvPr>
+            <p:ph type="title"/>
+          </p:nvPr>
+        </p:nvSpPr>
+        <p:spPr/>
+        <p:txBody>
+          <a:bodyPr/>
+          <a:lstStyle/>
+          <a:p>
+            <a:r>
+              <a:rPr lang="de-DE" dirty="0"/>
+              <a:t>Key Design </a:t>
+            </a:r>
+            <a:r>
+              <a:rPr lang="de-DE" dirty="0" err="1"/>
+              <a:t>decisions</a:t>
+            </a:r>
+            <a:endParaRPr lang="de-DE" dirty="0"/>
+          </a:p>
+        </p:txBody>
+      </p:sp>
+      <p:sp>
+        <p:nvSpPr>
+          <p:cNvPr id="14" name="Textplatzhalter 13">
+            <a:extLst>
+              <a:ext uri="{FF2B5EF4-FFF2-40B4-BE49-F238E27FC236}">
+                <a16:creationId xmlns:a16="http://schemas.microsoft.com/office/drawing/2014/main" id="{633BF910-3E37-9747-EFB8-87FC198B9563}"/>
+              </a:ext>
+            </a:extLst>
+          </p:cNvPr>
+          <p:cNvSpPr>
+            <a:spLocks noGrp="1"/>
+          </p:cNvSpPr>
+          <p:nvPr>
+            <p:ph type="body" sz="quarter" idx="39"/>
+          </p:nvPr>
+        </p:nvSpPr>
+        <p:spPr/>
+        <p:txBody>
+          <a:bodyPr/>
+          <a:lstStyle/>
+          <a:p>
+            <a:r>
+              <a:rPr lang="de-DE" dirty="0" err="1"/>
+              <a:t>Volatility</a:t>
+            </a:r>
+            <a:r>
+              <a:rPr lang="de-DE" dirty="0"/>
+              <a:t> </a:t>
+            </a:r>
+            <a:r>
+              <a:rPr lang="de-DE" dirty="0" err="1"/>
+              <a:t>Estimator</a:t>
+            </a:r>
+            <a:endParaRPr lang="de-DE" dirty="0"/>
+          </a:p>
+        </p:txBody>
+      </p:sp>
+      <p:sp>
+        <p:nvSpPr>
+          <p:cNvPr id="6" name="Foliennummernplatzhalter 5">
+            <a:extLst>
+              <a:ext uri="{FF2B5EF4-FFF2-40B4-BE49-F238E27FC236}">
+                <a16:creationId xmlns:a16="http://schemas.microsoft.com/office/drawing/2014/main" id="{AC7B29E7-302E-8CD1-A0EA-64F335EF156F}"/>
+              </a:ext>
+            </a:extLst>
+          </p:cNvPr>
+          <p:cNvSpPr>
+            <a:spLocks noGrp="1"/>
+          </p:cNvSpPr>
+          <p:nvPr>
+            <p:ph type="sldNum" sz="quarter" idx="38"/>
+          </p:nvPr>
+        </p:nvSpPr>
+        <p:spPr/>
+        <p:txBody>
+          <a:bodyPr/>
+          <a:lstStyle/>
+          <a:p>
+            <a:fld id="{A23FFA10-0470-4638-936A-23EC73946E25}" type="slidenum">
+              <a:rPr lang="de-DE" smtClean="0"/>
+              <a:pPr/>
+              <a:t>6</a:t>
+            </a:fld>
+            <a:endParaRPr lang="de-DE" dirty="0"/>
+          </a:p>
+        </p:txBody>
+      </p:sp>
+      <p:pic>
+        <p:nvPicPr>
+          <p:cNvPr id="4" name="Grafik 3">
+            <a:extLst>
+              <a:ext uri="{FF2B5EF4-FFF2-40B4-BE49-F238E27FC236}">
+                <a16:creationId xmlns:a16="http://schemas.microsoft.com/office/drawing/2014/main" id="{81686413-43D2-DA8B-4F21-80F7CC5EF618}"/>
+              </a:ext>
+            </a:extLst>
+          </p:cNvPr>
+          <p:cNvPicPr>
+            <a:picLocks noChangeAspect="1"/>
+          </p:cNvPicPr>
+          <p:nvPr/>
+        </p:nvPicPr>
+        <p:blipFill>
+          <a:blip r:embed="rId3">
+            <a:extLst>
+              <a:ext uri="{28A0092B-C50C-407E-A947-70E740481C1C}">
+                <a14:useLocalDpi xmlns:a14="http://schemas.microsoft.com/office/drawing/2010/main" val="0"/>
+              </a:ext>
+            </a:extLst>
+          </a:blip>
+          <a:stretch>
+            <a:fillRect/>
+          </a:stretch>
+        </p:blipFill>
+        <p:spPr>
+          <a:xfrm>
+            <a:off x="425223" y="1350836"/>
+            <a:ext cx="11228439" cy="4812188"/>
+          </a:xfrm>
+          <a:prstGeom prst="rect">
+            <a:avLst/>
+          </a:prstGeom>
+        </p:spPr>
+      </p:pic>
+    </p:spTree>
+    <p:extLst>
+      <p:ext uri="{BB962C8B-B14F-4D97-AF65-F5344CB8AC3E}">
+        <p14:creationId xmlns:p14="http://schemas.microsoft.com/office/powerpoint/2010/main" val="2078509939"/>
+      </p:ext>
+    </p:extLst>
+  </p:cSld>
+  <p:clrMapOvr>
+    <a:masterClrMapping/>
+  </p:clrMapOvr>
+</p:sld>
+</file>
+
+<file path=ppt/slides/slide7.xml><?xml version="1.0" encoding="utf-8"?>
 <p:sld xmlns:a="http://schemas.openxmlformats.org/drawingml/2006/main" xmlns:r="http://schemas.openxmlformats.org/officeDocument/2006/relationships" xmlns:p="http://schemas.openxmlformats.org/presentationml/2006/main">
   <p:cSld>
     <p:spTree>
@@ -54016,7 +55200,7 @@
             <a:fld id="{A23FFA10-0470-4638-936A-23EC73946E25}" type="slidenum">
               <a:rPr lang="de-DE" smtClean="0"/>
               <a:pPr/>
-              <a:t>5</a:t>
+              <a:t>7</a:t>
             </a:fld>
             <a:endParaRPr lang="de-DE" dirty="0"/>
           </a:p>
@@ -54107,8 +55291,64 @@
             </a:r>
             <a:r>
               <a:rPr lang="de-DE" dirty="0"/>
-              <a:t> 5-min RV</a:t>
-            </a:r>
+              <a:t> </a:t>
+            </a:r>
+            <a:r>
+              <a:rPr lang="de-DE" dirty="0" err="1"/>
+              <a:t>correlation</a:t>
+            </a:r>
+            <a:r>
+              <a:rPr lang="de-DE" dirty="0"/>
+              <a:t> </a:t>
+            </a:r>
+            <a:r>
+              <a:rPr lang="de-DE" dirty="0" err="1"/>
+              <a:t>with</a:t>
+            </a:r>
+            <a:r>
+              <a:rPr lang="de-DE" dirty="0"/>
+              <a:t> 5-min RV	</a:t>
+            </a:r>
+          </a:p>
+          <a:p>
+            <a:pPr lvl="1"/>
+            <a:r>
+              <a:rPr lang="de-DE" dirty="0" err="1"/>
+              <a:t>Compared</a:t>
+            </a:r>
+            <a:r>
+              <a:rPr lang="de-DE" dirty="0"/>
+              <a:t> </a:t>
+            </a:r>
+            <a:r>
+              <a:rPr lang="de-DE" dirty="0" err="1"/>
+              <a:t>against</a:t>
+            </a:r>
+            <a:r>
+              <a:rPr lang="de-DE" dirty="0"/>
+              <a:t> </a:t>
+            </a:r>
+            <a:r>
+              <a:rPr lang="de-DE" dirty="0" err="1"/>
+              <a:t>Garman</a:t>
+            </a:r>
+            <a:r>
+              <a:rPr lang="de-DE" dirty="0"/>
+              <a:t>-Klass, Parkinson &amp; Close-</a:t>
+            </a:r>
+            <a:r>
+              <a:rPr lang="de-DE" dirty="0" err="1"/>
+              <a:t>to</a:t>
+            </a:r>
+            <a:r>
+              <a:rPr lang="de-DE" dirty="0"/>
+              <a:t>-</a:t>
+            </a:r>
+            <a:r>
+              <a:rPr lang="de-DE" dirty="0" err="1"/>
+              <a:t>close</a:t>
+            </a:r>
+            <a:endParaRPr lang="de-DE" dirty="0"/>
           </a:p>
           <a:p>
             <a:pPr lvl="1"/>
@@ -54282,7 +55522,7 @@
 </p:sld>
 </file>
 
-<file path=ppt/slides/slide6.xml><?xml version="1.0" encoding="utf-8"?>
+<file path=ppt/slides/slide8.xml><?xml version="1.0" encoding="utf-8"?>
 <p:sld xmlns:a="http://schemas.openxmlformats.org/drawingml/2006/main" xmlns:r="http://schemas.openxmlformats.org/officeDocument/2006/relationships" xmlns:p="http://schemas.openxmlformats.org/presentationml/2006/main">
   <p:cSld>
     <p:spTree>
@@ -54290,7 +55530,7 @@
         <p:cNvPr id="1" name="">
           <a:extLst>
             <a:ext uri="{FF2B5EF4-FFF2-40B4-BE49-F238E27FC236}">
-              <a16:creationId xmlns:a16="http://schemas.microsoft.com/office/drawing/2014/main" id="{36581F74-5732-681D-C7B2-B9D4EBFD509C}"/>
+              <a16:creationId xmlns:a16="http://schemas.microsoft.com/office/drawing/2014/main" id="{93E3560E-6692-940C-2A10-098EBBF53565}"/>
             </a:ext>
           </a:extLst>
         </p:cNvPr>
@@ -54310,7 +55550,7 @@
           <p:cNvPr id="40" name="Textplatzhalter 39">
             <a:extLst>
               <a:ext uri="{FF2B5EF4-FFF2-40B4-BE49-F238E27FC236}">
-                <a16:creationId xmlns:a16="http://schemas.microsoft.com/office/drawing/2014/main" id="{2FD19FF7-7257-3178-F181-83ABDB8C7FA1}"/>
+                <a16:creationId xmlns:a16="http://schemas.microsoft.com/office/drawing/2014/main" id="{F17B8AB0-EFAD-A3D2-3AEA-6FB7954CACE7}"/>
               </a:ext>
             </a:extLst>
           </p:cNvPr>
@@ -54335,7 +55575,7 @@
           <p:cNvPr id="45" name="Textplatzhalter 44">
             <a:extLst>
               <a:ext uri="{FF2B5EF4-FFF2-40B4-BE49-F238E27FC236}">
-                <a16:creationId xmlns:a16="http://schemas.microsoft.com/office/drawing/2014/main" id="{1B5127BA-9FB7-06A0-AE84-60CECCD58A18}"/>
+                <a16:creationId xmlns:a16="http://schemas.microsoft.com/office/drawing/2014/main" id="{D0DE8DEC-D4E0-A942-C841-05AF64858F6E}"/>
               </a:ext>
             </a:extLst>
           </p:cNvPr>
@@ -54371,24 +55611,24 @@
       </p:sp>
       <p:sp>
         <p:nvSpPr>
-          <p:cNvPr id="46" name="Inhaltsplatzhalter 45">
-            <a:extLst>
-              <a:ext uri="{FF2B5EF4-FFF2-40B4-BE49-F238E27FC236}">
-                <a16:creationId xmlns:a16="http://schemas.microsoft.com/office/drawing/2014/main" id="{5631841E-D6FB-0902-4178-D00688E805E7}"/>
-              </a:ext>
-            </a:extLst>
-          </p:cNvPr>
-          <p:cNvSpPr>
-            <a:spLocks noGrp="1"/>
-          </p:cNvSpPr>
-          <p:nvPr>
-            <p:ph sz="quarter" idx="25"/>
+          <p:cNvPr id="43" name="Textplatzhalter 42">
+            <a:extLst>
+              <a:ext uri="{FF2B5EF4-FFF2-40B4-BE49-F238E27FC236}">
+                <a16:creationId xmlns:a16="http://schemas.microsoft.com/office/drawing/2014/main" id="{16E37916-F017-1206-13E9-2A894975984F}"/>
+              </a:ext>
+            </a:extLst>
+          </p:cNvPr>
+          <p:cNvSpPr>
+            <a:spLocks noGrp="1"/>
+          </p:cNvSpPr>
+          <p:nvPr>
+            <p:ph type="body" idx="22"/>
           </p:nvPr>
         </p:nvSpPr>
         <p:spPr>
           <a:xfrm>
-            <a:off x="3539613" y="1635156"/>
-            <a:ext cx="8290437" cy="1335600"/>
+            <a:off x="361950" y="3204222"/>
+            <a:ext cx="3177663" cy="1335600"/>
           </a:xfrm>
         </p:spPr>
         <p:txBody>
@@ -54397,51 +55637,147 @@
           <a:p>
             <a:r>
               <a:rPr lang="de-DE" dirty="0"/>
-              <a:t>Mean </a:t>
+              <a:t>Quantile </a:t>
+            </a:r>
+            <a:r>
+              <a:rPr lang="de-DE" dirty="0" err="1"/>
+              <a:t>loss</a:t>
+            </a:r>
+            <a:endParaRPr lang="de-DE" dirty="0"/>
+          </a:p>
+          <a:p>
+            <a:r>
+              <a:rPr lang="de-DE" dirty="0"/>
+              <a:t>(HAR-QR, HAR-X-QR)</a:t>
+            </a:r>
+          </a:p>
+        </p:txBody>
+      </p:sp>
+      <p:sp>
+        <p:nvSpPr>
+          <p:cNvPr id="44" name="Inhaltsplatzhalter 43">
+            <a:extLst>
+              <a:ext uri="{FF2B5EF4-FFF2-40B4-BE49-F238E27FC236}">
+                <a16:creationId xmlns:a16="http://schemas.microsoft.com/office/drawing/2014/main" id="{B918485D-73D6-F1FE-10C0-E8ECEB0C2C3C}"/>
+              </a:ext>
+            </a:extLst>
+          </p:cNvPr>
+          <p:cNvSpPr>
+            <a:spLocks noGrp="1"/>
+          </p:cNvSpPr>
+          <p:nvPr>
+            <p:ph sz="quarter" idx="23"/>
+          </p:nvPr>
+        </p:nvSpPr>
+        <p:spPr>
+          <a:xfrm>
+            <a:off x="3539613" y="3204222"/>
+            <a:ext cx="8290437" cy="1335600"/>
+          </a:xfrm>
+        </p:spPr>
+        <p:txBody>
+          <a:bodyPr/>
+          <a:lstStyle/>
+          <a:p>
+            <a:r>
+              <a:rPr lang="de-DE" dirty="0"/>
+              <a:t>Distributional </a:t>
             </a:r>
             <a:r>
               <a:rPr lang="de-DE" dirty="0" err="1"/>
               <a:t>forecasts</a:t>
             </a:r>
+            <a:endParaRPr lang="de-DE" dirty="0"/>
+          </a:p>
+          <a:p>
+            <a:r>
+              <a:rPr lang="en-US" dirty="0"/>
+              <a:t>Natural scoring rule for quantile forecasts — penalizes under- and over-prediction asymmetrically depending on tau</a:t>
+            </a:r>
+            <a:endParaRPr lang="de-DE" dirty="0"/>
+          </a:p>
+        </p:txBody>
+      </p:sp>
+      <p:sp>
+        <p:nvSpPr>
+          <p:cNvPr id="41" name="Textplatzhalter 40">
+            <a:extLst>
+              <a:ext uri="{FF2B5EF4-FFF2-40B4-BE49-F238E27FC236}">
+                <a16:creationId xmlns:a16="http://schemas.microsoft.com/office/drawing/2014/main" id="{F048795D-8F03-C49A-B150-5445B1C51553}"/>
+              </a:ext>
+            </a:extLst>
+          </p:cNvPr>
+          <p:cNvSpPr>
+            <a:spLocks noGrp="1"/>
+          </p:cNvSpPr>
+          <p:nvPr>
+            <p:ph type="body" idx="18"/>
+          </p:nvPr>
+        </p:nvSpPr>
+        <p:spPr>
+          <a:xfrm>
+            <a:off x="361950" y="4773288"/>
+            <a:ext cx="3177663" cy="1335600"/>
+          </a:xfrm>
+        </p:spPr>
+        <p:txBody>
+          <a:bodyPr/>
+          <a:lstStyle/>
+          <a:p>
+            <a:r>
+              <a:rPr lang="de-DE" dirty="0"/>
+              <a:t>Model </a:t>
+            </a:r>
+            <a:r>
+              <a:rPr lang="de-DE" dirty="0" err="1"/>
+              <a:t>confidence</a:t>
+            </a:r>
             <a:r>
               <a:rPr lang="de-DE" dirty="0"/>
               <a:t> </a:t>
             </a:r>
             <a:r>
               <a:rPr lang="de-DE" dirty="0" err="1"/>
-              <a:t>evaluation</a:t>
+              <a:t>set</a:t>
             </a:r>
             <a:endParaRPr lang="de-DE" dirty="0"/>
           </a:p>
           <a:p>
             <a:r>
-              <a:rPr lang="en-US" dirty="0"/>
-              <a:t>Chosen because it ranks forecasts consistently even when the true volatility (proxy) is measured with noise</a:t>
-            </a:r>
-            <a:endParaRPr lang="de-DE" dirty="0"/>
-          </a:p>
-        </p:txBody>
-      </p:sp>
-      <p:sp>
-        <p:nvSpPr>
-          <p:cNvPr id="43" name="Textplatzhalter 42">
-            <a:extLst>
-              <a:ext uri="{FF2B5EF4-FFF2-40B4-BE49-F238E27FC236}">
-                <a16:creationId xmlns:a16="http://schemas.microsoft.com/office/drawing/2014/main" id="{C04877F9-0762-6939-E9B1-044AEA9C7271}"/>
-              </a:ext>
-            </a:extLst>
-          </p:cNvPr>
-          <p:cNvSpPr>
-            <a:spLocks noGrp="1"/>
-          </p:cNvSpPr>
-          <p:nvPr>
-            <p:ph type="body" idx="22"/>
+              <a:rPr lang="de-DE" dirty="0"/>
+              <a:t>(All </a:t>
+            </a:r>
+            <a:r>
+              <a:rPr lang="de-DE" dirty="0" err="1"/>
+              <a:t>models</a:t>
+            </a:r>
+            <a:r>
+              <a:rPr lang="de-DE" dirty="0"/>
+              <a:t>)</a:t>
+            </a:r>
+          </a:p>
+        </p:txBody>
+      </p:sp>
+      <p:sp>
+        <p:nvSpPr>
+          <p:cNvPr id="42" name="Inhaltsplatzhalter 41">
+            <a:extLst>
+              <a:ext uri="{FF2B5EF4-FFF2-40B4-BE49-F238E27FC236}">
+                <a16:creationId xmlns:a16="http://schemas.microsoft.com/office/drawing/2014/main" id="{35B97C08-6BA2-8D46-DA62-9D1C262151E0}"/>
+              </a:ext>
+            </a:extLst>
+          </p:cNvPr>
+          <p:cNvSpPr>
+            <a:spLocks noGrp="1"/>
+          </p:cNvSpPr>
+          <p:nvPr>
+            <p:ph sz="quarter" idx="21"/>
           </p:nvPr>
         </p:nvSpPr>
         <p:spPr>
           <a:xfrm>
-            <a:off x="361950" y="3204222"/>
-            <a:ext cx="3177663" cy="1335600"/>
+            <a:off x="3539613" y="4773288"/>
+            <a:ext cx="8290437" cy="1335600"/>
           </a:xfrm>
         </p:spPr>
         <p:txBody>
@@ -54450,195 +55786,46 @@
           <a:p>
             <a:r>
               <a:rPr lang="de-DE" dirty="0"/>
-              <a:t>Quantile </a:t>
+              <a:t>Statistical </a:t>
             </a:r>
             <a:r>
               <a:rPr lang="de-DE" dirty="0" err="1"/>
-              <a:t>loss</a:t>
+              <a:t>significance</a:t>
             </a:r>
             <a:endParaRPr lang="de-DE" dirty="0"/>
           </a:p>
           <a:p>
             <a:r>
-              <a:rPr lang="de-DE" dirty="0"/>
-              <a:t>(HAR-QR, HAR-X-QR)</a:t>
-            </a:r>
-          </a:p>
-        </p:txBody>
-      </p:sp>
-      <p:sp>
-        <p:nvSpPr>
-          <p:cNvPr id="44" name="Inhaltsplatzhalter 43">
-            <a:extLst>
-              <a:ext uri="{FF2B5EF4-FFF2-40B4-BE49-F238E27FC236}">
-                <a16:creationId xmlns:a16="http://schemas.microsoft.com/office/drawing/2014/main" id="{7756C53E-9652-99E1-0FA2-8D88CF2AEDE3}"/>
-              </a:ext>
-            </a:extLst>
-          </p:cNvPr>
-          <p:cNvSpPr>
-            <a:spLocks noGrp="1"/>
-          </p:cNvSpPr>
-          <p:nvPr>
-            <p:ph sz="quarter" idx="23"/>
-          </p:nvPr>
-        </p:nvSpPr>
-        <p:spPr>
-          <a:xfrm>
-            <a:off x="3539613" y="3204222"/>
-            <a:ext cx="8290437" cy="1335600"/>
-          </a:xfrm>
-        </p:spPr>
+              <a:rPr lang="en-US" dirty="0"/>
+              <a:t>MCS identifies the group of statistically indistinguishable top performer</a:t>
+            </a:r>
+            <a:endParaRPr lang="de-DE" dirty="0"/>
+          </a:p>
+        </p:txBody>
+      </p:sp>
+      <p:sp>
+        <p:nvSpPr>
+          <p:cNvPr id="47" name="Textplatzhalter 46">
+            <a:extLst>
+              <a:ext uri="{FF2B5EF4-FFF2-40B4-BE49-F238E27FC236}">
+                <a16:creationId xmlns:a16="http://schemas.microsoft.com/office/drawing/2014/main" id="{08636E65-CCBA-223C-6346-03247B00850D}"/>
+              </a:ext>
+            </a:extLst>
+          </p:cNvPr>
+          <p:cNvSpPr>
+            <a:spLocks noGrp="1"/>
+          </p:cNvSpPr>
+          <p:nvPr>
+            <p:ph type="body" sz="quarter" idx="39"/>
+          </p:nvPr>
+        </p:nvSpPr>
+        <p:spPr/>
         <p:txBody>
           <a:bodyPr/>
           <a:lstStyle/>
           <a:p>
             <a:r>
               <a:rPr lang="de-DE" dirty="0"/>
-              <a:t>Distributional </a:t>
-            </a:r>
-            <a:r>
-              <a:rPr lang="de-DE" dirty="0" err="1"/>
-              <a:t>forecasts</a:t>
-            </a:r>
-            <a:endParaRPr lang="de-DE" dirty="0"/>
-          </a:p>
-          <a:p>
-            <a:r>
-              <a:rPr lang="en-US" dirty="0"/>
-              <a:t>Natural scoring rule for quantile forecasts — penalizes under- and over-prediction asymmetrically depending on τ</a:t>
-            </a:r>
-            <a:endParaRPr lang="de-DE" dirty="0"/>
-          </a:p>
-        </p:txBody>
-      </p:sp>
-      <p:sp>
-        <p:nvSpPr>
-          <p:cNvPr id="41" name="Textplatzhalter 40">
-            <a:extLst>
-              <a:ext uri="{FF2B5EF4-FFF2-40B4-BE49-F238E27FC236}">
-                <a16:creationId xmlns:a16="http://schemas.microsoft.com/office/drawing/2014/main" id="{1A49B424-9E54-1060-4666-100C45C87F46}"/>
-              </a:ext>
-            </a:extLst>
-          </p:cNvPr>
-          <p:cNvSpPr>
-            <a:spLocks noGrp="1"/>
-          </p:cNvSpPr>
-          <p:nvPr>
-            <p:ph type="body" idx="18"/>
-          </p:nvPr>
-        </p:nvSpPr>
-        <p:spPr>
-          <a:xfrm>
-            <a:off x="361950" y="4773288"/>
-            <a:ext cx="3177663" cy="1335600"/>
-          </a:xfrm>
-        </p:spPr>
-        <p:txBody>
-          <a:bodyPr/>
-          <a:lstStyle/>
-          <a:p>
-            <a:r>
-              <a:rPr lang="de-DE" dirty="0"/>
-              <a:t>Model </a:t>
-            </a:r>
-            <a:r>
-              <a:rPr lang="de-DE" dirty="0" err="1"/>
-              <a:t>confidence</a:t>
-            </a:r>
-            <a:r>
-              <a:rPr lang="de-DE" dirty="0"/>
-              <a:t> </a:t>
-            </a:r>
-            <a:r>
-              <a:rPr lang="de-DE" dirty="0" err="1"/>
-              <a:t>set</a:t>
-            </a:r>
-            <a:endParaRPr lang="de-DE" dirty="0"/>
-          </a:p>
-          <a:p>
-            <a:r>
-              <a:rPr lang="de-DE" dirty="0"/>
-              <a:t>(All </a:t>
-            </a:r>
-            <a:r>
-              <a:rPr lang="de-DE" dirty="0" err="1"/>
-              <a:t>models</a:t>
-            </a:r>
-            <a:r>
-              <a:rPr lang="de-DE" dirty="0"/>
-              <a:t>)</a:t>
-            </a:r>
-          </a:p>
-        </p:txBody>
-      </p:sp>
-      <p:sp>
-        <p:nvSpPr>
-          <p:cNvPr id="42" name="Inhaltsplatzhalter 41">
-            <a:extLst>
-              <a:ext uri="{FF2B5EF4-FFF2-40B4-BE49-F238E27FC236}">
-                <a16:creationId xmlns:a16="http://schemas.microsoft.com/office/drawing/2014/main" id="{162BB9E2-4FAD-38A9-581D-409F67F8F02D}"/>
-              </a:ext>
-            </a:extLst>
-          </p:cNvPr>
-          <p:cNvSpPr>
-            <a:spLocks noGrp="1"/>
-          </p:cNvSpPr>
-          <p:nvPr>
-            <p:ph sz="quarter" idx="21"/>
-          </p:nvPr>
-        </p:nvSpPr>
-        <p:spPr>
-          <a:xfrm>
-            <a:off x="3539613" y="4773288"/>
-            <a:ext cx="8290437" cy="1335600"/>
-          </a:xfrm>
-        </p:spPr>
-        <p:txBody>
-          <a:bodyPr/>
-          <a:lstStyle/>
-          <a:p>
-            <a:r>
-              <a:rPr lang="de-DE" dirty="0"/>
-              <a:t>Statistical </a:t>
-            </a:r>
-            <a:r>
-              <a:rPr lang="de-DE" dirty="0" err="1"/>
-              <a:t>significance</a:t>
-            </a:r>
-            <a:endParaRPr lang="de-DE" dirty="0"/>
-          </a:p>
-          <a:p>
-            <a:r>
-              <a:rPr lang="en-US" dirty="0"/>
-              <a:t>MCS identifies the group of statistically indistinguishable top performer</a:t>
-            </a:r>
-            <a:endParaRPr lang="de-DE" dirty="0"/>
-          </a:p>
-        </p:txBody>
-      </p:sp>
-      <p:sp>
-        <p:nvSpPr>
-          <p:cNvPr id="47" name="Textplatzhalter 46">
-            <a:extLst>
-              <a:ext uri="{FF2B5EF4-FFF2-40B4-BE49-F238E27FC236}">
-                <a16:creationId xmlns:a16="http://schemas.microsoft.com/office/drawing/2014/main" id="{24797F2B-A4A2-8E2E-016F-FA39153050FD}"/>
-              </a:ext>
-            </a:extLst>
-          </p:cNvPr>
-          <p:cNvSpPr>
-            <a:spLocks noGrp="1"/>
-          </p:cNvSpPr>
-          <p:nvPr>
-            <p:ph type="body" sz="quarter" idx="39"/>
-          </p:nvPr>
-        </p:nvSpPr>
-        <p:spPr/>
-        <p:txBody>
-          <a:bodyPr/>
-          <a:lstStyle/>
-          <a:p>
-            <a:r>
-              <a:rPr lang="de-DE" dirty="0"/>
               <a:t>Evaluation</a:t>
             </a:r>
           </a:p>
@@ -54649,7 +55836,7 @@
           <p:cNvPr id="39" name="Titel 38">
             <a:extLst>
               <a:ext uri="{FF2B5EF4-FFF2-40B4-BE49-F238E27FC236}">
-                <a16:creationId xmlns:a16="http://schemas.microsoft.com/office/drawing/2014/main" id="{F7895B57-7E56-D6A2-7E05-129FFE112D89}"/>
+                <a16:creationId xmlns:a16="http://schemas.microsoft.com/office/drawing/2014/main" id="{CE4F46BF-C90F-D3B7-4AA9-BEC7DC1229B6}"/>
               </a:ext>
             </a:extLst>
           </p:cNvPr>
@@ -54684,7 +55871,7 @@
           <p:cNvPr id="49" name="Foliennummernplatzhalter 48">
             <a:extLst>
               <a:ext uri="{FF2B5EF4-FFF2-40B4-BE49-F238E27FC236}">
-                <a16:creationId xmlns:a16="http://schemas.microsoft.com/office/drawing/2014/main" id="{472DA5C9-9A26-EA6A-E33D-4E02CFC10982}"/>
+                <a16:creationId xmlns:a16="http://schemas.microsoft.com/office/drawing/2014/main" id="{7B99C2BF-875F-1025-6A61-867A1A3B2D09}"/>
               </a:ext>
             </a:extLst>
           </p:cNvPr>
@@ -54703,16 +55890,381 @@
             <a:fld id="{A23FFA10-0470-4638-936A-23EC73946E25}" type="slidenum">
               <a:rPr lang="de-DE" smtClean="0"/>
               <a:pPr/>
-              <a:t>6</a:t>
+              <a:t>8</a:t>
             </a:fld>
             <a:endParaRPr lang="de-DE" dirty="0"/>
           </a:p>
         </p:txBody>
       </p:sp>
+      <p:pic>
+        <p:nvPicPr>
+          <p:cNvPr id="2" name="Grafik 1">
+            <a:extLst>
+              <a:ext uri="{FF2B5EF4-FFF2-40B4-BE49-F238E27FC236}">
+                <a16:creationId xmlns:a16="http://schemas.microsoft.com/office/drawing/2014/main" id="{E1237DA5-94E3-463C-20E3-38A679F1EC60}"/>
+              </a:ext>
+            </a:extLst>
+          </p:cNvPr>
+          <p:cNvPicPr>
+            <a:picLocks noChangeAspect="1"/>
+          </p:cNvPicPr>
+          <p:nvPr/>
+        </p:nvPicPr>
+        <p:blipFill>
+          <a:blip r:embed="rId3">
+            <a:extLst>
+              <a:ext uri="{28A0092B-C50C-407E-A947-70E740481C1C}">
+                <a14:useLocalDpi xmlns:a14="http://schemas.microsoft.com/office/drawing/2010/main" val="0"/>
+              </a:ext>
+            </a:extLst>
+          </a:blip>
+          <a:stretch>
+            <a:fillRect/>
+          </a:stretch>
+        </p:blipFill>
+        <p:spPr>
+          <a:xfrm>
+            <a:off x="9724102" y="3202698"/>
+            <a:ext cx="2105947" cy="599836"/>
+          </a:xfrm>
+          <a:prstGeom prst="rect">
+            <a:avLst/>
+          </a:prstGeom>
+        </p:spPr>
+      </p:pic>
+      <p:sp>
+        <p:nvSpPr>
+          <p:cNvPr id="3" name="Inhaltsplatzhalter 45">
+            <a:extLst>
+              <a:ext uri="{FF2B5EF4-FFF2-40B4-BE49-F238E27FC236}">
+                <a16:creationId xmlns:a16="http://schemas.microsoft.com/office/drawing/2014/main" id="{0E006B87-F78D-240F-4A9F-8D8E50159042}"/>
+              </a:ext>
+            </a:extLst>
+          </p:cNvPr>
+          <p:cNvSpPr txBox="1">
+            <a:spLocks/>
+          </p:cNvSpPr>
+          <p:nvPr/>
+        </p:nvSpPr>
+        <p:spPr bwMode="gray">
+          <a:xfrm>
+            <a:off x="3539612" y="1633632"/>
+            <a:ext cx="8290437" cy="1335600"/>
+          </a:xfrm>
+          <a:prstGeom prst="rect">
+            <a:avLst/>
+          </a:prstGeom>
+          <a:solidFill>
+            <a:schemeClr val="accent2">
+              <a:alpha val="75000"/>
+            </a:schemeClr>
+          </a:solidFill>
+        </p:spPr>
+        <p:txBody>
+          <a:bodyPr vert="horz" lIns="252000" tIns="252000" rIns="252000" bIns="252000" rtlCol="0">
+            <a:noAutofit/>
+          </a:bodyPr>
+          <a:lstStyle>
+            <a:lvl1pPr marL="216000" indent="-216000" algn="l" defTabSz="914400" rtl="0" eaLnBrk="1" latinLnBrk="0" hangingPunct="1">
+              <a:lnSpc>
+                <a:spcPct val="100000"/>
+              </a:lnSpc>
+              <a:spcBef>
+                <a:spcPts val="600"/>
+              </a:spcBef>
+              <a:buClr>
+                <a:schemeClr val="bg1"/>
+              </a:buClr>
+              <a:buFont typeface="Wingdings" panose="05000000000000000000" pitchFamily="2" charset="2"/>
+              <a:buChar char="§"/>
+              <a:defRPr sz="1600" kern="1200">
+                <a:solidFill>
+                  <a:schemeClr val="bg2"/>
+                </a:solidFill>
+                <a:latin typeface="+mn-lt"/>
+                <a:ea typeface="+mn-ea"/>
+                <a:cs typeface="+mn-cs"/>
+              </a:defRPr>
+            </a:lvl1pPr>
+            <a:lvl2pPr marL="432000" indent="-216000" algn="l" defTabSz="914400" rtl="0" eaLnBrk="1" latinLnBrk="0" hangingPunct="1">
+              <a:lnSpc>
+                <a:spcPct val="100000"/>
+              </a:lnSpc>
+              <a:spcBef>
+                <a:spcPts val="600"/>
+              </a:spcBef>
+              <a:buClr>
+                <a:schemeClr val="bg1"/>
+              </a:buClr>
+              <a:buFont typeface="Wingdings" panose="05000000000000000000" pitchFamily="2" charset="2"/>
+              <a:buChar char="§"/>
+              <a:defRPr sz="1400" kern="1200">
+                <a:solidFill>
+                  <a:schemeClr val="bg2"/>
+                </a:solidFill>
+                <a:latin typeface="+mn-lt"/>
+                <a:ea typeface="+mn-ea"/>
+                <a:cs typeface="+mn-cs"/>
+              </a:defRPr>
+            </a:lvl2pPr>
+            <a:lvl3pPr marL="648000" indent="-216000" algn="l" defTabSz="914400" rtl="0" eaLnBrk="1" latinLnBrk="0" hangingPunct="1">
+              <a:lnSpc>
+                <a:spcPct val="100000"/>
+              </a:lnSpc>
+              <a:spcBef>
+                <a:spcPts val="600"/>
+              </a:spcBef>
+              <a:buClr>
+                <a:schemeClr val="tx1"/>
+              </a:buClr>
+              <a:buFont typeface="Wingdings" panose="05000000000000000000" pitchFamily="2" charset="2"/>
+              <a:buChar char="§"/>
+              <a:defRPr sz="1200" kern="1200">
+                <a:solidFill>
+                  <a:schemeClr val="tx1"/>
+                </a:solidFill>
+                <a:latin typeface="+mn-lt"/>
+                <a:ea typeface="+mn-ea"/>
+                <a:cs typeface="+mn-cs"/>
+              </a:defRPr>
+            </a:lvl3pPr>
+            <a:lvl4pPr marL="936000" indent="-228600" algn="l" defTabSz="914400" rtl="0" eaLnBrk="1" latinLnBrk="0" hangingPunct="1">
+              <a:lnSpc>
+                <a:spcPct val="100000"/>
+              </a:lnSpc>
+              <a:spcBef>
+                <a:spcPts val="600"/>
+              </a:spcBef>
+              <a:buClr>
+                <a:schemeClr val="tx1"/>
+              </a:buClr>
+              <a:buFont typeface="Wingdings" panose="05000000000000000000" pitchFamily="2" charset="2"/>
+              <a:buChar char="§"/>
+              <a:defRPr sz="1100" kern="1200">
+                <a:solidFill>
+                  <a:schemeClr val="tx1"/>
+                </a:solidFill>
+                <a:latin typeface="+mn-lt"/>
+                <a:ea typeface="+mn-ea"/>
+                <a:cs typeface="+mn-cs"/>
+              </a:defRPr>
+            </a:lvl4pPr>
+            <a:lvl5pPr marL="1152000" indent="-228600" algn="l" defTabSz="914400" rtl="0" eaLnBrk="1" latinLnBrk="0" hangingPunct="1">
+              <a:lnSpc>
+                <a:spcPct val="100000"/>
+              </a:lnSpc>
+              <a:spcBef>
+                <a:spcPts val="600"/>
+              </a:spcBef>
+              <a:buClr>
+                <a:schemeClr val="tx1"/>
+              </a:buClr>
+              <a:buFont typeface="Wingdings" panose="05000000000000000000" pitchFamily="2" charset="2"/>
+              <a:buChar char="§"/>
+              <a:defRPr sz="1100" kern="1200">
+                <a:solidFill>
+                  <a:schemeClr val="tx1"/>
+                </a:solidFill>
+                <a:latin typeface="+mn-lt"/>
+                <a:ea typeface="+mn-ea"/>
+                <a:cs typeface="+mn-cs"/>
+              </a:defRPr>
+            </a:lvl5pPr>
+            <a:lvl6pPr marL="2514600" indent="-228600" algn="l" defTabSz="914400" rtl="0" eaLnBrk="1" latinLnBrk="0" hangingPunct="1">
+              <a:lnSpc>
+                <a:spcPct val="90000"/>
+              </a:lnSpc>
+              <a:spcBef>
+                <a:spcPts val="500"/>
+              </a:spcBef>
+              <a:buFont typeface="Arial" panose="020B0604020202020204" pitchFamily="34" charset="0"/>
+              <a:buChar char="•"/>
+              <a:defRPr sz="1600" kern="1200">
+                <a:solidFill>
+                  <a:schemeClr val="tx1"/>
+                </a:solidFill>
+                <a:latin typeface="+mn-lt"/>
+                <a:ea typeface="+mn-ea"/>
+                <a:cs typeface="+mn-cs"/>
+              </a:defRPr>
+            </a:lvl6pPr>
+            <a:lvl7pPr marL="2971800" indent="-228600" algn="l" defTabSz="914400" rtl="0" eaLnBrk="1" latinLnBrk="0" hangingPunct="1">
+              <a:lnSpc>
+                <a:spcPct val="90000"/>
+              </a:lnSpc>
+              <a:spcBef>
+                <a:spcPts val="500"/>
+              </a:spcBef>
+              <a:buFont typeface="Arial" panose="020B0604020202020204" pitchFamily="34" charset="0"/>
+              <a:buChar char="•"/>
+              <a:defRPr sz="1600" kern="1200">
+                <a:solidFill>
+                  <a:schemeClr val="tx1"/>
+                </a:solidFill>
+                <a:latin typeface="+mn-lt"/>
+                <a:ea typeface="+mn-ea"/>
+                <a:cs typeface="+mn-cs"/>
+              </a:defRPr>
+            </a:lvl7pPr>
+            <a:lvl8pPr marL="3429000" indent="-228600" algn="l" defTabSz="914400" rtl="0" eaLnBrk="1" latinLnBrk="0" hangingPunct="1">
+              <a:lnSpc>
+                <a:spcPct val="90000"/>
+              </a:lnSpc>
+              <a:spcBef>
+                <a:spcPts val="500"/>
+              </a:spcBef>
+              <a:buFont typeface="Arial" panose="020B0604020202020204" pitchFamily="34" charset="0"/>
+              <a:buChar char="•"/>
+              <a:defRPr sz="1600" kern="1200">
+                <a:solidFill>
+                  <a:schemeClr val="tx1"/>
+                </a:solidFill>
+                <a:latin typeface="+mn-lt"/>
+                <a:ea typeface="+mn-ea"/>
+                <a:cs typeface="+mn-cs"/>
+              </a:defRPr>
+            </a:lvl8pPr>
+            <a:lvl9pPr marL="3886200" indent="-228600" algn="l" defTabSz="914400" rtl="0" eaLnBrk="1" latinLnBrk="0" hangingPunct="1">
+              <a:lnSpc>
+                <a:spcPct val="90000"/>
+              </a:lnSpc>
+              <a:spcBef>
+                <a:spcPts val="500"/>
+              </a:spcBef>
+              <a:buFont typeface="Arial" panose="020B0604020202020204" pitchFamily="34" charset="0"/>
+              <a:buChar char="•"/>
+              <a:defRPr sz="1600" kern="1200">
+                <a:solidFill>
+                  <a:schemeClr val="tx1"/>
+                </a:solidFill>
+                <a:latin typeface="+mn-lt"/>
+                <a:ea typeface="+mn-ea"/>
+                <a:cs typeface="+mn-cs"/>
+              </a:defRPr>
+            </a:lvl9pPr>
+          </a:lstStyle>
+          <a:p>
+            <a:r>
+              <a:rPr lang="de-DE" dirty="0"/>
+              <a:t>Mean/median </a:t>
+            </a:r>
+            <a:r>
+              <a:rPr lang="de-DE" dirty="0" err="1"/>
+              <a:t>forecasts</a:t>
+            </a:r>
+            <a:r>
+              <a:rPr lang="de-DE" dirty="0"/>
+              <a:t> </a:t>
+            </a:r>
+            <a:r>
+              <a:rPr lang="de-DE" dirty="0" err="1"/>
+              <a:t>evaluation</a:t>
+            </a:r>
+            <a:endParaRPr lang="de-DE" dirty="0"/>
+          </a:p>
+          <a:p>
+            <a:r>
+              <a:rPr lang="en-US" dirty="0"/>
+              <a:t>Ranks forecasts consistently even when proxy is measured with noise</a:t>
+            </a:r>
+          </a:p>
+          <a:p>
+            <a:r>
+              <a:rPr lang="de-DE" dirty="0" err="1"/>
+              <a:t>Penalizes</a:t>
+            </a:r>
+            <a:r>
+              <a:rPr lang="de-DE" dirty="0"/>
+              <a:t> </a:t>
+            </a:r>
+            <a:r>
+              <a:rPr lang="de-DE" dirty="0" err="1"/>
+              <a:t>under</a:t>
+            </a:r>
+            <a:r>
+              <a:rPr lang="de-DE" dirty="0"/>
+              <a:t> </a:t>
+            </a:r>
+            <a:r>
+              <a:rPr lang="de-DE" dirty="0" err="1"/>
+              <a:t>prediction</a:t>
+            </a:r>
+            <a:r>
+              <a:rPr lang="de-DE" dirty="0"/>
+              <a:t> </a:t>
+            </a:r>
+            <a:r>
+              <a:rPr lang="de-DE" dirty="0" err="1"/>
+              <a:t>more</a:t>
+            </a:r>
+            <a:r>
+              <a:rPr lang="de-DE" dirty="0"/>
+              <a:t> - relevant </a:t>
+            </a:r>
+            <a:r>
+              <a:rPr lang="de-DE" dirty="0" err="1"/>
+              <a:t>for</a:t>
+            </a:r>
+            <a:r>
+              <a:rPr lang="de-DE" dirty="0"/>
+              <a:t> </a:t>
+            </a:r>
+            <a:r>
+              <a:rPr lang="de-DE" dirty="0" err="1"/>
+              <a:t>tail</a:t>
+            </a:r>
+            <a:r>
+              <a:rPr lang="de-DE" dirty="0"/>
+              <a:t> </a:t>
+            </a:r>
+            <a:r>
+              <a:rPr lang="de-DE" dirty="0" err="1"/>
+              <a:t>risk</a:t>
+            </a:r>
+            <a:endParaRPr lang="de-DE" dirty="0"/>
+          </a:p>
+        </p:txBody>
+      </p:sp>
+      <p:pic>
+        <p:nvPicPr>
+          <p:cNvPr id="6" name="Grafik 5">
+            <a:extLst>
+              <a:ext uri="{FF2B5EF4-FFF2-40B4-BE49-F238E27FC236}">
+                <a16:creationId xmlns:a16="http://schemas.microsoft.com/office/drawing/2014/main" id="{1B17AC48-25B1-980E-0F3F-9F8E21B87189}"/>
+              </a:ext>
+            </a:extLst>
+          </p:cNvPr>
+          <p:cNvPicPr>
+            <a:picLocks noChangeAspect="1"/>
+          </p:cNvPicPr>
+          <p:nvPr/>
+        </p:nvPicPr>
+        <p:blipFill>
+          <a:blip r:embed="rId4">
+            <a:extLst>
+              <a:ext uri="{28A0092B-C50C-407E-A947-70E740481C1C}">
+                <a14:useLocalDpi xmlns:a14="http://schemas.microsoft.com/office/drawing/2010/main" val="0"/>
+              </a:ext>
+            </a:extLst>
+          </a:blip>
+          <a:stretch>
+            <a:fillRect/>
+          </a:stretch>
+        </p:blipFill>
+        <p:spPr>
+          <a:xfrm>
+            <a:off x="9427912" y="1635156"/>
+            <a:ext cx="2402138" cy="590470"/>
+          </a:xfrm>
+          <a:prstGeom prst="rect">
+            <a:avLst/>
+          </a:prstGeom>
+        </p:spPr>
+      </p:pic>
     </p:spTree>
     <p:extLst>
       <p:ext uri="{BB962C8B-B14F-4D97-AF65-F5344CB8AC3E}">
-        <p14:creationId xmlns:p14="http://schemas.microsoft.com/office/powerpoint/2010/main" val="760756617"/>
+        <p14:creationId xmlns:p14="http://schemas.microsoft.com/office/powerpoint/2010/main" val="3932135640"/>
       </p:ext>
     </p:extLst>
   </p:cSld>
@@ -54730,7 +56282,7 @@
 </p:sld>
 </file>
 
-<file path=ppt/slides/slide7.xml><?xml version="1.0" encoding="utf-8"?>
+<file path=ppt/slides/slide9.xml><?xml version="1.0" encoding="utf-8"?>
 <p:sld xmlns:a="http://schemas.openxmlformats.org/drawingml/2006/main" xmlns:r="http://schemas.openxmlformats.org/officeDocument/2006/relationships" xmlns:p="http://schemas.openxmlformats.org/presentationml/2006/main">
   <p:cSld>
     <p:spTree>
@@ -55397,7 +56949,7 @@
             <a:fld id="{A23FFA10-0470-4638-936A-23EC73946E25}" type="slidenum">
               <a:rPr lang="de-DE" smtClean="0"/>
               <a:pPr/>
-              <a:t>7</a:t>
+              <a:t>9</a:t>
             </a:fld>
             <a:endParaRPr lang="de-DE" dirty="0"/>
           </a:p>
@@ -55421,924 +56973,6 @@
       <p:transition/>
     </mc:Fallback>
   </mc:AlternateContent>
-</p:sld>
-</file>
-
-<file path=ppt/slides/slide8.xml><?xml version="1.0" encoding="utf-8"?>
-<p:sld xmlns:a="http://schemas.openxmlformats.org/drawingml/2006/main" xmlns:r="http://schemas.openxmlformats.org/officeDocument/2006/relationships" xmlns:p="http://schemas.openxmlformats.org/presentationml/2006/main">
-  <p:cSld>
-    <p:spTree>
-      <p:nvGrpSpPr>
-        <p:cNvPr id="1" name="">
-          <a:extLst>
-            <a:ext uri="{FF2B5EF4-FFF2-40B4-BE49-F238E27FC236}">
-              <a16:creationId xmlns:a16="http://schemas.microsoft.com/office/drawing/2014/main" id="{6B1F981E-27BD-A00A-EAB6-936E76755FAE}"/>
-            </a:ext>
-          </a:extLst>
-        </p:cNvPr>
-        <p:cNvGrpSpPr/>
-        <p:nvPr/>
-      </p:nvGrpSpPr>
-      <p:grpSpPr>
-        <a:xfrm>
-          <a:off x="0" y="0"/>
-          <a:ext cx="0" cy="0"/>
-          <a:chOff x="0" y="0"/>
-          <a:chExt cx="0" cy="0"/>
-        </a:xfrm>
-      </p:grpSpPr>
-      <p:sp>
-        <p:nvSpPr>
-          <p:cNvPr id="49" name="Textplatzhalter 48">
-            <a:extLst>
-              <a:ext uri="{FF2B5EF4-FFF2-40B4-BE49-F238E27FC236}">
-                <a16:creationId xmlns:a16="http://schemas.microsoft.com/office/drawing/2014/main" id="{0B494251-F258-1386-923E-989C0AA988E4}"/>
-              </a:ext>
-            </a:extLst>
-          </p:cNvPr>
-          <p:cNvSpPr>
-            <a:spLocks noGrp="1"/>
-          </p:cNvSpPr>
-          <p:nvPr>
-            <p:ph type="body" sz="quarter" idx="13"/>
-          </p:nvPr>
-        </p:nvSpPr>
-        <p:spPr>
-          <a:solidFill>
-            <a:srgbClr val="004976"/>
-          </a:solidFill>
-        </p:spPr>
-        <p:txBody>
-          <a:bodyPr/>
-          <a:lstStyle/>
-          <a:p>
-            <a:endParaRPr lang="de-DE"/>
-          </a:p>
-        </p:txBody>
-      </p:sp>
-      <p:sp>
-        <p:nvSpPr>
-          <p:cNvPr id="2" name="Titel 1">
-            <a:extLst>
-              <a:ext uri="{FF2B5EF4-FFF2-40B4-BE49-F238E27FC236}">
-                <a16:creationId xmlns:a16="http://schemas.microsoft.com/office/drawing/2014/main" id="{7FAD0DC1-BB7C-B434-B8AA-EB639ACBDCCF}"/>
-              </a:ext>
-            </a:extLst>
-          </p:cNvPr>
-          <p:cNvSpPr>
-            <a:spLocks noGrp="1"/>
-          </p:cNvSpPr>
-          <p:nvPr>
-            <p:ph type="title"/>
-          </p:nvPr>
-        </p:nvSpPr>
-        <p:spPr/>
-        <p:txBody>
-          <a:bodyPr/>
-          <a:lstStyle/>
-          <a:p>
-            <a:r>
-              <a:rPr lang="de-DE" dirty="0" err="1"/>
-              <a:t>Annualized</a:t>
-            </a:r>
-            <a:r>
-              <a:rPr lang="de-DE" dirty="0"/>
-              <a:t> </a:t>
-            </a:r>
-            <a:r>
-              <a:rPr lang="de-DE" dirty="0" err="1"/>
-              <a:t>Volatility</a:t>
-            </a:r>
-            <a:r>
-              <a:rPr lang="de-DE" dirty="0"/>
-              <a:t> Time Series</a:t>
-            </a:r>
-          </a:p>
-        </p:txBody>
-      </p:sp>
-      <p:sp>
-        <p:nvSpPr>
-          <p:cNvPr id="14" name="Textplatzhalter 13">
-            <a:extLst>
-              <a:ext uri="{FF2B5EF4-FFF2-40B4-BE49-F238E27FC236}">
-                <a16:creationId xmlns:a16="http://schemas.microsoft.com/office/drawing/2014/main" id="{057C9D83-69FF-5CB3-3B16-DF6FA9AE0B77}"/>
-              </a:ext>
-            </a:extLst>
-          </p:cNvPr>
-          <p:cNvSpPr>
-            <a:spLocks noGrp="1"/>
-          </p:cNvSpPr>
-          <p:nvPr>
-            <p:ph type="body" sz="quarter" idx="39"/>
-          </p:nvPr>
-        </p:nvSpPr>
-        <p:spPr/>
-        <p:txBody>
-          <a:bodyPr/>
-          <a:lstStyle/>
-          <a:p>
-            <a:r>
-              <a:rPr lang="de-DE" dirty="0"/>
-              <a:t>Yang-Zhang </a:t>
-            </a:r>
-            <a:r>
-              <a:rPr lang="de-DE" dirty="0" err="1"/>
-              <a:t>ann</a:t>
-            </a:r>
-            <a:r>
-              <a:rPr lang="de-DE" dirty="0"/>
-              <a:t>. Vol. </a:t>
-            </a:r>
-          </a:p>
-        </p:txBody>
-      </p:sp>
-      <p:sp>
-        <p:nvSpPr>
-          <p:cNvPr id="6" name="Foliennummernplatzhalter 5">
-            <a:extLst>
-              <a:ext uri="{FF2B5EF4-FFF2-40B4-BE49-F238E27FC236}">
-                <a16:creationId xmlns:a16="http://schemas.microsoft.com/office/drawing/2014/main" id="{91BD892F-1A60-3E77-B934-4721C0D84ACA}"/>
-              </a:ext>
-            </a:extLst>
-          </p:cNvPr>
-          <p:cNvSpPr>
-            <a:spLocks noGrp="1"/>
-          </p:cNvSpPr>
-          <p:nvPr>
-            <p:ph type="sldNum" sz="quarter" idx="38"/>
-          </p:nvPr>
-        </p:nvSpPr>
-        <p:spPr/>
-        <p:txBody>
-          <a:bodyPr/>
-          <a:lstStyle/>
-          <a:p>
-            <a:fld id="{A23FFA10-0470-4638-936A-23EC73946E25}" type="slidenum">
-              <a:rPr lang="de-DE" smtClean="0"/>
-              <a:pPr/>
-              <a:t>8</a:t>
-            </a:fld>
-            <a:endParaRPr lang="de-DE" dirty="0"/>
-          </a:p>
-        </p:txBody>
-      </p:sp>
-      <p:pic>
-        <p:nvPicPr>
-          <p:cNvPr id="11" name="Grafik 10">
-            <a:extLst>
-              <a:ext uri="{FF2B5EF4-FFF2-40B4-BE49-F238E27FC236}">
-                <a16:creationId xmlns:a16="http://schemas.microsoft.com/office/drawing/2014/main" id="{12D62738-9964-7933-6A7D-84F116FA7242}"/>
-              </a:ext>
-            </a:extLst>
-          </p:cNvPr>
-          <p:cNvPicPr>
-            <a:picLocks noChangeAspect="1"/>
-          </p:cNvPicPr>
-          <p:nvPr/>
-        </p:nvPicPr>
-        <p:blipFill>
-          <a:blip r:embed="rId3">
-            <a:extLst>
-              <a:ext uri="{28A0092B-C50C-407E-A947-70E740481C1C}">
-                <a14:useLocalDpi xmlns:a14="http://schemas.microsoft.com/office/drawing/2010/main" val="0"/>
-              </a:ext>
-            </a:extLst>
-          </a:blip>
-          <a:stretch>
-            <a:fillRect/>
-          </a:stretch>
-        </p:blipFill>
-        <p:spPr>
-          <a:xfrm>
-            <a:off x="1683774" y="1185138"/>
-            <a:ext cx="8824452" cy="5672862"/>
-          </a:xfrm>
-          <a:prstGeom prst="rect">
-            <a:avLst/>
-          </a:prstGeom>
-        </p:spPr>
-      </p:pic>
-      <p:sp>
-        <p:nvSpPr>
-          <p:cNvPr id="15" name="Ellipse 14">
-            <a:extLst>
-              <a:ext uri="{FF2B5EF4-FFF2-40B4-BE49-F238E27FC236}">
-                <a16:creationId xmlns:a16="http://schemas.microsoft.com/office/drawing/2014/main" id="{BE812212-A768-9C62-C502-9A8194456E97}"/>
-              </a:ext>
-            </a:extLst>
-          </p:cNvPr>
-          <p:cNvSpPr/>
-          <p:nvPr/>
-        </p:nvSpPr>
-        <p:spPr>
-          <a:xfrm rot="16200000">
-            <a:off x="8598310" y="2040569"/>
-            <a:ext cx="2261419" cy="973394"/>
-          </a:xfrm>
-          <a:prstGeom prst="ellipse">
-            <a:avLst/>
-          </a:prstGeom>
-          <a:noFill/>
-          <a:ln w="28575">
-            <a:solidFill>
-              <a:srgbClr val="C00000"/>
-            </a:solidFill>
-          </a:ln>
-        </p:spPr>
-        <p:style>
-          <a:lnRef idx="2">
-            <a:schemeClr val="accent1">
-              <a:shade val="50000"/>
-            </a:schemeClr>
-          </a:lnRef>
-          <a:fillRef idx="1">
-            <a:schemeClr val="accent1"/>
-          </a:fillRef>
-          <a:effectRef idx="0">
-            <a:schemeClr val="accent1"/>
-          </a:effectRef>
-          <a:fontRef idx="minor">
-            <a:schemeClr val="lt1"/>
-          </a:fontRef>
-        </p:style>
-        <p:txBody>
-          <a:bodyPr rtlCol="0" anchor="ctr"/>
-          <a:lstStyle/>
-          <a:p>
-            <a:pPr algn="ctr"/>
-            <a:endParaRPr lang="de-DE" dirty="0" err="1"/>
-          </a:p>
-        </p:txBody>
-      </p:sp>
-      <p:sp>
-        <p:nvSpPr>
-          <p:cNvPr id="16" name="Ellipse 15">
-            <a:extLst>
-              <a:ext uri="{FF2B5EF4-FFF2-40B4-BE49-F238E27FC236}">
-                <a16:creationId xmlns:a16="http://schemas.microsoft.com/office/drawing/2014/main" id="{7292FACE-40D4-9FC2-0692-CC4EFE87B016}"/>
-              </a:ext>
-            </a:extLst>
-          </p:cNvPr>
-          <p:cNvSpPr/>
-          <p:nvPr/>
-        </p:nvSpPr>
-        <p:spPr>
-          <a:xfrm>
-            <a:off x="2462981" y="2942303"/>
-            <a:ext cx="2261419" cy="973394"/>
-          </a:xfrm>
-          <a:prstGeom prst="ellipse">
-            <a:avLst/>
-          </a:prstGeom>
-          <a:noFill/>
-          <a:ln w="28575">
-            <a:solidFill>
-              <a:srgbClr val="C00000"/>
-            </a:solidFill>
-          </a:ln>
-        </p:spPr>
-        <p:style>
-          <a:lnRef idx="2">
-            <a:schemeClr val="accent1">
-              <a:shade val="50000"/>
-            </a:schemeClr>
-          </a:lnRef>
-          <a:fillRef idx="1">
-            <a:schemeClr val="accent1"/>
-          </a:fillRef>
-          <a:effectRef idx="0">
-            <a:schemeClr val="accent1"/>
-          </a:effectRef>
-          <a:fontRef idx="minor">
-            <a:schemeClr val="lt1"/>
-          </a:fontRef>
-        </p:style>
-        <p:txBody>
-          <a:bodyPr rtlCol="0" anchor="ctr"/>
-          <a:lstStyle/>
-          <a:p>
-            <a:pPr algn="ctr"/>
-            <a:endParaRPr lang="de-DE" dirty="0" err="1"/>
-          </a:p>
-        </p:txBody>
-      </p:sp>
-      <p:sp>
-        <p:nvSpPr>
-          <p:cNvPr id="3" name="Textfeld 2">
-            <a:extLst>
-              <a:ext uri="{FF2B5EF4-FFF2-40B4-BE49-F238E27FC236}">
-                <a16:creationId xmlns:a16="http://schemas.microsoft.com/office/drawing/2014/main" id="{72D1DD46-DC83-FD83-0380-6A5DE54E4087}"/>
-              </a:ext>
-            </a:extLst>
-          </p:cNvPr>
-          <p:cNvSpPr txBox="1"/>
-          <p:nvPr/>
-        </p:nvSpPr>
-        <p:spPr>
-          <a:xfrm>
-            <a:off x="117987" y="5026531"/>
-            <a:ext cx="2163097" cy="646331"/>
-          </a:xfrm>
-          <a:prstGeom prst="rect">
-            <a:avLst/>
-          </a:prstGeom>
-          <a:noFill/>
-        </p:spPr>
-        <p:txBody>
-          <a:bodyPr wrap="square" rtlCol="0">
-            <a:spAutoFit/>
-          </a:bodyPr>
-          <a:lstStyle/>
-          <a:p>
-            <a:pPr algn="l">
-              <a:spcBef>
-                <a:spcPts val="600"/>
-              </a:spcBef>
-              <a:buClr>
-                <a:schemeClr val="tx1"/>
-              </a:buClr>
-            </a:pPr>
-            <a:r>
-              <a:rPr lang="de-DE" dirty="0"/>
-              <a:t>22-day </a:t>
-            </a:r>
-            <a:r>
-              <a:rPr lang="de-DE" dirty="0" err="1"/>
-              <a:t>rolling</a:t>
-            </a:r>
-            <a:r>
-              <a:rPr lang="de-DE" dirty="0"/>
-              <a:t> </a:t>
-            </a:r>
-            <a:r>
-              <a:rPr lang="de-DE" dirty="0" err="1"/>
-              <a:t>window</a:t>
-            </a:r>
-            <a:endParaRPr lang="de-DE" dirty="0"/>
-          </a:p>
-        </p:txBody>
-      </p:sp>
-    </p:spTree>
-    <p:extLst>
-      <p:ext uri="{BB962C8B-B14F-4D97-AF65-F5344CB8AC3E}">
-        <p14:creationId xmlns:p14="http://schemas.microsoft.com/office/powerpoint/2010/main" val="3982126042"/>
-      </p:ext>
-    </p:extLst>
-  </p:cSld>
-  <p:clrMapOvr>
-    <a:masterClrMapping/>
-  </p:clrMapOvr>
-  <p:timing>
-    <p:tnLst>
-      <p:par>
-        <p:cTn id="1" dur="indefinite" restart="never" nodeType="tmRoot">
-          <p:childTnLst>
-            <p:seq concurrent="1" nextAc="seek">
-              <p:cTn id="2" dur="indefinite" nodeType="mainSeq">
-                <p:childTnLst>
-                  <p:par>
-                    <p:cTn id="3" fill="hold">
-                      <p:stCondLst>
-                        <p:cond delay="indefinite"/>
-                      </p:stCondLst>
-                      <p:childTnLst>
-                        <p:par>
-                          <p:cTn id="4" fill="hold">
-                            <p:stCondLst>
-                              <p:cond delay="0"/>
-                            </p:stCondLst>
-                            <p:childTnLst>
-                              <p:par>
-                                <p:cTn id="5" presetID="10" presetClass="entr" presetSubtype="0" fill="hold" grpId="0" nodeType="clickEffect">
-                                  <p:stCondLst>
-                                    <p:cond delay="0"/>
-                                  </p:stCondLst>
-                                  <p:childTnLst>
-                                    <p:set>
-                                      <p:cBhvr>
-                                        <p:cTn id="6" dur="1" fill="hold">
-                                          <p:stCondLst>
-                                            <p:cond delay="0"/>
-                                          </p:stCondLst>
-                                        </p:cTn>
-                                        <p:tgtEl>
-                                          <p:spTgt spid="16"/>
-                                        </p:tgtEl>
-                                        <p:attrNameLst>
-                                          <p:attrName>style.visibility</p:attrName>
-                                        </p:attrNameLst>
-                                      </p:cBhvr>
-                                      <p:to>
-                                        <p:strVal val="visible"/>
-                                      </p:to>
-                                    </p:set>
-                                    <p:animEffect transition="in" filter="fade">
-                                      <p:cBhvr>
-                                        <p:cTn id="7" dur="500"/>
-                                        <p:tgtEl>
-                                          <p:spTgt spid="16"/>
-                                        </p:tgtEl>
-                                      </p:cBhvr>
-                                    </p:animEffect>
-                                  </p:childTnLst>
-                                </p:cTn>
-                              </p:par>
-                            </p:childTnLst>
-                          </p:cTn>
-                        </p:par>
-                        <p:par>
-                          <p:cTn id="8" fill="hold">
-                            <p:stCondLst>
-                              <p:cond delay="500"/>
-                            </p:stCondLst>
-                            <p:childTnLst>
-                              <p:par>
-                                <p:cTn id="9" presetID="10" presetClass="entr" presetSubtype="0" fill="hold" grpId="0" nodeType="afterEffect">
-                                  <p:stCondLst>
-                                    <p:cond delay="0"/>
-                                  </p:stCondLst>
-                                  <p:childTnLst>
-                                    <p:set>
-                                      <p:cBhvr>
-                                        <p:cTn id="10" dur="1" fill="hold">
-                                          <p:stCondLst>
-                                            <p:cond delay="0"/>
-                                          </p:stCondLst>
-                                        </p:cTn>
-                                        <p:tgtEl>
-                                          <p:spTgt spid="15"/>
-                                        </p:tgtEl>
-                                        <p:attrNameLst>
-                                          <p:attrName>style.visibility</p:attrName>
-                                        </p:attrNameLst>
-                                      </p:cBhvr>
-                                      <p:to>
-                                        <p:strVal val="visible"/>
-                                      </p:to>
-                                    </p:set>
-                                    <p:animEffect transition="in" filter="fade">
-                                      <p:cBhvr>
-                                        <p:cTn id="11" dur="500"/>
-                                        <p:tgtEl>
-                                          <p:spTgt spid="15"/>
-                                        </p:tgtEl>
-                                      </p:cBhvr>
-                                    </p:animEffect>
-                                  </p:childTnLst>
-                                </p:cTn>
-                              </p:par>
-                            </p:childTnLst>
-                          </p:cTn>
-                        </p:par>
-                      </p:childTnLst>
-                    </p:cTn>
-                  </p:par>
-                </p:childTnLst>
-              </p:cTn>
-              <p:prevCondLst>
-                <p:cond evt="onPrev" delay="0">
-                  <p:tgtEl>
-                    <p:sldTgt/>
-                  </p:tgtEl>
-                </p:cond>
-              </p:prevCondLst>
-              <p:nextCondLst>
-                <p:cond evt="onNext" delay="0">
-                  <p:tgtEl>
-                    <p:sldTgt/>
-                  </p:tgtEl>
-                </p:cond>
-              </p:nextCondLst>
-            </p:seq>
-          </p:childTnLst>
-        </p:cTn>
-      </p:par>
-    </p:tnLst>
-    <p:bldLst>
-      <p:bldP spid="15" grpId="0" animBg="1"/>
-      <p:bldP spid="16" grpId="0" animBg="1"/>
-    </p:bldLst>
-  </p:timing>
-</p:sld>
-</file>
-
-<file path=ppt/slides/slide9.xml><?xml version="1.0" encoding="utf-8"?>
-<p:sld xmlns:a="http://schemas.openxmlformats.org/drawingml/2006/main" xmlns:r="http://schemas.openxmlformats.org/officeDocument/2006/relationships" xmlns:p="http://schemas.openxmlformats.org/presentationml/2006/main">
-  <p:cSld>
-    <p:spTree>
-      <p:nvGrpSpPr>
-        <p:cNvPr id="1" name="">
-          <a:extLst>
-            <a:ext uri="{FF2B5EF4-FFF2-40B4-BE49-F238E27FC236}">
-              <a16:creationId xmlns:a16="http://schemas.microsoft.com/office/drawing/2014/main" id="{6B8873A7-3310-A2E0-AF72-A004ED42D7ED}"/>
-            </a:ext>
-          </a:extLst>
-        </p:cNvPr>
-        <p:cNvGrpSpPr/>
-        <p:nvPr/>
-      </p:nvGrpSpPr>
-      <p:grpSpPr>
-        <a:xfrm>
-          <a:off x="0" y="0"/>
-          <a:ext cx="0" cy="0"/>
-          <a:chOff x="0" y="0"/>
-          <a:chExt cx="0" cy="0"/>
-        </a:xfrm>
-      </p:grpSpPr>
-      <p:sp>
-        <p:nvSpPr>
-          <p:cNvPr id="49" name="Textplatzhalter 48">
-            <a:extLst>
-              <a:ext uri="{FF2B5EF4-FFF2-40B4-BE49-F238E27FC236}">
-                <a16:creationId xmlns:a16="http://schemas.microsoft.com/office/drawing/2014/main" id="{2ED5486E-540E-BE05-D665-5C1EDEF423A9}"/>
-              </a:ext>
-            </a:extLst>
-          </p:cNvPr>
-          <p:cNvSpPr>
-            <a:spLocks noGrp="1"/>
-          </p:cNvSpPr>
-          <p:nvPr>
-            <p:ph type="body" sz="quarter" idx="13"/>
-          </p:nvPr>
-        </p:nvSpPr>
-        <p:spPr>
-          <a:solidFill>
-            <a:srgbClr val="004976"/>
-          </a:solidFill>
-        </p:spPr>
-        <p:txBody>
-          <a:bodyPr/>
-          <a:lstStyle/>
-          <a:p>
-            <a:endParaRPr lang="de-DE" dirty="0"/>
-          </a:p>
-        </p:txBody>
-      </p:sp>
-      <p:sp>
-        <p:nvSpPr>
-          <p:cNvPr id="2" name="Titel 1">
-            <a:extLst>
-              <a:ext uri="{FF2B5EF4-FFF2-40B4-BE49-F238E27FC236}">
-                <a16:creationId xmlns:a16="http://schemas.microsoft.com/office/drawing/2014/main" id="{C30EC800-F596-8BA8-5116-7814BEA17C99}"/>
-              </a:ext>
-            </a:extLst>
-          </p:cNvPr>
-          <p:cNvSpPr>
-            <a:spLocks noGrp="1"/>
-          </p:cNvSpPr>
-          <p:nvPr>
-            <p:ph type="title"/>
-          </p:nvPr>
-        </p:nvSpPr>
-        <p:spPr/>
-        <p:txBody>
-          <a:bodyPr/>
-          <a:lstStyle/>
-          <a:p>
-            <a:r>
-              <a:rPr lang="de-DE" dirty="0"/>
-              <a:t>Proxy Validation</a:t>
-            </a:r>
-          </a:p>
-        </p:txBody>
-      </p:sp>
-      <p:sp>
-        <p:nvSpPr>
-          <p:cNvPr id="14" name="Textplatzhalter 13">
-            <a:extLst>
-              <a:ext uri="{FF2B5EF4-FFF2-40B4-BE49-F238E27FC236}">
-                <a16:creationId xmlns:a16="http://schemas.microsoft.com/office/drawing/2014/main" id="{7D6F1968-58BC-2704-F9D6-C76FB6BDD2C4}"/>
-              </a:ext>
-            </a:extLst>
-          </p:cNvPr>
-          <p:cNvSpPr>
-            <a:spLocks noGrp="1"/>
-          </p:cNvSpPr>
-          <p:nvPr>
-            <p:ph type="body" sz="quarter" idx="39"/>
-          </p:nvPr>
-        </p:nvSpPr>
-        <p:spPr/>
-        <p:txBody>
-          <a:bodyPr/>
-          <a:lstStyle/>
-          <a:p>
-            <a:r>
-              <a:rPr lang="de-DE" dirty="0" err="1"/>
-              <a:t>Mincer-Zarnowitz</a:t>
-            </a:r>
-            <a:r>
-              <a:rPr lang="de-DE" dirty="0"/>
-              <a:t> Regression</a:t>
-            </a:r>
-          </a:p>
-        </p:txBody>
-      </p:sp>
-      <p:sp>
-        <p:nvSpPr>
-          <p:cNvPr id="6" name="Foliennummernplatzhalter 5">
-            <a:extLst>
-              <a:ext uri="{FF2B5EF4-FFF2-40B4-BE49-F238E27FC236}">
-                <a16:creationId xmlns:a16="http://schemas.microsoft.com/office/drawing/2014/main" id="{0A363448-1864-4847-ABA4-738271F78F8B}"/>
-              </a:ext>
-            </a:extLst>
-          </p:cNvPr>
-          <p:cNvSpPr>
-            <a:spLocks noGrp="1"/>
-          </p:cNvSpPr>
-          <p:nvPr>
-            <p:ph type="sldNum" sz="quarter" idx="38"/>
-          </p:nvPr>
-        </p:nvSpPr>
-        <p:spPr/>
-        <p:txBody>
-          <a:bodyPr/>
-          <a:lstStyle/>
-          <a:p>
-            <a:fld id="{A23FFA10-0470-4638-936A-23EC73946E25}" type="slidenum">
-              <a:rPr lang="de-DE" smtClean="0"/>
-              <a:pPr/>
-              <a:t>9</a:t>
-            </a:fld>
-            <a:endParaRPr lang="de-DE" dirty="0"/>
-          </a:p>
-        </p:txBody>
-      </p:sp>
-      <p:sp>
-        <p:nvSpPr>
-          <p:cNvPr id="3" name="Inhaltsplatzhalter 34">
-            <a:extLst>
-              <a:ext uri="{FF2B5EF4-FFF2-40B4-BE49-F238E27FC236}">
-                <a16:creationId xmlns:a16="http://schemas.microsoft.com/office/drawing/2014/main" id="{0A1D8F78-579A-1381-EC51-CDDED842BB49}"/>
-              </a:ext>
-            </a:extLst>
-          </p:cNvPr>
-          <p:cNvSpPr>
-            <a:spLocks noGrp="1"/>
-          </p:cNvSpPr>
-          <p:nvPr>
-            <p:ph idx="1"/>
-          </p:nvPr>
-        </p:nvSpPr>
-        <p:spPr>
-          <a:xfrm>
-            <a:off x="361950" y="1376363"/>
-            <a:ext cx="11468100" cy="4776773"/>
-          </a:xfrm>
-        </p:spPr>
-        <p:txBody>
-          <a:bodyPr/>
-          <a:lstStyle/>
-          <a:p>
-            <a:r>
-              <a:rPr lang="en-US" dirty="0"/>
-              <a:t>To validate Yang-Zhang as a proxy for true (unobservable) volatility, we regress realized volatility on Yang-Zhang:</a:t>
-            </a:r>
-          </a:p>
-          <a:p>
-            <a:pPr marL="0" indent="0">
-              <a:buNone/>
-            </a:pPr>
-            <a:endParaRPr lang="en-US" dirty="0"/>
-          </a:p>
-          <a:p>
-            <a:pPr marL="0" indent="0">
-              <a:buNone/>
-            </a:pPr>
-            <a:endParaRPr lang="en-US" dirty="0"/>
-          </a:p>
-          <a:p>
-            <a:r>
-              <a:rPr lang="de-DE" dirty="0"/>
-              <a:t>Null </a:t>
-            </a:r>
-            <a:r>
-              <a:rPr lang="de-DE" dirty="0" err="1"/>
-              <a:t>hypothesis</a:t>
-            </a:r>
-            <a:r>
-              <a:rPr lang="de-DE" dirty="0"/>
-              <a:t>:</a:t>
-            </a:r>
-          </a:p>
-          <a:p>
-            <a:pPr marL="0" indent="0">
-              <a:buNone/>
-            </a:pPr>
-            <a:endParaRPr lang="de-DE" b="1" u="sng" dirty="0"/>
-          </a:p>
-          <a:p>
-            <a:pPr marL="0" indent="0">
-              <a:buNone/>
-            </a:pPr>
-            <a:r>
-              <a:rPr lang="de-DE" b="1" u="sng" dirty="0"/>
-              <a:t>Interpretation: </a:t>
-            </a:r>
-          </a:p>
-          <a:p>
-            <a:r>
-              <a:rPr lang="de-DE" dirty="0"/>
-              <a:t>R^2 </a:t>
-            </a:r>
-            <a:r>
-              <a:rPr lang="de-DE" dirty="0" err="1"/>
-              <a:t>measures</a:t>
-            </a:r>
-            <a:r>
-              <a:rPr lang="de-DE" dirty="0"/>
-              <a:t> </a:t>
-            </a:r>
-            <a:r>
-              <a:rPr lang="de-DE" dirty="0" err="1"/>
-              <a:t>how</a:t>
-            </a:r>
-            <a:r>
-              <a:rPr lang="de-DE" dirty="0"/>
-              <a:t> </a:t>
-            </a:r>
-            <a:r>
-              <a:rPr lang="de-DE" dirty="0" err="1"/>
-              <a:t>much</a:t>
-            </a:r>
-            <a:r>
-              <a:rPr lang="de-DE" dirty="0"/>
-              <a:t> Variation in RV </a:t>
-            </a:r>
-            <a:r>
-              <a:rPr lang="de-DE" dirty="0" err="1"/>
-              <a:t>is</a:t>
-            </a:r>
-            <a:r>
-              <a:rPr lang="de-DE" dirty="0"/>
-              <a:t> </a:t>
-            </a:r>
-            <a:r>
-              <a:rPr lang="de-DE" dirty="0" err="1"/>
-              <a:t>explained</a:t>
-            </a:r>
-            <a:r>
-              <a:rPr lang="de-DE" dirty="0"/>
-              <a:t> </a:t>
-            </a:r>
-            <a:r>
-              <a:rPr lang="de-DE" dirty="0" err="1"/>
-              <a:t>by</a:t>
-            </a:r>
-            <a:r>
-              <a:rPr lang="de-DE" dirty="0"/>
-              <a:t> YZ</a:t>
-            </a:r>
-          </a:p>
-          <a:p>
-            <a:r>
-              <a:rPr lang="de-DE" dirty="0" err="1"/>
-              <a:t>Our</a:t>
-            </a:r>
-            <a:r>
-              <a:rPr lang="de-DE" dirty="0"/>
-              <a:t> </a:t>
-            </a:r>
-            <a:r>
-              <a:rPr lang="de-DE" dirty="0" err="1"/>
-              <a:t>result</a:t>
-            </a:r>
-            <a:r>
-              <a:rPr lang="de-DE" dirty="0"/>
-              <a:t>: </a:t>
-            </a:r>
-          </a:p>
-          <a:p>
-            <a:pPr lvl="1"/>
-            <a:r>
-              <a:rPr lang="de-DE" dirty="0"/>
-              <a:t>R^2 = 0.46 at </a:t>
-            </a:r>
-            <a:r>
-              <a:rPr lang="de-DE" dirty="0" err="1"/>
-              <a:t>the</a:t>
-            </a:r>
-            <a:r>
-              <a:rPr lang="de-DE" dirty="0"/>
-              <a:t> </a:t>
-            </a:r>
-            <a:r>
-              <a:rPr lang="de-DE" dirty="0" err="1"/>
-              <a:t>daily</a:t>
-            </a:r>
-            <a:r>
-              <a:rPr lang="de-DE" dirty="0"/>
-              <a:t> </a:t>
-            </a:r>
-            <a:r>
-              <a:rPr lang="de-DE" dirty="0" err="1"/>
-              <a:t>level</a:t>
-            </a:r>
-            <a:r>
-              <a:rPr lang="de-DE" dirty="0"/>
-              <a:t>. R^2 = 0.85 at 22-day </a:t>
-            </a:r>
-            <a:r>
-              <a:rPr lang="de-DE" dirty="0" err="1"/>
-              <a:t>rolling</a:t>
-            </a:r>
-            <a:r>
-              <a:rPr lang="de-DE" dirty="0"/>
-              <a:t> </a:t>
-            </a:r>
-            <a:r>
-              <a:rPr lang="de-DE" dirty="0" err="1"/>
-              <a:t>window</a:t>
-            </a:r>
-            <a:r>
-              <a:rPr lang="de-DE" dirty="0"/>
-              <a:t>.</a:t>
-            </a:r>
-          </a:p>
-        </p:txBody>
-      </p:sp>
-      <p:pic>
-        <p:nvPicPr>
-          <p:cNvPr id="5" name="Grafik 4">
-            <a:extLst>
-              <a:ext uri="{FF2B5EF4-FFF2-40B4-BE49-F238E27FC236}">
-                <a16:creationId xmlns:a16="http://schemas.microsoft.com/office/drawing/2014/main" id="{D327DBD2-B57D-D021-C2E3-E655DBE1FE7E}"/>
-              </a:ext>
-            </a:extLst>
-          </p:cNvPr>
-          <p:cNvPicPr>
-            <a:picLocks noChangeAspect="1"/>
-          </p:cNvPicPr>
-          <p:nvPr/>
-        </p:nvPicPr>
-        <p:blipFill>
-          <a:blip r:embed="rId3">
-            <a:extLst>
-              <a:ext uri="{28A0092B-C50C-407E-A947-70E740481C1C}">
-                <a14:useLocalDpi xmlns:a14="http://schemas.microsoft.com/office/drawing/2010/main" val="0"/>
-              </a:ext>
-            </a:extLst>
-          </a:blip>
-          <a:stretch>
-            <a:fillRect/>
-          </a:stretch>
-        </p:blipFill>
-        <p:spPr>
-          <a:xfrm>
-            <a:off x="4014769" y="2244101"/>
-            <a:ext cx="3670717" cy="620589"/>
-          </a:xfrm>
-          <a:prstGeom prst="rect">
-            <a:avLst/>
-          </a:prstGeom>
-        </p:spPr>
-      </p:pic>
-      <p:pic>
-        <p:nvPicPr>
-          <p:cNvPr id="8" name="Grafik 7">
-            <a:extLst>
-              <a:ext uri="{FF2B5EF4-FFF2-40B4-BE49-F238E27FC236}">
-                <a16:creationId xmlns:a16="http://schemas.microsoft.com/office/drawing/2014/main" id="{70463921-39DB-B827-F6C4-A1B1971239D3}"/>
-              </a:ext>
-            </a:extLst>
-          </p:cNvPr>
-          <p:cNvPicPr>
-            <a:picLocks noChangeAspect="1"/>
-          </p:cNvPicPr>
-          <p:nvPr/>
-        </p:nvPicPr>
-        <p:blipFill>
-          <a:blip r:embed="rId4">
-            <a:extLst>
-              <a:ext uri="{28A0092B-C50C-407E-A947-70E740481C1C}">
-                <a14:useLocalDpi xmlns:a14="http://schemas.microsoft.com/office/drawing/2010/main" val="0"/>
-              </a:ext>
-            </a:extLst>
-          </a:blip>
-          <a:stretch>
-            <a:fillRect/>
-          </a:stretch>
-        </p:blipFill>
-        <p:spPr>
-          <a:xfrm>
-            <a:off x="3021285" y="2990905"/>
-            <a:ext cx="2828843" cy="438095"/>
-          </a:xfrm>
-          <a:prstGeom prst="rect">
-            <a:avLst/>
-          </a:prstGeom>
-        </p:spPr>
-      </p:pic>
-    </p:spTree>
-    <p:extLst>
-      <p:ext uri="{BB962C8B-B14F-4D97-AF65-F5344CB8AC3E}">
-        <p14:creationId xmlns:p14="http://schemas.microsoft.com/office/powerpoint/2010/main" val="3699569363"/>
-      </p:ext>
-    </p:extLst>
-  </p:cSld>
-  <p:clrMapOvr>
-    <a:masterClrMapping/>
-  </p:clrMapOvr>
 </p:sld>
 </file>
 

--- a/17_03_26_Bleher.pptx
+++ b/17_03_26_Bleher.pptx
@@ -51532,9 +51532,10 @@
           <a:bodyPr/>
           <a:lstStyle/>
           <a:p>
+            <a:pPr algn="ctr"/>
             <a:r>
               <a:rPr lang="de-DE" sz="2800" dirty="0"/>
-              <a:t>RQ 1</a:t>
+              <a:t>1</a:t>
             </a:r>
           </a:p>
         </p:txBody>
@@ -51871,9 +51872,10 @@
           <a:bodyPr/>
           <a:lstStyle/>
           <a:p>
+            <a:pPr algn="ctr"/>
             <a:r>
               <a:rPr lang="de-DE" sz="2800" dirty="0"/>
-              <a:t>RQ 2</a:t>
+              <a:t>2</a:t>
             </a:r>
           </a:p>
         </p:txBody>
